--- a/Presentation/AMIRIS_Progress_Update_Since_Aug27_2026-09-07.pptx
+++ b/Presentation/AMIRIS_Progress_Update_Since_Aug27_2026-09-07.pptx
@@ -6,40 +6,40 @@
   </p:sldMasterIdLst>
   <p:sldIdLst>
     <p:sldId id="256" r:id="rId2"/>
-    <p:sldId id="306" r:id="rId56"/>
-    <p:sldId id="307" r:id="rId57"/>
-    <p:sldId id="278" r:id="rId28"/>
-    <p:sldId id="279" r:id="rId29"/>
-    <p:sldId id="280" r:id="rId30"/>
-    <p:sldId id="281" r:id="rId31"/>
-    <p:sldId id="282" r:id="rId32"/>
-    <p:sldId id="283" r:id="rId33"/>
-    <p:sldId id="284" r:id="rId34"/>
-    <p:sldId id="285" r:id="rId35"/>
-    <p:sldId id="286" r:id="rId36"/>
-    <p:sldId id="287" r:id="rId37"/>
-    <p:sldId id="288" r:id="rId38"/>
-    <p:sldId id="289" r:id="rId39"/>
-    <p:sldId id="290" r:id="rId40"/>
-    <p:sldId id="291" r:id="rId41"/>
-    <p:sldId id="292" r:id="rId42"/>
-    <p:sldId id="293" r:id="rId43"/>
-    <p:sldId id="294" r:id="rId44"/>
-    <p:sldId id="295" r:id="rId45"/>
-    <p:sldId id="296" r:id="rId46"/>
-    <p:sldId id="297" r:id="rId47"/>
-    <p:sldId id="298" r:id="rId48"/>
-    <p:sldId id="299" r:id="rId49"/>
-    <p:sldId id="300" r:id="rId50"/>
-    <p:sldId id="301" r:id="rId51"/>
-    <p:sldId id="302" r:id="rId52"/>
-    <p:sldId id="303" r:id="rId53"/>
-    <p:sldId id="304" r:id="rId54"/>
-    <p:sldId id="305" r:id="rId55"/>
-    <p:sldId id="274" r:id="rId20"/>
-    <p:sldId id="275" r:id="rId21"/>
-    <p:sldId id="276" r:id="rId22"/>
-    <p:sldId id="277" r:id="rId23"/>
+    <p:sldId id="306" r:id="rId3"/>
+    <p:sldId id="307" r:id="rId4"/>
+    <p:sldId id="278" r:id="rId5"/>
+    <p:sldId id="279" r:id="rId6"/>
+    <p:sldId id="280" r:id="rId7"/>
+    <p:sldId id="281" r:id="rId8"/>
+    <p:sldId id="282" r:id="rId9"/>
+    <p:sldId id="283" r:id="rId10"/>
+    <p:sldId id="284" r:id="rId11"/>
+    <p:sldId id="285" r:id="rId12"/>
+    <p:sldId id="286" r:id="rId13"/>
+    <p:sldId id="287" r:id="rId14"/>
+    <p:sldId id="288" r:id="rId15"/>
+    <p:sldId id="289" r:id="rId16"/>
+    <p:sldId id="290" r:id="rId17"/>
+    <p:sldId id="291" r:id="rId18"/>
+    <p:sldId id="292" r:id="rId19"/>
+    <p:sldId id="293" r:id="rId20"/>
+    <p:sldId id="294" r:id="rId21"/>
+    <p:sldId id="295" r:id="rId22"/>
+    <p:sldId id="296" r:id="rId23"/>
+    <p:sldId id="297" r:id="rId24"/>
+    <p:sldId id="298" r:id="rId25"/>
+    <p:sldId id="299" r:id="rId26"/>
+    <p:sldId id="300" r:id="rId27"/>
+    <p:sldId id="301" r:id="rId28"/>
+    <p:sldId id="302" r:id="rId29"/>
+    <p:sldId id="303" r:id="rId30"/>
+    <p:sldId id="304" r:id="rId31"/>
+    <p:sldId id="305" r:id="rId32"/>
+    <p:sldId id="274" r:id="rId33"/>
+    <p:sldId id="275" r:id="rId34"/>
+    <p:sldId id="276" r:id="rId35"/>
+    <p:sldId id="277" r:id="rId36"/>
   </p:sldIdLst>
   <p:sldSz cx="12192000" cy="6858000"/>
   <p:notesSz cx="6858000" cy="9144000"/>
@@ -336,7 +336,7 @@
           <a:p>
             <a:fld id="{5BCAD085-E8A6-8845-BD4E-CB4CCA059FC4}" type="datetimeFigureOut">
               <a:rPr lang="en-US" smtClean="0"/>
-              <a:t>8/26/2026</a:t>
+              <a:t>9/9/2026</a:t>
             </a:fld>
             <a:endParaRPr lang="en-US"/>
           </a:p>
@@ -504,7 +504,7 @@
           <a:p>
             <a:fld id="{5BCAD085-E8A6-8845-BD4E-CB4CCA059FC4}" type="datetimeFigureOut">
               <a:rPr lang="en-US" smtClean="0"/>
-              <a:t>8/26/2026</a:t>
+              <a:t>9/9/2026</a:t>
             </a:fld>
             <a:endParaRPr lang="en-US"/>
           </a:p>
@@ -682,7 +682,7 @@
           <a:p>
             <a:fld id="{5BCAD085-E8A6-8845-BD4E-CB4CCA059FC4}" type="datetimeFigureOut">
               <a:rPr lang="en-US" smtClean="0"/>
-              <a:t>8/26/2026</a:t>
+              <a:t>9/9/2026</a:t>
             </a:fld>
             <a:endParaRPr lang="en-US"/>
           </a:p>
@@ -850,7 +850,7 @@
           <a:p>
             <a:fld id="{5BCAD085-E8A6-8845-BD4E-CB4CCA059FC4}" type="datetimeFigureOut">
               <a:rPr lang="en-US" smtClean="0"/>
-              <a:t>8/26/2026</a:t>
+              <a:t>9/9/2026</a:t>
             </a:fld>
             <a:endParaRPr lang="en-US"/>
           </a:p>
@@ -1095,7 +1095,7 @@
           <a:p>
             <a:fld id="{5BCAD085-E8A6-8845-BD4E-CB4CCA059FC4}" type="datetimeFigureOut">
               <a:rPr lang="en-US" smtClean="0"/>
-              <a:t>8/26/2026</a:t>
+              <a:t>9/9/2026</a:t>
             </a:fld>
             <a:endParaRPr lang="en-US"/>
           </a:p>
@@ -1380,7 +1380,7 @@
           <a:p>
             <a:fld id="{5BCAD085-E8A6-8845-BD4E-CB4CCA059FC4}" type="datetimeFigureOut">
               <a:rPr lang="en-US" smtClean="0"/>
-              <a:t>8/26/2026</a:t>
+              <a:t>9/9/2026</a:t>
             </a:fld>
             <a:endParaRPr lang="en-US"/>
           </a:p>
@@ -1799,7 +1799,7 @@
           <a:p>
             <a:fld id="{5BCAD085-E8A6-8845-BD4E-CB4CCA059FC4}" type="datetimeFigureOut">
               <a:rPr lang="en-US" smtClean="0"/>
-              <a:t>8/26/2026</a:t>
+              <a:t>9/9/2026</a:t>
             </a:fld>
             <a:endParaRPr lang="en-US"/>
           </a:p>
@@ -1916,7 +1916,7 @@
           <a:p>
             <a:fld id="{5BCAD085-E8A6-8845-BD4E-CB4CCA059FC4}" type="datetimeFigureOut">
               <a:rPr lang="en-US" smtClean="0"/>
-              <a:t>8/26/2026</a:t>
+              <a:t>9/9/2026</a:t>
             </a:fld>
             <a:endParaRPr lang="en-US"/>
           </a:p>
@@ -2011,7 +2011,7 @@
           <a:p>
             <a:fld id="{5BCAD085-E8A6-8845-BD4E-CB4CCA059FC4}" type="datetimeFigureOut">
               <a:rPr lang="en-US" smtClean="0"/>
-              <a:t>8/26/2026</a:t>
+              <a:t>9/9/2026</a:t>
             </a:fld>
             <a:endParaRPr lang="en-US"/>
           </a:p>
@@ -2286,7 +2286,7 @@
           <a:p>
             <a:fld id="{5BCAD085-E8A6-8845-BD4E-CB4CCA059FC4}" type="datetimeFigureOut">
               <a:rPr lang="en-US" smtClean="0"/>
-              <a:t>8/26/2026</a:t>
+              <a:t>9/9/2026</a:t>
             </a:fld>
             <a:endParaRPr lang="en-US"/>
           </a:p>
@@ -2538,7 +2538,7 @@
           <a:p>
             <a:fld id="{5BCAD085-E8A6-8845-BD4E-CB4CCA059FC4}" type="datetimeFigureOut">
               <a:rPr lang="en-US" smtClean="0"/>
-              <a:t>8/26/2026</a:t>
+              <a:t>9/9/2026</a:t>
             </a:fld>
             <a:endParaRPr lang="en-US"/>
           </a:p>
@@ -2749,7 +2749,7 @@
           <a:p>
             <a:fld id="{5BCAD085-E8A6-8845-BD4E-CB4CCA059FC4}" type="datetimeFigureOut">
               <a:rPr lang="en-US" smtClean="0"/>
-              <a:t>8/26/2026</a:t>
+              <a:t>9/9/2026</a:t>
             </a:fld>
             <a:endParaRPr lang="en-US"/>
           </a:p>
@@ -3293,8 +3293,8 @@
 </p:sld>
 </file>
 
-<file path=ppt/slides/slide19.xml><?xml version="1.0" encoding="utf-8"?>
-<p:sld xmlns:a="http://schemas.openxmlformats.org/drawingml/2006/main" xmlns:p="http://schemas.openxmlformats.org/presentationml/2006/main" xmlns:r="http://schemas.openxmlformats.org/officeDocument/2006/relationships">
+<file path=ppt/slides/slide10.xml><?xml version="1.0" encoding="utf-8"?>
+<p:sld xmlns:a="http://schemas.openxmlformats.org/drawingml/2006/main" xmlns:r="http://schemas.openxmlformats.org/officeDocument/2006/relationships" xmlns:p="http://schemas.openxmlformats.org/presentationml/2006/main">
   <p:cSld>
     <p:spTree>
       <p:nvGrpSpPr>
@@ -3302,7 +3302,14 @@
         <p:cNvGrpSpPr/>
         <p:nvPr/>
       </p:nvGrpSpPr>
-      <p:grpSpPr/>
+      <p:grpSpPr>
+        <a:xfrm>
+          <a:off x="0" y="0"/>
+          <a:ext cx="0" cy="0"/>
+          <a:chOff x="0" y="0"/>
+          <a:chExt cx="0" cy="0"/>
+        </a:xfrm>
+      </p:grpSpPr>
       <p:sp>
         <p:nvSpPr>
           <p:cNvPr id="2" name="Rectangle 1"/>
@@ -3339,7 +3346,7 @@
           </a:fontRef>
         </p:style>
         <p:txBody>
-          <a:bodyPr rtlCol="0" anchor="ctr" lIns="365760" tIns="73152" wrap="square"/>
+          <a:bodyPr wrap="square" lIns="365760" tIns="73152" rtlCol="0" anchor="ctr"/>
           <a:lstStyle/>
           <a:p>
             <a:pPr algn="ctr">
@@ -3350,19 +3357,7 @@
               </a:defRPr>
             </a:pPr>
             <a:r>
-              <a:t>Out-of-Sample Testing: What We Found</a:t>
-            </a:r>
-          </a:p>
-          <a:p>
-            <a:pPr>
-              <a:defRPr sz="1400">
-                <a:solidFill>
-                  <a:srgbClr val="C8D2DA"/>
-                </a:solidFill>
-              </a:defRPr>
-            </a:pPr>
-            <a:r>
-              <a:t>Using Brainpool's newly-supplied 2027-2029 data file</a:t>
+              <a:t>Testing Every Floor From -500 to +100 EUR/MWh</a:t>
             </a:r>
           </a:p>
         </p:txBody>
@@ -3397,21 +3392,45 @@
               </a:defRPr>
             </a:pPr>
             <a:r>
-              <a:t>4</a:t>
-            </a:r>
-          </a:p>
-        </p:txBody>
-      </p:sp>
-      <p:sp>
-        <p:nvSpPr>
-          <p:cNvPr id="4" name="TextBox 3"/>
+              <a:t>10</a:t>
+            </a:r>
+          </a:p>
+        </p:txBody>
+      </p:sp>
+      <p:pic>
+        <p:nvPicPr>
+          <p:cNvPr id="4" name="Picture 3" descr="floor_sweep_correlation.png"/>
+          <p:cNvPicPr>
+            <a:picLocks noChangeAspect="1"/>
+          </p:cNvPicPr>
+          <p:nvPr/>
+        </p:nvPicPr>
+        <p:blipFill>
+          <a:blip r:embed="rId2"/>
+          <a:stretch>
+            <a:fillRect/>
+          </a:stretch>
+        </p:blipFill>
+        <p:spPr>
+          <a:xfrm>
+            <a:off x="1904460" y="1188720"/>
+            <a:ext cx="8352598" cy="4754880"/>
+          </a:xfrm>
+          <a:prstGeom prst="rect">
+            <a:avLst/>
+          </a:prstGeom>
+        </p:spPr>
+      </p:pic>
+      <p:sp>
+        <p:nvSpPr>
+          <p:cNvPr id="5" name="TextBox 4"/>
           <p:cNvSpPr txBox="1"/>
           <p:nvPr/>
         </p:nvSpPr>
         <p:spPr>
           <a:xfrm>
-            <a:off x="502920" y="1234440"/>
-            <a:ext cx="11155680" cy="5303520"/>
+            <a:off x="457200" y="6172200"/>
+            <a:ext cx="11247120" cy="548640"/>
           </a:xfrm>
           <a:prstGeom prst="rect">
             <a:avLst/>
@@ -3424,123 +3443,15 @@
           </a:bodyPr>
           <a:lstStyle/>
           <a:p>
-            <a:pPr>
-              <a:spcAft>
-                <a:spcPts val="1000"/>
-              </a:spcAft>
-              <a:defRPr sz="1800" b="1">
-                <a:solidFill>
-                  <a:srgbClr val="1E2220"/>
-                </a:solidFill>
-              </a:defRPr>
-            </a:pPr>
-            <a:r>
-              <a:t>•  Built Germany 2028 and 2029 the exact same way as 2027 - zero re-tuning of any setting</a:t>
-            </a:r>
-          </a:p>
-          <a:p>
-            <a:pPr>
-              <a:spcAft>
-                <a:spcPts val="1000"/>
-              </a:spcAft>
-              <a:defRPr sz="1800" b="1">
-                <a:solidFill>
-                  <a:srgbClr val="1E2220"/>
-                </a:solidFill>
-              </a:defRPr>
-            </a:pPr>
-            <a:r>
-              <a:t>•  Goal: does the model still work on years it wasn't built for?</a:t>
-            </a:r>
-          </a:p>
-          <a:p>
-            <a:pPr>
-              <a:spcAft>
-                <a:spcPts val="1000"/>
-              </a:spcAft>
-              <a:defRPr sz="1800" b="1">
-                <a:solidFill>
-                  <a:srgbClr val="1E2220"/>
-                </a:solidFill>
-              </a:defRPr>
-            </a:pPr>
-            <a:r>
-              <a:t>•  Price LEVEL held up well in both new years (average price, average error stayed close)</a:t>
-            </a:r>
-          </a:p>
-          <a:p>
-            <a:pPr>
-              <a:spcAft>
-                <a:spcPts val="1000"/>
-              </a:spcAft>
-              <a:defRPr sz="1800" b="1">
-                <a:solidFill>
-                  <a:srgbClr val="1E2220"/>
-                </a:solidFill>
-              </a:defRPr>
-            </a:pPr>
-            <a:r>
-              <a:t>•  But hour-to-hour matching quality dropped the further from 2027:</a:t>
-            </a:r>
-          </a:p>
-          <a:p>
-            <a:pPr>
-              <a:spcAft>
-                <a:spcPts val="600"/>
-              </a:spcAft>
-              <a:defRPr sz="1600" b="0">
+            <a:pPr algn="ctr">
+              <a:defRPr sz="1300" i="1">
                 <a:solidFill>
                   <a:srgbClr val="5A605C"/>
                 </a:solidFill>
               </a:defRPr>
             </a:pPr>
             <a:r>
-              <a:t>‒  2027 (tuned for): r = 0.647</a:t>
-            </a:r>
-          </a:p>
-          <a:p>
-            <a:pPr>
-              <a:spcAft>
-                <a:spcPts val="600"/>
-              </a:spcAft>
-              <a:defRPr sz="1600" b="0">
-                <a:solidFill>
-                  <a:srgbClr val="5A605C"/>
-                </a:solidFill>
-              </a:defRPr>
-            </a:pPr>
-            <a:r>
-              <a:t>‒  2028 (never tuned for): r = 0.446</a:t>
-            </a:r>
-          </a:p>
-          <a:p>
-            <a:pPr>
-              <a:spcAft>
-                <a:spcPts val="600"/>
-              </a:spcAft>
-              <a:defRPr sz="1600" b="0">
-                <a:solidFill>
-                  <a:srgbClr val="5A605C"/>
-                </a:solidFill>
-              </a:defRPr>
-            </a:pPr>
-            <a:r>
-              <a:t>‒  2029 (never tuned for): r = 0.349</a:t>
-            </a:r>
-          </a:p>
-          <a:p>
-            <a:pPr>
-              <a:spcAft>
-                <a:spcPts val="1000"/>
-              </a:spcAft>
-              <a:defRPr sz="1800" b="1">
-                <a:solidFill>
-                  <a:srgbClr val="1E2220"/>
-                </a:solidFill>
-              </a:defRPr>
-            </a:pPr>
-            <a:r>
-              <a:t>•  This gap became the focus of the next round of investigation</a:t>
+              <a:t>Top: match quality (correlation) barely moves across most of the range, then gets worse. Bottom: average price gap improves toward the floor, then overshoots badly past about +30.</a:t>
             </a:r>
           </a:p>
         </p:txBody>
@@ -3553,8 +3464,8 @@
 </p:sld>
 </file>
 
-<file path=ppt/slides/slide20.xml><?xml version="1.0" encoding="utf-8"?>
-<p:sld xmlns:a="http://schemas.openxmlformats.org/drawingml/2006/main" xmlns:p="http://schemas.openxmlformats.org/presentationml/2006/main" xmlns:r="http://schemas.openxmlformats.org/officeDocument/2006/relationships">
+<file path=ppt/slides/slide11.xml><?xml version="1.0" encoding="utf-8"?>
+<p:sld xmlns:a="http://schemas.openxmlformats.org/drawingml/2006/main" xmlns:r="http://schemas.openxmlformats.org/officeDocument/2006/relationships" xmlns:p="http://schemas.openxmlformats.org/presentationml/2006/main">
   <p:cSld>
     <p:spTree>
       <p:nvGrpSpPr>
@@ -3562,7 +3473,14 @@
         <p:cNvGrpSpPr/>
         <p:nvPr/>
       </p:nvGrpSpPr>
-      <p:grpSpPr/>
+      <p:grpSpPr>
+        <a:xfrm>
+          <a:off x="0" y="0"/>
+          <a:ext cx="0" cy="0"/>
+          <a:chOff x="0" y="0"/>
+          <a:chExt cx="0" cy="0"/>
+        </a:xfrm>
+      </p:grpSpPr>
       <p:sp>
         <p:nvSpPr>
           <p:cNvPr id="2" name="Rectangle 1"/>
@@ -3599,7 +3517,7 @@
           </a:fontRef>
         </p:style>
         <p:txBody>
-          <a:bodyPr rtlCol="0" anchor="ctr" lIns="365760" tIns="73152" wrap="square"/>
+          <a:bodyPr wrap="square" lIns="365760" tIns="73152" rtlCol="0" anchor="ctr"/>
           <a:lstStyle/>
           <a:p>
             <a:pPr algn="ctr">
@@ -3610,7 +3528,19 @@
               </a:defRPr>
             </a:pPr>
             <a:r>
-              <a:t>How We Found the Cause</a:t>
+              <a:t>Result: Confirmed Dead End - Including the Suggested +10 EUR/MWh</a:t>
+            </a:r>
+          </a:p>
+          <a:p>
+            <a:pPr>
+              <a:defRPr sz="1400">
+                <a:solidFill>
+                  <a:srgbClr val="C8D2DA"/>
+                </a:solidFill>
+              </a:defRPr>
+            </a:pPr>
+            <a:r>
+              <a:t>Match-quality score (correlation) for each cap tested - higher is better</a:t>
             </a:r>
           </a:p>
         </p:txBody>
@@ -3645,401 +3575,7 @@
               </a:defRPr>
             </a:pPr>
             <a:r>
-              <a:t>5</a:t>
-            </a:r>
-          </a:p>
-        </p:txBody>
-      </p:sp>
-      <p:pic>
-        <p:nvPicPr>
-          <p:cNvPr id="4" name="Picture 3" descr="chart_weekday_bug.png"/>
-          <p:cNvPicPr>
-            <a:picLocks noChangeAspect="1"/>
-          </p:cNvPicPr>
-          <p:nvPr/>
-        </p:nvPicPr>
-        <p:blipFill>
-          <a:blip r:embed="rId2"/>
-          <a:stretch>
-            <a:fillRect/>
-          </a:stretch>
-        </p:blipFill>
-        <p:spPr>
-          <a:xfrm>
-            <a:off x="1862721" y="1188720"/>
-            <a:ext cx="8436077" cy="4754880"/>
-          </a:xfrm>
-          <a:prstGeom prst="rect">
-            <a:avLst/>
-          </a:prstGeom>
-        </p:spPr>
-      </p:pic>
-      <p:sp>
-        <p:nvSpPr>
-          <p:cNvPr id="5" name="TextBox 4"/>
-          <p:cNvSpPr txBox="1"/>
-          <p:nvPr/>
-        </p:nvSpPr>
-        <p:spPr>
-          <a:xfrm>
-            <a:off x="457200" y="6172200"/>
-            <a:ext cx="11247120" cy="548640"/>
-          </a:xfrm>
-          <a:prstGeom prst="rect">
-            <a:avLst/>
-          </a:prstGeom>
-          <a:noFill/>
-        </p:spPr>
-        <p:txBody>
-          <a:bodyPr wrap="square">
-            <a:spAutoFit/>
-          </a:bodyPr>
-          <a:lstStyle/>
-          <a:p>
-            <a:pPr algn="ctr">
-              <a:defRPr sz="1300" i="1">
-                <a:solidFill>
-                  <a:srgbClr val="5A605C"/>
-                </a:solidFill>
-              </a:defRPr>
-            </a:pPr>
-            <a:r>
-              <a:t>Real electricity demand should be highest on weekdays, lowest on Sunday - our model's 2029 demand had this backwards on two days</a:t>
-            </a:r>
-          </a:p>
-        </p:txBody>
-      </p:sp>
-    </p:spTree>
-  </p:cSld>
-  <p:clrMapOvr>
-    <a:masterClrMapping/>
-  </p:clrMapOvr>
-</p:sld>
-</file>
-
-<file path=ppt/slides/slide21.xml><?xml version="1.0" encoding="utf-8"?>
-<p:sld xmlns:a="http://schemas.openxmlformats.org/drawingml/2006/main" xmlns:p="http://schemas.openxmlformats.org/presentationml/2006/main" xmlns:r="http://schemas.openxmlformats.org/officeDocument/2006/relationships">
-  <p:cSld>
-    <p:spTree>
-      <p:nvGrpSpPr>
-        <p:cNvPr id="1" name=""/>
-        <p:cNvGrpSpPr/>
-        <p:nvPr/>
-      </p:nvGrpSpPr>
-      <p:grpSpPr/>
-      <p:sp>
-        <p:nvSpPr>
-          <p:cNvPr id="2" name="Rectangle 1"/>
-          <p:cNvSpPr/>
-          <p:nvPr/>
-        </p:nvSpPr>
-        <p:spPr>
-          <a:xfrm>
-            <a:off x="0" y="0"/>
-            <a:ext cx="12192000" cy="960120"/>
-          </a:xfrm>
-          <a:prstGeom prst="rect">
-            <a:avLst/>
-          </a:prstGeom>
-          <a:solidFill>
-            <a:srgbClr val="1F3A4D"/>
-          </a:solidFill>
-          <a:ln>
-            <a:noFill/>
-          </a:ln>
-        </p:spPr>
-        <p:style>
-          <a:lnRef idx="1">
-            <a:schemeClr val="accent1"/>
-          </a:lnRef>
-          <a:fillRef idx="3">
-            <a:schemeClr val="accent1"/>
-          </a:fillRef>
-          <a:effectRef idx="2">
-            <a:schemeClr val="accent1"/>
-          </a:effectRef>
-          <a:fontRef idx="minor">
-            <a:schemeClr val="lt1"/>
-          </a:fontRef>
-        </p:style>
-        <p:txBody>
-          <a:bodyPr rtlCol="0" anchor="ctr" lIns="365760" tIns="73152" wrap="square"/>
-          <a:lstStyle/>
-          <a:p>
-            <a:pPr algn="ctr">
-              <a:defRPr sz="2800" b="1">
-                <a:solidFill>
-                  <a:srgbClr val="FFFFFF"/>
-                </a:solidFill>
-              </a:defRPr>
-            </a:pPr>
-            <a:r>
-              <a:t>The Root Cause: A Hidden Calendar Bug</a:t>
-            </a:r>
-          </a:p>
-        </p:txBody>
-      </p:sp>
-      <p:sp>
-        <p:nvSpPr>
-          <p:cNvPr id="3" name="TextBox 2"/>
-          <p:cNvSpPr txBox="1"/>
-          <p:nvPr/>
-        </p:nvSpPr>
-        <p:spPr>
-          <a:xfrm>
-            <a:off x="11551920" y="6446520"/>
-            <a:ext cx="457200" cy="320040"/>
-          </a:xfrm>
-          <a:prstGeom prst="rect">
-            <a:avLst/>
-          </a:prstGeom>
-          <a:noFill/>
-        </p:spPr>
-        <p:txBody>
-          <a:bodyPr wrap="none">
-            <a:spAutoFit/>
-          </a:bodyPr>
-          <a:lstStyle/>
-          <a:p>
-            <a:pPr>
-              <a:defRPr sz="1100">
-                <a:solidFill>
-                  <a:srgbClr val="5A605C"/>
-                </a:solidFill>
-              </a:defRPr>
-            </a:pPr>
-            <a:r>
-              <a:t>6</a:t>
-            </a:r>
-          </a:p>
-        </p:txBody>
-      </p:sp>
-      <p:sp>
-        <p:nvSpPr>
-          <p:cNvPr id="4" name="TextBox 3"/>
-          <p:cNvSpPr txBox="1"/>
-          <p:nvPr/>
-        </p:nvSpPr>
-        <p:spPr>
-          <a:xfrm>
-            <a:off x="502920" y="1234440"/>
-            <a:ext cx="11155680" cy="5303520"/>
-          </a:xfrm>
-          <a:prstGeom prst="rect">
-            <a:avLst/>
-          </a:prstGeom>
-          <a:noFill/>
-        </p:spPr>
-        <p:txBody>
-          <a:bodyPr wrap="square">
-            <a:spAutoFit/>
-          </a:bodyPr>
-          <a:lstStyle/>
-          <a:p>
-            <a:pPr>
-              <a:spcAft>
-                <a:spcPts val="1000"/>
-              </a:spcAft>
-              <a:defRPr sz="1800" b="1">
-                <a:solidFill>
-                  <a:srgbClr val="1E2220"/>
-                </a:solidFill>
-              </a:defRPr>
-            </a:pPr>
-            <a:r>
-              <a:t>•  Our demand shape borrows a real year's usage pattern (2016) and trims it to fit the target year</a:t>
-            </a:r>
-          </a:p>
-          <a:p>
-            <a:pPr>
-              <a:spcAft>
-                <a:spcPts val="1000"/>
-              </a:spcAft>
-              <a:defRPr sz="1800" b="1">
-                <a:solidFill>
-                  <a:srgbClr val="1E2220"/>
-                </a:solidFill>
-              </a:defRPr>
-            </a:pPr>
-            <a:r>
-              <a:t>•  2016 has one extra day (leap year) that must be removed to fit a normal year</a:t>
-            </a:r>
-          </a:p>
-          <a:p>
-            <a:pPr>
-              <a:spcAft>
-                <a:spcPts val="1000"/>
-              </a:spcAft>
-              <a:defRPr sz="1800" b="1">
-                <a:solidFill>
-                  <a:srgbClr val="1E2220"/>
-                </a:solidFill>
-              </a:defRPr>
-            </a:pPr>
-            <a:r>
-              <a:t>•  The extra day removed was February 29th - sitting in the MIDDLE of the year</a:t>
-            </a:r>
-          </a:p>
-          <a:p>
-            <a:pPr>
-              <a:spcAft>
-                <a:spcPts val="1000"/>
-              </a:spcAft>
-              <a:defRPr sz="1800" b="1">
-                <a:solidFill>
-                  <a:srgbClr val="1E2220"/>
-                </a:solidFill>
-              </a:defRPr>
-            </a:pPr>
-            <a:r>
-              <a:t>•  Removing a day from the middle silently shifts every day after it by one weekday, for the rest of the year (10 of 12 months)</a:t>
-            </a:r>
-          </a:p>
-          <a:p>
-            <a:pPr>
-              <a:spcAft>
-                <a:spcPts val="1000"/>
-              </a:spcAft>
-              <a:defRPr sz="1800" b="1">
-                <a:solidFill>
-                  <a:srgbClr val="1E2220"/>
-                </a:solidFill>
-              </a:defRPr>
-            </a:pPr>
-            <a:r>
-              <a:t>•  This bug had been present in our main 2027 model since it was first built - only found now</a:t>
-            </a:r>
-          </a:p>
-          <a:p>
-            <a:pPr>
-              <a:spcAft>
-                <a:spcPts val="1000"/>
-              </a:spcAft>
-              <a:defRPr sz="1800" b="1">
-                <a:solidFill>
-                  <a:srgbClr val="1E2220"/>
-                </a:solidFill>
-              </a:defRPr>
-            </a:pPr>
-            <a:r>
-              <a:t>•  The fix: remove December 31st instead - it sits at the END of the year, so nothing after it is disturbed</a:t>
-            </a:r>
-          </a:p>
-        </p:txBody>
-      </p:sp>
-    </p:spTree>
-  </p:cSld>
-  <p:clrMapOvr>
-    <a:masterClrMapping/>
-  </p:clrMapOvr>
-</p:sld>
-</file>
-
-<file path=ppt/slides/slide22.xml><?xml version="1.0" encoding="utf-8"?>
-<p:sld xmlns:a="http://schemas.openxmlformats.org/drawingml/2006/main" xmlns:p="http://schemas.openxmlformats.org/presentationml/2006/main" xmlns:r="http://schemas.openxmlformats.org/officeDocument/2006/relationships">
-  <p:cSld>
-    <p:spTree>
-      <p:nvGrpSpPr>
-        <p:cNvPr id="1" name=""/>
-        <p:cNvGrpSpPr/>
-        <p:nvPr/>
-      </p:nvGrpSpPr>
-      <p:grpSpPr/>
-      <p:sp>
-        <p:nvSpPr>
-          <p:cNvPr id="2" name="Rectangle 1"/>
-          <p:cNvSpPr/>
-          <p:nvPr/>
-        </p:nvSpPr>
-        <p:spPr>
-          <a:xfrm>
-            <a:off x="0" y="0"/>
-            <a:ext cx="12192000" cy="960120"/>
-          </a:xfrm>
-          <a:prstGeom prst="rect">
-            <a:avLst/>
-          </a:prstGeom>
-          <a:solidFill>
-            <a:srgbClr val="1F3A4D"/>
-          </a:solidFill>
-          <a:ln>
-            <a:noFill/>
-          </a:ln>
-        </p:spPr>
-        <p:style>
-          <a:lnRef idx="1">
-            <a:schemeClr val="accent1"/>
-          </a:lnRef>
-          <a:fillRef idx="3">
-            <a:schemeClr val="accent1"/>
-          </a:fillRef>
-          <a:effectRef idx="2">
-            <a:schemeClr val="accent1"/>
-          </a:effectRef>
-          <a:fontRef idx="minor">
-            <a:schemeClr val="lt1"/>
-          </a:fontRef>
-        </p:style>
-        <p:txBody>
-          <a:bodyPr rtlCol="0" anchor="ctr" lIns="365760" tIns="73152" wrap="square"/>
-          <a:lstStyle/>
-          <a:p>
-            <a:pPr algn="ctr">
-              <a:defRPr sz="2800" b="1">
-                <a:solidFill>
-                  <a:srgbClr val="FFFFFF"/>
-                </a:solidFill>
-              </a:defRPr>
-            </a:pPr>
-            <a:r>
-              <a:t>Result: A Clean, Genuine Improvement</a:t>
-            </a:r>
-          </a:p>
-          <a:p>
-            <a:pPr>
-              <a:defRPr sz="1400">
-                <a:solidFill>
-                  <a:srgbClr val="C8D2DA"/>
-                </a:solidFill>
-              </a:defRPr>
-            </a:pPr>
-            <a:r>
-              <a:t>Both accuracy AND average error improved together, with almost no downside - a genuine bug fix, not a trade-off</a:t>
-            </a:r>
-          </a:p>
-        </p:txBody>
-      </p:sp>
-      <p:sp>
-        <p:nvSpPr>
-          <p:cNvPr id="3" name="TextBox 2"/>
-          <p:cNvSpPr txBox="1"/>
-          <p:nvPr/>
-        </p:nvSpPr>
-        <p:spPr>
-          <a:xfrm>
-            <a:off x="11551920" y="6446520"/>
-            <a:ext cx="457200" cy="320040"/>
-          </a:xfrm>
-          <a:prstGeom prst="rect">
-            <a:avLst/>
-          </a:prstGeom>
-          <a:noFill/>
-        </p:spPr>
-        <p:txBody>
-          <a:bodyPr wrap="none">
-            <a:spAutoFit/>
-          </a:bodyPr>
-          <a:lstStyle/>
-          <a:p>
-            <a:pPr>
-              <a:defRPr sz="1100">
-                <a:solidFill>
-                  <a:srgbClr val="5A605C"/>
-                </a:solidFill>
-              </a:defRPr>
-            </a:pPr>
-            <a:r>
-              <a:t>7</a:t>
+              <a:t>11</a:t>
             </a:r>
           </a:p>
         </p:txBody>
@@ -4053,8 +3589,8 @@
           <p:nvPr/>
         </p:nvGraphicFramePr>
         <p:xfrm>
-          <a:off x="640080" y="1463040"/>
-          <a:ext cx="10789920" cy="3291839"/>
+          <a:off x="640080" y="1371600"/>
+          <a:ext cx="10881357" cy="2514600"/>
         </p:xfrm>
         <a:graphic>
           <a:graphicData uri="http://schemas.openxmlformats.org/drawingml/2006/table">
@@ -4063,23 +3599,49 @@
                 <a:tableStyleId>{5C22544A-7EE6-4342-B048-85BDC9FD1C3A}</a:tableStyleId>
               </a:tblPr>
               <a:tblGrid>
-                <a:gridCol w="4572000"/>
-                <a:gridCol w="3108960"/>
-                <a:gridCol w="3108960"/>
+                <a:gridCol w="3984723">
+                  <a:extLst>
+                    <a:ext uri="{9D8B030D-6E8A-4147-A177-3AD203B41FA5}">
+                      <a16:colId xmlns:a16="http://schemas.microsoft.com/office/drawing/2014/main" val="20000"/>
+                    </a:ext>
+                  </a:extLst>
+                </a:gridCol>
+                <a:gridCol w="2298878">
+                  <a:extLst>
+                    <a:ext uri="{9D8B030D-6E8A-4147-A177-3AD203B41FA5}">
+                      <a16:colId xmlns:a16="http://schemas.microsoft.com/office/drawing/2014/main" val="20001"/>
+                    </a:ext>
+                  </a:extLst>
+                </a:gridCol>
+                <a:gridCol w="2298878">
+                  <a:extLst>
+                    <a:ext uri="{9D8B030D-6E8A-4147-A177-3AD203B41FA5}">
+                      <a16:colId xmlns:a16="http://schemas.microsoft.com/office/drawing/2014/main" val="20002"/>
+                    </a:ext>
+                  </a:extLst>
+                </a:gridCol>
+                <a:gridCol w="2298878">
+                  <a:extLst>
+                    <a:ext uri="{9D8B030D-6E8A-4147-A177-3AD203B41FA5}">
+                      <a16:colId xmlns:a16="http://schemas.microsoft.com/office/drawing/2014/main" val="20003"/>
+                    </a:ext>
+                  </a:extLst>
+                </a:gridCol>
               </a:tblGrid>
-              <a:tr h="548639">
+              <a:tr h="502920">
                 <a:tc>
                   <a:txBody>
                     <a:bodyPr/>
                     <a:lstStyle/>
                     <a:p>
                       <a:pPr algn="ctr">
-                        <a:defRPr b="1" sz="1500">
+                        <a:defRPr sz="1400" b="1">
                           <a:solidFill>
                             <a:srgbClr val="FFFFFF"/>
                           </a:solidFill>
                         </a:defRPr>
                       </a:pPr>
+                      <a:endParaRPr/>
                     </a:p>
                   </a:txBody>
                   <a:tcPr>
@@ -4094,7 +3656,7 @@
                     <a:lstStyle/>
                     <a:p>
                       <a:pPr algn="ctr">
-                        <a:defRPr b="1" sz="1500">
+                        <a:defRPr sz="1400" b="1">
                           <a:solidFill>
                             <a:srgbClr val="FFFFFF"/>
                           </a:solidFill>
@@ -4117,1142 +3679,7 @@
                     <a:lstStyle/>
                     <a:p>
                       <a:pPr algn="ctr">
-                        <a:defRPr b="1" sz="1500">
-                          <a:solidFill>
-                            <a:srgbClr val="FFFFFF"/>
-                          </a:solidFill>
-                        </a:defRPr>
-                      </a:pPr>
-                      <a:r>
-                        <a:t>2029</a:t>
-                      </a:r>
-                    </a:p>
-                  </a:txBody>
-                  <a:tcPr>
-                    <a:solidFill>
-                      <a:srgbClr val="1F3A4D"/>
-                    </a:solidFill>
-                  </a:tcPr>
-                </a:tc>
-              </a:tr>
-              <a:tr h="548639">
-                <a:tc>
-                  <a:txBody>
-                    <a:bodyPr/>
-                    <a:lstStyle/>
-                    <a:p>
-                      <a:pPr algn="ctr">
-                        <a:defRPr sz="1400" b="0">
-                          <a:solidFill>
-                            <a:srgbClr val="1E2220"/>
-                          </a:solidFill>
-                        </a:defRPr>
-                      </a:pPr>
-                      <a:r>
-                        <a:t>Correlation - before fix</a:t>
-                      </a:r>
-                    </a:p>
-                  </a:txBody>
-                  <a:tcPr>
-                    <a:solidFill>
-                      <a:srgbClr val="FFFFFF"/>
-                    </a:solidFill>
-                  </a:tcPr>
-                </a:tc>
-                <a:tc>
-                  <a:txBody>
-                    <a:bodyPr/>
-                    <a:lstStyle/>
-                    <a:p>
-                      <a:pPr algn="ctr">
-                        <a:defRPr sz="1400" b="0">
-                          <a:solidFill>
-                            <a:srgbClr val="1E2220"/>
-                          </a:solidFill>
-                        </a:defRPr>
-                      </a:pPr>
-                      <a:r>
-                        <a:t>0.647</a:t>
-                      </a:r>
-                    </a:p>
-                  </a:txBody>
-                  <a:tcPr>
-                    <a:solidFill>
-                      <a:srgbClr val="FFFFFF"/>
-                    </a:solidFill>
-                  </a:tcPr>
-                </a:tc>
-                <a:tc>
-                  <a:txBody>
-                    <a:bodyPr/>
-                    <a:lstStyle/>
-                    <a:p>
-                      <a:pPr algn="ctr">
-                        <a:defRPr sz="1400" b="0">
-                          <a:solidFill>
-                            <a:srgbClr val="1E2220"/>
-                          </a:solidFill>
-                        </a:defRPr>
-                      </a:pPr>
-                      <a:r>
-                        <a:t>0.349</a:t>
-                      </a:r>
-                    </a:p>
-                  </a:txBody>
-                  <a:tcPr>
-                    <a:solidFill>
-                      <a:srgbClr val="FFFFFF"/>
-                    </a:solidFill>
-                  </a:tcPr>
-                </a:tc>
-              </a:tr>
-              <a:tr h="548639">
-                <a:tc>
-                  <a:txBody>
-                    <a:bodyPr/>
-                    <a:lstStyle/>
-                    <a:p>
-                      <a:pPr algn="ctr">
-                        <a:defRPr sz="1400" b="0">
-                          <a:solidFill>
-                            <a:srgbClr val="1E2220"/>
-                          </a:solidFill>
-                        </a:defRPr>
-                      </a:pPr>
-                      <a:r>
-                        <a:t>Correlation - after fix</a:t>
-                      </a:r>
-                    </a:p>
-                  </a:txBody>
-                  <a:tcPr>
-                    <a:solidFill>
-                      <a:srgbClr val="EEF0E9"/>
-                    </a:solidFill>
-                  </a:tcPr>
-                </a:tc>
-                <a:tc>
-                  <a:txBody>
-                    <a:bodyPr/>
-                    <a:lstStyle/>
-                    <a:p>
-                      <a:pPr algn="ctr">
-                        <a:defRPr sz="1400" b="0">
-                          <a:solidFill>
-                            <a:srgbClr val="1E2220"/>
-                          </a:solidFill>
-                        </a:defRPr>
-                      </a:pPr>
-                      <a:r>
-                        <a:t>0.675</a:t>
-                      </a:r>
-                    </a:p>
-                  </a:txBody>
-                  <a:tcPr>
-                    <a:solidFill>
-                      <a:srgbClr val="EEF0E9"/>
-                    </a:solidFill>
-                  </a:tcPr>
-                </a:tc>
-                <a:tc>
-                  <a:txBody>
-                    <a:bodyPr/>
-                    <a:lstStyle/>
-                    <a:p>
-                      <a:pPr algn="ctr">
-                        <a:defRPr sz="1400" b="0">
-                          <a:solidFill>
-                            <a:srgbClr val="1E2220"/>
-                          </a:solidFill>
-                        </a:defRPr>
-                      </a:pPr>
-                      <a:r>
-                        <a:t>0.446</a:t>
-                      </a:r>
-                    </a:p>
-                  </a:txBody>
-                  <a:tcPr>
-                    <a:solidFill>
-                      <a:srgbClr val="EEF0E9"/>
-                    </a:solidFill>
-                  </a:tcPr>
-                </a:tc>
-              </a:tr>
-              <a:tr h="548639">
-                <a:tc>
-                  <a:txBody>
-                    <a:bodyPr/>
-                    <a:lstStyle/>
-                    <a:p>
-                      <a:pPr algn="ctr">
-                        <a:defRPr sz="1400" b="0">
-                          <a:solidFill>
-                            <a:srgbClr val="1E2220"/>
-                          </a:solidFill>
-                        </a:defRPr>
-                      </a:pPr>
-                      <a:r>
-                        <a:t>Average error - before fix</a:t>
-                      </a:r>
-                    </a:p>
-                  </a:txBody>
-                  <a:tcPr>
-                    <a:solidFill>
-                      <a:srgbClr val="FFFFFF"/>
-                    </a:solidFill>
-                  </a:tcPr>
-                </a:tc>
-                <a:tc>
-                  <a:txBody>
-                    <a:bodyPr/>
-                    <a:lstStyle/>
-                    <a:p>
-                      <a:pPr algn="ctr">
-                        <a:defRPr sz="1400" b="0">
-                          <a:solidFill>
-                            <a:srgbClr val="1E2220"/>
-                          </a:solidFill>
-                        </a:defRPr>
-                      </a:pPr>
-                      <a:r>
-                        <a:t>28.19</a:t>
-                      </a:r>
-                    </a:p>
-                  </a:txBody>
-                  <a:tcPr>
-                    <a:solidFill>
-                      <a:srgbClr val="FFFFFF"/>
-                    </a:solidFill>
-                  </a:tcPr>
-                </a:tc>
-                <a:tc>
-                  <a:txBody>
-                    <a:bodyPr/>
-                    <a:lstStyle/>
-                    <a:p>
-                      <a:pPr algn="ctr">
-                        <a:defRPr sz="1400" b="0">
-                          <a:solidFill>
-                            <a:srgbClr val="1E2220"/>
-                          </a:solidFill>
-                        </a:defRPr>
-                      </a:pPr>
-                      <a:r>
-                        <a:t>29.59</a:t>
-                      </a:r>
-                    </a:p>
-                  </a:txBody>
-                  <a:tcPr>
-                    <a:solidFill>
-                      <a:srgbClr val="FFFFFF"/>
-                    </a:solidFill>
-                  </a:tcPr>
-                </a:tc>
-              </a:tr>
-              <a:tr h="548639">
-                <a:tc>
-                  <a:txBody>
-                    <a:bodyPr/>
-                    <a:lstStyle/>
-                    <a:p>
-                      <a:pPr algn="ctr">
-                        <a:defRPr sz="1400" b="0">
-                          <a:solidFill>
-                            <a:srgbClr val="1E2220"/>
-                          </a:solidFill>
-                        </a:defRPr>
-                      </a:pPr>
-                      <a:r>
-                        <a:t>Average error - after fix</a:t>
-                      </a:r>
-                    </a:p>
-                  </a:txBody>
-                  <a:tcPr>
-                    <a:solidFill>
-                      <a:srgbClr val="EEF0E9"/>
-                    </a:solidFill>
-                  </a:tcPr>
-                </a:tc>
-                <a:tc>
-                  <a:txBody>
-                    <a:bodyPr/>
-                    <a:lstStyle/>
-                    <a:p>
-                      <a:pPr algn="ctr">
-                        <a:defRPr sz="1400" b="0">
-                          <a:solidFill>
-                            <a:srgbClr val="1E2220"/>
-                          </a:solidFill>
-                        </a:defRPr>
-                      </a:pPr>
-                      <a:r>
-                        <a:t>26.91</a:t>
-                      </a:r>
-                    </a:p>
-                  </a:txBody>
-                  <a:tcPr>
-                    <a:solidFill>
-                      <a:srgbClr val="EEF0E9"/>
-                    </a:solidFill>
-                  </a:tcPr>
-                </a:tc>
-                <a:tc>
-                  <a:txBody>
-                    <a:bodyPr/>
-                    <a:lstStyle/>
-                    <a:p>
-                      <a:pPr algn="ctr">
-                        <a:defRPr sz="1400" b="0">
-                          <a:solidFill>
-                            <a:srgbClr val="1E2220"/>
-                          </a:solidFill>
-                        </a:defRPr>
-                      </a:pPr>
-                      <a:r>
-                        <a:t>29.14</a:t>
-                      </a:r>
-                    </a:p>
-                  </a:txBody>
-                  <a:tcPr>
-                    <a:solidFill>
-                      <a:srgbClr val="EEF0E9"/>
-                    </a:solidFill>
-                  </a:tcPr>
-                </a:tc>
-              </a:tr>
-              <a:tr h="548644">
-                <a:tc>
-                  <a:txBody>
-                    <a:bodyPr/>
-                    <a:lstStyle/>
-                    <a:p>
-                      <a:pPr algn="ctr">
                         <a:defRPr sz="1400" b="1">
-                          <a:solidFill>
-                            <a:srgbClr val="1E2220"/>
-                          </a:solidFill>
-                        </a:defRPr>
-                      </a:pPr>
-                      <a:r>
-                        <a:t>Improvement</a:t>
-                      </a:r>
-                    </a:p>
-                  </a:txBody>
-                  <a:tcPr>
-                    <a:solidFill>
-                      <a:srgbClr val="FFFFFF"/>
-                    </a:solidFill>
-                  </a:tcPr>
-                </a:tc>
-                <a:tc>
-                  <a:txBody>
-                    <a:bodyPr/>
-                    <a:lstStyle/>
-                    <a:p>
-                      <a:pPr algn="ctr">
-                        <a:defRPr sz="1400" b="1">
-                          <a:solidFill>
-                            <a:srgbClr val="3A6B47"/>
-                          </a:solidFill>
-                        </a:defRPr>
-                      </a:pPr>
-                      <a:r>
-                        <a:t>Both up together</a:t>
-                      </a:r>
-                    </a:p>
-                  </a:txBody>
-                  <a:tcPr>
-                    <a:solidFill>
-                      <a:srgbClr val="FFFFFF"/>
-                    </a:solidFill>
-                  </a:tcPr>
-                </a:tc>
-                <a:tc>
-                  <a:txBody>
-                    <a:bodyPr/>
-                    <a:lstStyle/>
-                    <a:p>
-                      <a:pPr algn="ctr">
-                        <a:defRPr sz="1400" b="1">
-                          <a:solidFill>
-                            <a:srgbClr val="3A6B47"/>
-                          </a:solidFill>
-                        </a:defRPr>
-                      </a:pPr>
-                      <a:r>
-                        <a:t>Both up together</a:t>
-                      </a:r>
-                    </a:p>
-                  </a:txBody>
-                  <a:tcPr>
-                    <a:solidFill>
-                      <a:srgbClr val="FFFFFF"/>
-                    </a:solidFill>
-                  </a:tcPr>
-                </a:tc>
-              </a:tr>
-            </a:tbl>
-          </a:graphicData>
-        </a:graphic>
-      </p:graphicFrame>
-    </p:spTree>
-  </p:cSld>
-  <p:clrMapOvr>
-    <a:masterClrMapping/>
-  </p:clrMapOvr>
-</p:sld>
-</file>
-
-<file path=ppt/slides/slide23.xml><?xml version="1.0" encoding="utf-8"?>
-<p:sld xmlns:a="http://schemas.openxmlformats.org/drawingml/2006/main" xmlns:p="http://schemas.openxmlformats.org/presentationml/2006/main" xmlns:r="http://schemas.openxmlformats.org/officeDocument/2006/relationships">
-  <p:cSld>
-    <p:spTree>
-      <p:nvGrpSpPr>
-        <p:cNvPr id="1" name=""/>
-        <p:cNvGrpSpPr/>
-        <p:nvPr/>
-      </p:nvGrpSpPr>
-      <p:grpSpPr/>
-      <p:sp>
-        <p:nvSpPr>
-          <p:cNvPr id="2" name="Rectangle 1"/>
-          <p:cNvSpPr/>
-          <p:nvPr/>
-        </p:nvSpPr>
-        <p:spPr>
-          <a:xfrm>
-            <a:off x="0" y="0"/>
-            <a:ext cx="12192000" cy="960120"/>
-          </a:xfrm>
-          <a:prstGeom prst="rect">
-            <a:avLst/>
-          </a:prstGeom>
-          <a:solidFill>
-            <a:srgbClr val="1F3A4D"/>
-          </a:solidFill>
-          <a:ln>
-            <a:noFill/>
-          </a:ln>
-        </p:spPr>
-        <p:style>
-          <a:lnRef idx="1">
-            <a:schemeClr val="accent1"/>
-          </a:lnRef>
-          <a:fillRef idx="3">
-            <a:schemeClr val="accent1"/>
-          </a:fillRef>
-          <a:effectRef idx="2">
-            <a:schemeClr val="accent1"/>
-          </a:effectRef>
-          <a:fontRef idx="minor">
-            <a:schemeClr val="lt1"/>
-          </a:fontRef>
-        </p:style>
-        <p:txBody>
-          <a:bodyPr rtlCol="0" anchor="ctr" lIns="365760" tIns="73152" wrap="square"/>
-          <a:lstStyle/>
-          <a:p>
-            <a:pPr algn="ctr">
-              <a:defRPr sz="2800" b="1">
-                <a:solidFill>
-                  <a:srgbClr val="FFFFFF"/>
-                </a:solidFill>
-              </a:defRPr>
-            </a:pPr>
-            <a:r>
-              <a:t>A Cheaper Idea First: Can We Just Cap How Negative Price Goes?</a:t>
-            </a:r>
-          </a:p>
-          <a:p>
-            <a:pPr>
-              <a:defRPr sz="1400">
-                <a:solidFill>
-                  <a:srgbClr val="C8D2DA"/>
-                </a:solidFill>
-              </a:defRPr>
-            </a:pPr>
-            <a:r>
-              <a:t>A supervisor-suggested quick test, before the bigger investment</a:t>
-            </a:r>
-          </a:p>
-        </p:txBody>
-      </p:sp>
-      <p:sp>
-        <p:nvSpPr>
-          <p:cNvPr id="3" name="TextBox 2"/>
-          <p:cNvSpPr txBox="1"/>
-          <p:nvPr/>
-        </p:nvSpPr>
-        <p:spPr>
-          <a:xfrm>
-            <a:off x="11551920" y="6446520"/>
-            <a:ext cx="457200" cy="320040"/>
-          </a:xfrm>
-          <a:prstGeom prst="rect">
-            <a:avLst/>
-          </a:prstGeom>
-          <a:noFill/>
-        </p:spPr>
-        <p:txBody>
-          <a:bodyPr wrap="none">
-            <a:spAutoFit/>
-          </a:bodyPr>
-          <a:lstStyle/>
-          <a:p>
-            <a:pPr>
-              <a:defRPr sz="1100">
-                <a:solidFill>
-                  <a:srgbClr val="5A605C"/>
-                </a:solidFill>
-              </a:defRPr>
-            </a:pPr>
-            <a:r>
-              <a:t>8</a:t>
-            </a:r>
-          </a:p>
-        </p:txBody>
-      </p:sp>
-      <p:sp>
-        <p:nvSpPr>
-          <p:cNvPr id="4" name="TextBox 3"/>
-          <p:cNvSpPr txBox="1"/>
-          <p:nvPr/>
-        </p:nvSpPr>
-        <p:spPr>
-          <a:xfrm>
-            <a:off x="502920" y="1234440"/>
-            <a:ext cx="11155680" cy="5303520"/>
-          </a:xfrm>
-          <a:prstGeom prst="rect">
-            <a:avLst/>
-          </a:prstGeom>
-          <a:noFill/>
-        </p:spPr>
-        <p:txBody>
-          <a:bodyPr wrap="square">
-            <a:spAutoFit/>
-          </a:bodyPr>
-          <a:lstStyle/>
-          <a:p>
-            <a:pPr>
-              <a:spcAft>
-                <a:spcPts val="1000"/>
-              </a:spcAft>
-              <a:defRPr sz="1800" b="1">
-                <a:solidFill>
-                  <a:srgbClr val="1E2220"/>
-                </a:solidFill>
-              </a:defRPr>
-            </a:pPr>
-            <a:r>
-              <a:t>•  Before committing to the much bigger cross-border export/market-coupling build, tested a smaller idea first</a:t>
-            </a:r>
-          </a:p>
-          <a:p>
-            <a:pPr>
-              <a:spcAft>
-                <a:spcPts val="1000"/>
-              </a:spcAft>
-              <a:defRPr sz="1800" b="1">
-                <a:solidFill>
-                  <a:srgbClr val="1E2220"/>
-                </a:solidFill>
-              </a:defRPr>
-            </a:pPr>
-            <a:r>
-              <a:t>•  Our model reports very negative prices in summer (too much solar/wind) far more often than Brainpool's real forecast does</a:t>
-            </a:r>
-          </a:p>
-          <a:p>
-            <a:pPr>
-              <a:spcAft>
-                <a:spcPts val="1000"/>
-              </a:spcAft>
-              <a:defRPr sz="1800" b="1">
-                <a:solidFill>
-                  <a:srgbClr val="1E2220"/>
-                </a:solidFill>
-              </a:defRPr>
-            </a:pPr>
-            <a:r>
-              <a:t>•  Question: what if we simply limited how negative AMIRIS is allowed to report a price - would that alone close some of the correlation gap?</a:t>
-            </a:r>
-          </a:p>
-          <a:p>
-            <a:pPr>
-              <a:spcAft>
-                <a:spcPts val="1000"/>
-              </a:spcAft>
-              <a:defRPr sz="1800" b="1">
-                <a:solidFill>
-                  <a:srgbClr val="1E2220"/>
-                </a:solidFill>
-              </a:defRPr>
-            </a:pPr>
-            <a:r>
-              <a:t>•  First step: check whether this is even something we can configure</a:t>
-            </a:r>
-          </a:p>
-        </p:txBody>
-      </p:sp>
-    </p:spTree>
-  </p:cSld>
-  <p:clrMapOvr>
-    <a:masterClrMapping/>
-  </p:clrMapOvr>
-</p:sld>
-</file>
-
-<file path=ppt/slides/slide24.xml><?xml version="1.0" encoding="utf-8"?>
-<p:sld xmlns:a="http://schemas.openxmlformats.org/drawingml/2006/main" xmlns:p="http://schemas.openxmlformats.org/presentationml/2006/main" xmlns:r="http://schemas.openxmlformats.org/officeDocument/2006/relationships">
-  <p:cSld>
-    <p:spTree>
-      <p:nvGrpSpPr>
-        <p:cNvPr id="1" name=""/>
-        <p:cNvGrpSpPr/>
-        <p:nvPr/>
-      </p:nvGrpSpPr>
-      <p:grpSpPr/>
-      <p:sp>
-        <p:nvSpPr>
-          <p:cNvPr id="2" name="Rectangle 1"/>
-          <p:cNvSpPr/>
-          <p:nvPr/>
-        </p:nvSpPr>
-        <p:spPr>
-          <a:xfrm>
-            <a:off x="0" y="0"/>
-            <a:ext cx="12192000" cy="960120"/>
-          </a:xfrm>
-          <a:prstGeom prst="rect">
-            <a:avLst/>
-          </a:prstGeom>
-          <a:solidFill>
-            <a:srgbClr val="1F3A4D"/>
-          </a:solidFill>
-          <a:ln>
-            <a:noFill/>
-          </a:ln>
-        </p:spPr>
-        <p:style>
-          <a:lnRef idx="1">
-            <a:schemeClr val="accent1"/>
-          </a:lnRef>
-          <a:fillRef idx="3">
-            <a:schemeClr val="accent1"/>
-          </a:fillRef>
-          <a:effectRef idx="2">
-            <a:schemeClr val="accent1"/>
-          </a:effectRef>
-          <a:fontRef idx="minor">
-            <a:schemeClr val="lt1"/>
-          </a:fontRef>
-        </p:style>
-        <p:txBody>
-          <a:bodyPr rtlCol="0" anchor="ctr" lIns="365760" tIns="73152" wrap="square"/>
-          <a:lstStyle/>
-          <a:p>
-            <a:pPr algn="ctr">
-              <a:defRPr sz="2800" b="1">
-                <a:solidFill>
-                  <a:srgbClr val="FFFFFF"/>
-                </a:solidFill>
-              </a:defRPr>
-            </a:pPr>
-            <a:r>
-              <a:t>What We Found: The Floor Already Exists - Inside AMIRIS Itself</a:t>
-            </a:r>
-          </a:p>
-        </p:txBody>
-      </p:sp>
-      <p:sp>
-        <p:nvSpPr>
-          <p:cNvPr id="3" name="TextBox 2"/>
-          <p:cNvSpPr txBox="1"/>
-          <p:nvPr/>
-        </p:nvSpPr>
-        <p:spPr>
-          <a:xfrm>
-            <a:off x="11551920" y="6446520"/>
-            <a:ext cx="457200" cy="320040"/>
-          </a:xfrm>
-          <a:prstGeom prst="rect">
-            <a:avLst/>
-          </a:prstGeom>
-          <a:noFill/>
-        </p:spPr>
-        <p:txBody>
-          <a:bodyPr wrap="none">
-            <a:spAutoFit/>
-          </a:bodyPr>
-          <a:lstStyle/>
-          <a:p>
-            <a:pPr>
-              <a:defRPr sz="1100">
-                <a:solidFill>
-                  <a:srgbClr val="5A605C"/>
-                </a:solidFill>
-              </a:defRPr>
-            </a:pPr>
-            <a:r>
-              <a:t>9</a:t>
-            </a:r>
-          </a:p>
-        </p:txBody>
-      </p:sp>
-      <p:sp>
-        <p:nvSpPr>
-          <p:cNvPr id="4" name="TextBox 3"/>
-          <p:cNvSpPr txBox="1"/>
-          <p:nvPr/>
-        </p:nvSpPr>
-        <p:spPr>
-          <a:xfrm>
-            <a:off x="502920" y="1234440"/>
-            <a:ext cx="11155680" cy="5303520"/>
-          </a:xfrm>
-          <a:prstGeom prst="rect">
-            <a:avLst/>
-          </a:prstGeom>
-          <a:noFill/>
-        </p:spPr>
-        <p:txBody>
-          <a:bodyPr wrap="square">
-            <a:spAutoFit/>
-          </a:bodyPr>
-          <a:lstStyle/>
-          <a:p>
-            <a:pPr>
-              <a:spcAft>
-                <a:spcPts val="1000"/>
-              </a:spcAft>
-              <a:defRPr sz="1800" b="1">
-                <a:solidFill>
-                  <a:srgbClr val="1E2220"/>
-                </a:solidFill>
-              </a:defRPr>
-            </a:pPr>
-            <a:r>
-              <a:t>•  Opened up AMIRIS's actual underlying program (not just our settings file) to check</a:t>
-            </a:r>
-          </a:p>
-          <a:p>
-            <a:pPr>
-              <a:spcAft>
-                <a:spcPts val="1000"/>
-              </a:spcAft>
-              <a:defRPr sz="1800" b="1">
-                <a:solidFill>
-                  <a:srgbClr val="1E2220"/>
-                </a:solidFill>
-              </a:defRPr>
-            </a:pPr>
-            <a:r>
-              <a:t>•  Found AMIRIS already has a hard limit: -500 EUR/MWh, built directly into the program's core</a:t>
-            </a:r>
-          </a:p>
-          <a:p>
-            <a:pPr>
-              <a:spcAft>
-                <a:spcPts val="1000"/>
-              </a:spcAft>
-              <a:defRPr sz="1800" b="1">
-                <a:solidFill>
-                  <a:srgbClr val="1E2220"/>
-                </a:solidFill>
-              </a:defRPr>
-            </a:pPr>
-            <a:r>
-              <a:t>•  This isn't arbitrary - it matches the real limit used by Europe's actual electricity exchanges</a:t>
-            </a:r>
-          </a:p>
-          <a:p>
-            <a:pPr>
-              <a:spcAft>
-                <a:spcPts val="1000"/>
-              </a:spcAft>
-              <a:defRPr sz="1800" b="1">
-                <a:solidFill>
-                  <a:srgbClr val="1E2220"/>
-                </a:solidFill>
-              </a:defRPr>
-            </a:pPr>
-            <a:r>
-              <a:t>•  It is NOT something we can change from our scenario settings - changing it means editing and rebuilding AMIRIS's own program, a much bigger step</a:t>
-            </a:r>
-          </a:p>
-          <a:p>
-            <a:pPr>
-              <a:spcAft>
-                <a:spcPts val="1000"/>
-              </a:spcAft>
-              <a:defRPr sz="1800" b="1">
-                <a:solidFill>
-                  <a:srgbClr val="1E2220"/>
-                </a:solidFill>
-              </a:defRPr>
-            </a:pPr>
-            <a:r>
-              <a:t>•  So a smaller, faster test was run first: adjust the REPORTED price after the fact, purely to see if a different limit was even worth the bigger effort</a:t>
-            </a:r>
-          </a:p>
-        </p:txBody>
-      </p:sp>
-    </p:spTree>
-  </p:cSld>
-  <p:clrMapOvr>
-    <a:masterClrMapping/>
-  </p:clrMapOvr>
-</p:sld>
-</file>
-
-<file path=ppt/slides/slide25.xml><?xml version="1.0" encoding="utf-8"?>
-<p:sld xmlns:a="http://schemas.openxmlformats.org/drawingml/2006/main" xmlns:p="http://schemas.openxmlformats.org/presentationml/2006/main" xmlns:r="http://schemas.openxmlformats.org/officeDocument/2006/relationships">
-  <p:cSld>
-    <p:spTree>
-      <p:nvGrpSpPr>
-        <p:cNvPr id="1" name=""/>
-        <p:cNvGrpSpPr/>
-        <p:nvPr/>
-      </p:nvGrpSpPr>
-      <p:grpSpPr/>
-      <p:sp>
-        <p:nvSpPr>
-          <p:cNvPr id="2" name="Rectangle 1"/>
-          <p:cNvSpPr/>
-          <p:nvPr/>
-        </p:nvSpPr>
-        <p:spPr>
-          <a:xfrm>
-            <a:off x="0" y="0"/>
-            <a:ext cx="12192000" cy="960120"/>
-          </a:xfrm>
-          <a:prstGeom prst="rect">
-            <a:avLst/>
-          </a:prstGeom>
-          <a:solidFill>
-            <a:srgbClr val="1F3A4D"/>
-          </a:solidFill>
-          <a:ln>
-            <a:noFill/>
-          </a:ln>
-        </p:spPr>
-        <p:style>
-          <a:lnRef idx="1">
-            <a:schemeClr val="accent1"/>
-          </a:lnRef>
-          <a:fillRef idx="3">
-            <a:schemeClr val="accent1"/>
-          </a:fillRef>
-          <a:effectRef idx="2">
-            <a:schemeClr val="accent1"/>
-          </a:effectRef>
-          <a:fontRef idx="minor">
-            <a:schemeClr val="lt1"/>
-          </a:fontRef>
-        </p:style>
-        <p:txBody>
-          <a:bodyPr rtlCol="0" anchor="ctr" lIns="365760" tIns="73152" wrap="square"/>
-          <a:lstStyle/>
-          <a:p>
-            <a:pPr algn="ctr">
-              <a:defRPr sz="2800" b="1">
-                <a:solidFill>
-                  <a:srgbClr val="FFFFFF"/>
-                </a:solidFill>
-              </a:defRPr>
-            </a:pPr>
-            <a:r>
-              <a:t>Testing Every Floor From -500 to +100 EUR/MWh</a:t>
-            </a:r>
-          </a:p>
-        </p:txBody>
-      </p:sp>
-      <p:sp>
-        <p:nvSpPr>
-          <p:cNvPr id="3" name="TextBox 2"/>
-          <p:cNvSpPr txBox="1"/>
-          <p:nvPr/>
-        </p:nvSpPr>
-        <p:spPr>
-          <a:xfrm>
-            <a:off x="11551920" y="6446520"/>
-            <a:ext cx="457200" cy="320040"/>
-          </a:xfrm>
-          <a:prstGeom prst="rect">
-            <a:avLst/>
-          </a:prstGeom>
-          <a:noFill/>
-        </p:spPr>
-        <p:txBody>
-          <a:bodyPr wrap="none">
-            <a:spAutoFit/>
-          </a:bodyPr>
-          <a:lstStyle/>
-          <a:p>
-            <a:pPr>
-              <a:defRPr sz="1100">
-                <a:solidFill>
-                  <a:srgbClr val="5A605C"/>
-                </a:solidFill>
-              </a:defRPr>
-            </a:pPr>
-            <a:r>
-              <a:t>10</a:t>
-            </a:r>
-          </a:p>
-        </p:txBody>
-      </p:sp>
-      <p:pic>
-        <p:nvPicPr>
-          <p:cNvPr id="4" name="Picture 3" descr="floor_sweep_correlation.png"/>
-          <p:cNvPicPr>
-            <a:picLocks noChangeAspect="1"/>
-          </p:cNvPicPr>
-          <p:nvPr/>
-        </p:nvPicPr>
-        <p:blipFill>
-          <a:blip r:embed="rId2"/>
-          <a:stretch>
-            <a:fillRect/>
-          </a:stretch>
-        </p:blipFill>
-        <p:spPr>
-          <a:xfrm>
-            <a:off x="1904460" y="1188720"/>
-            <a:ext cx="8352598" cy="4754880"/>
-          </a:xfrm>
-          <a:prstGeom prst="rect">
-            <a:avLst/>
-          </a:prstGeom>
-        </p:spPr>
-      </p:pic>
-      <p:sp>
-        <p:nvSpPr>
-          <p:cNvPr id="5" name="TextBox 4"/>
-          <p:cNvSpPr txBox="1"/>
-          <p:nvPr/>
-        </p:nvSpPr>
-        <p:spPr>
-          <a:xfrm>
-            <a:off x="457200" y="6172200"/>
-            <a:ext cx="11247120" cy="548640"/>
-          </a:xfrm>
-          <a:prstGeom prst="rect">
-            <a:avLst/>
-          </a:prstGeom>
-          <a:noFill/>
-        </p:spPr>
-        <p:txBody>
-          <a:bodyPr wrap="square">
-            <a:spAutoFit/>
-          </a:bodyPr>
-          <a:lstStyle/>
-          <a:p>
-            <a:pPr algn="ctr">
-              <a:defRPr sz="1300" i="1">
-                <a:solidFill>
-                  <a:srgbClr val="5A605C"/>
-                </a:solidFill>
-              </a:defRPr>
-            </a:pPr>
-            <a:r>
-              <a:t>Top: match quality (correlation) barely moves across most of the range, then gets worse. Bottom: average price gap improves toward the floor, then overshoots badly past about +30.</a:t>
-            </a:r>
-          </a:p>
-        </p:txBody>
-      </p:sp>
-    </p:spTree>
-  </p:cSld>
-  <p:clrMapOvr>
-    <a:masterClrMapping/>
-  </p:clrMapOvr>
-</p:sld>
-</file>
-
-<file path=ppt/slides/slide26.xml><?xml version="1.0" encoding="utf-8"?>
-<p:sld xmlns:a="http://schemas.openxmlformats.org/drawingml/2006/main" xmlns:p="http://schemas.openxmlformats.org/presentationml/2006/main" xmlns:r="http://schemas.openxmlformats.org/officeDocument/2006/relationships">
-  <p:cSld>
-    <p:spTree>
-      <p:nvGrpSpPr>
-        <p:cNvPr id="1" name=""/>
-        <p:cNvGrpSpPr/>
-        <p:nvPr/>
-      </p:nvGrpSpPr>
-      <p:grpSpPr/>
-      <p:sp>
-        <p:nvSpPr>
-          <p:cNvPr id="2" name="Rectangle 1"/>
-          <p:cNvSpPr/>
-          <p:nvPr/>
-        </p:nvSpPr>
-        <p:spPr>
-          <a:xfrm>
-            <a:off x="0" y="0"/>
-            <a:ext cx="12192000" cy="960120"/>
-          </a:xfrm>
-          <a:prstGeom prst="rect">
-            <a:avLst/>
-          </a:prstGeom>
-          <a:solidFill>
-            <a:srgbClr val="1F3A4D"/>
-          </a:solidFill>
-          <a:ln>
-            <a:noFill/>
-          </a:ln>
-        </p:spPr>
-        <p:style>
-          <a:lnRef idx="1">
-            <a:schemeClr val="accent1"/>
-          </a:lnRef>
-          <a:fillRef idx="3">
-            <a:schemeClr val="accent1"/>
-          </a:fillRef>
-          <a:effectRef idx="2">
-            <a:schemeClr val="accent1"/>
-          </a:effectRef>
-          <a:fontRef idx="minor">
-            <a:schemeClr val="lt1"/>
-          </a:fontRef>
-        </p:style>
-        <p:txBody>
-          <a:bodyPr rtlCol="0" anchor="ctr" lIns="365760" tIns="73152" wrap="square"/>
-          <a:lstStyle/>
-          <a:p>
-            <a:pPr algn="ctr">
-              <a:defRPr sz="2800" b="1">
-                <a:solidFill>
-                  <a:srgbClr val="FFFFFF"/>
-                </a:solidFill>
-              </a:defRPr>
-            </a:pPr>
-            <a:r>
-              <a:t>Result: Confirmed Dead End - Including the Suggested +10 EUR/MWh</a:t>
-            </a:r>
-          </a:p>
-          <a:p>
-            <a:pPr>
-              <a:defRPr sz="1400">
-                <a:solidFill>
-                  <a:srgbClr val="C8D2DA"/>
-                </a:solidFill>
-              </a:defRPr>
-            </a:pPr>
-            <a:r>
-              <a:t>Match-quality score (correlation) for each cap tested - higher is better</a:t>
-            </a:r>
-          </a:p>
-        </p:txBody>
-      </p:sp>
-      <p:sp>
-        <p:nvSpPr>
-          <p:cNvPr id="3" name="TextBox 2"/>
-          <p:cNvSpPr txBox="1"/>
-          <p:nvPr/>
-        </p:nvSpPr>
-        <p:spPr>
-          <a:xfrm>
-            <a:off x="11551920" y="6446520"/>
-            <a:ext cx="457200" cy="320040"/>
-          </a:xfrm>
-          <a:prstGeom prst="rect">
-            <a:avLst/>
-          </a:prstGeom>
-          <a:noFill/>
-        </p:spPr>
-        <p:txBody>
-          <a:bodyPr wrap="none">
-            <a:spAutoFit/>
-          </a:bodyPr>
-          <a:lstStyle/>
-          <a:p>
-            <a:pPr>
-              <a:defRPr sz="1100">
-                <a:solidFill>
-                  <a:srgbClr val="5A605C"/>
-                </a:solidFill>
-              </a:defRPr>
-            </a:pPr>
-            <a:r>
-              <a:t>11</a:t>
-            </a:r>
-          </a:p>
-        </p:txBody>
-      </p:sp>
-      <p:graphicFrame>
-        <p:nvGraphicFramePr>
-          <p:cNvPr id="4" name="Table 3"/>
-          <p:cNvGraphicFramePr>
-            <a:graphicFrameLocks noGrp="1"/>
-          </p:cNvGraphicFramePr>
-          <p:nvPr/>
-        </p:nvGraphicFramePr>
-        <p:xfrm>
-          <a:off x="640080" y="1371600"/>
-          <a:ext cx="10881357" cy="2514600"/>
-        </p:xfrm>
-        <a:graphic>
-          <a:graphicData uri="http://schemas.openxmlformats.org/drawingml/2006/table">
-            <a:tbl>
-              <a:tblPr firstRow="1" bandRow="1">
-                <a:tableStyleId>{5C22544A-7EE6-4342-B048-85BDC9FD1C3A}</a:tableStyleId>
-              </a:tblPr>
-              <a:tblGrid>
-                <a:gridCol w="3984723"/>
-                <a:gridCol w="2298878"/>
-                <a:gridCol w="2298878"/>
-                <a:gridCol w="2298878"/>
-              </a:tblGrid>
-              <a:tr h="502920">
-                <a:tc>
-                  <a:txBody>
-                    <a:bodyPr/>
-                    <a:lstStyle/>
-                    <a:p>
-                      <a:pPr algn="ctr">
-                        <a:defRPr b="1" sz="1400">
-                          <a:solidFill>
-                            <a:srgbClr val="FFFFFF"/>
-                          </a:solidFill>
-                        </a:defRPr>
-                      </a:pPr>
-                    </a:p>
-                  </a:txBody>
-                  <a:tcPr>
-                    <a:solidFill>
-                      <a:srgbClr val="1F3A4D"/>
-                    </a:solidFill>
-                  </a:tcPr>
-                </a:tc>
-                <a:tc>
-                  <a:txBody>
-                    <a:bodyPr/>
-                    <a:lstStyle/>
-                    <a:p>
-                      <a:pPr algn="ctr">
-                        <a:defRPr b="1" sz="1400">
-                          <a:solidFill>
-                            <a:srgbClr val="FFFFFF"/>
-                          </a:solidFill>
-                        </a:defRPr>
-                      </a:pPr>
-                      <a:r>
-                        <a:t>2027</a:t>
-                      </a:r>
-                    </a:p>
-                  </a:txBody>
-                  <a:tcPr>
-                    <a:solidFill>
-                      <a:srgbClr val="1F3A4D"/>
-                    </a:solidFill>
-                  </a:tcPr>
-                </a:tc>
-                <a:tc>
-                  <a:txBody>
-                    <a:bodyPr/>
-                    <a:lstStyle/>
-                    <a:p>
-                      <a:pPr algn="ctr">
-                        <a:defRPr b="1" sz="1400">
                           <a:solidFill>
                             <a:srgbClr val="FFFFFF"/>
                           </a:solidFill>
@@ -5275,7 +3702,7 @@
                     <a:lstStyle/>
                     <a:p>
                       <a:pPr algn="ctr">
-                        <a:defRPr b="1" sz="1400">
+                        <a:defRPr sz="1400" b="1">
                           <a:solidFill>
                             <a:srgbClr val="FFFFFF"/>
                           </a:solidFill>
@@ -5292,6 +3719,11 @@
                     </a:solidFill>
                   </a:tcPr>
                 </a:tc>
+                <a:extLst>
+                  <a:ext uri="{0D108BD9-81ED-4DB2-BD59-A6C34878D82A}">
+                    <a16:rowId xmlns:a16="http://schemas.microsoft.com/office/drawing/2014/main" val="10000"/>
+                  </a:ext>
+                </a:extLst>
               </a:tr>
               <a:tr h="502920">
                 <a:tc>
@@ -5386,6 +3818,11 @@
                     </a:solidFill>
                   </a:tcPr>
                 </a:tc>
+                <a:extLst>
+                  <a:ext uri="{0D108BD9-81ED-4DB2-BD59-A6C34878D82A}">
+                    <a16:rowId xmlns:a16="http://schemas.microsoft.com/office/drawing/2014/main" val="10001"/>
+                  </a:ext>
+                </a:extLst>
               </a:tr>
               <a:tr h="502920">
                 <a:tc>
@@ -5480,6 +3917,11 @@
                     </a:solidFill>
                   </a:tcPr>
                 </a:tc>
+                <a:extLst>
+                  <a:ext uri="{0D108BD9-81ED-4DB2-BD59-A6C34878D82A}">
+                    <a16:rowId xmlns:a16="http://schemas.microsoft.com/office/drawing/2014/main" val="10002"/>
+                  </a:ext>
+                </a:extLst>
               </a:tr>
               <a:tr h="502920">
                 <a:tc>
@@ -5574,6 +4016,11 @@
                     </a:solidFill>
                   </a:tcPr>
                 </a:tc>
+                <a:extLst>
+                  <a:ext uri="{0D108BD9-81ED-4DB2-BD59-A6C34878D82A}">
+                    <a16:rowId xmlns:a16="http://schemas.microsoft.com/office/drawing/2014/main" val="10003"/>
+                  </a:ext>
+                </a:extLst>
               </a:tr>
               <a:tr h="502920">
                 <a:tc>
@@ -5668,6 +4115,11 @@
                     </a:solidFill>
                   </a:tcPr>
                 </a:tc>
+                <a:extLst>
+                  <a:ext uri="{0D108BD9-81ED-4DB2-BD59-A6C34878D82A}">
+                    <a16:rowId xmlns:a16="http://schemas.microsoft.com/office/drawing/2014/main" val="10004"/>
+                  </a:ext>
+                </a:extLst>
               </a:tr>
             </a:tbl>
           </a:graphicData>
@@ -5716,8 +4168,8 @@
 </p:sld>
 </file>
 
-<file path=ppt/slides/slide27.xml><?xml version="1.0" encoding="utf-8"?>
-<p:sld xmlns:a="http://schemas.openxmlformats.org/drawingml/2006/main" xmlns:p="http://schemas.openxmlformats.org/presentationml/2006/main" xmlns:r="http://schemas.openxmlformats.org/officeDocument/2006/relationships">
+<file path=ppt/slides/slide12.xml><?xml version="1.0" encoding="utf-8"?>
+<p:sld xmlns:a="http://schemas.openxmlformats.org/drawingml/2006/main" xmlns:r="http://schemas.openxmlformats.org/officeDocument/2006/relationships" xmlns:p="http://schemas.openxmlformats.org/presentationml/2006/main">
   <p:cSld>
     <p:spTree>
       <p:nvGrpSpPr>
@@ -5725,7 +4177,14 @@
         <p:cNvGrpSpPr/>
         <p:nvPr/>
       </p:nvGrpSpPr>
-      <p:grpSpPr/>
+      <p:grpSpPr>
+        <a:xfrm>
+          <a:off x="0" y="0"/>
+          <a:ext cx="0" cy="0"/>
+          <a:chOff x="0" y="0"/>
+          <a:chExt cx="0" cy="0"/>
+        </a:xfrm>
+      </p:grpSpPr>
       <p:sp>
         <p:nvSpPr>
           <p:cNvPr id="2" name="Rectangle 1"/>
@@ -5762,7 +4221,7 @@
           </a:fontRef>
         </p:style>
         <p:txBody>
-          <a:bodyPr rtlCol="0" anchor="ctr" lIns="365760" tIns="73152" wrap="square"/>
+          <a:bodyPr wrap="square" lIns="365760" tIns="73152" rtlCol="0" anchor="ctr"/>
           <a:lstStyle/>
           <a:p>
             <a:pPr algn="ctr">
@@ -5916,8 +4375,8 @@
 </p:sld>
 </file>
 
-<file path=ppt/slides/slide28.xml><?xml version="1.0" encoding="utf-8"?>
-<p:sld xmlns:a="http://schemas.openxmlformats.org/drawingml/2006/main" xmlns:p="http://schemas.openxmlformats.org/presentationml/2006/main" xmlns:r="http://schemas.openxmlformats.org/officeDocument/2006/relationships">
+<file path=ppt/slides/slide13.xml><?xml version="1.0" encoding="utf-8"?>
+<p:sld xmlns:a="http://schemas.openxmlformats.org/drawingml/2006/main" xmlns:r="http://schemas.openxmlformats.org/officeDocument/2006/relationships" xmlns:p="http://schemas.openxmlformats.org/presentationml/2006/main">
   <p:cSld>
     <p:spTree>
       <p:nvGrpSpPr>
@@ -5925,7 +4384,14 @@
         <p:cNvGrpSpPr/>
         <p:nvPr/>
       </p:nvGrpSpPr>
-      <p:grpSpPr/>
+      <p:grpSpPr>
+        <a:xfrm>
+          <a:off x="0" y="0"/>
+          <a:ext cx="0" cy="0"/>
+          <a:chOff x="0" y="0"/>
+          <a:chExt cx="0" cy="0"/>
+        </a:xfrm>
+      </p:grpSpPr>
       <p:sp>
         <p:nvSpPr>
           <p:cNvPr id="2" name="Rectangle 1"/>
@@ -5962,7 +4428,7 @@
           </a:fontRef>
         </p:style>
         <p:txBody>
-          <a:bodyPr rtlCol="0" anchor="ctr" lIns="365760" tIns="73152" wrap="square"/>
+          <a:bodyPr wrap="square" lIns="365760" tIns="73152" rtlCol="0" anchor="ctr"/>
           <a:lstStyle/>
           <a:p>
             <a:pPr algn="ctr">
@@ -6104,8 +4570,8 @@
 </p:sld>
 </file>
 
-<file path=ppt/slides/slide29.xml><?xml version="1.0" encoding="utf-8"?>
-<p:sld xmlns:a="http://schemas.openxmlformats.org/drawingml/2006/main" xmlns:p="http://schemas.openxmlformats.org/presentationml/2006/main" xmlns:r="http://schemas.openxmlformats.org/officeDocument/2006/relationships">
+<file path=ppt/slides/slide14.xml><?xml version="1.0" encoding="utf-8"?>
+<p:sld xmlns:a="http://schemas.openxmlformats.org/drawingml/2006/main" xmlns:r="http://schemas.openxmlformats.org/officeDocument/2006/relationships" xmlns:p="http://schemas.openxmlformats.org/presentationml/2006/main">
   <p:cSld>
     <p:spTree>
       <p:nvGrpSpPr>
@@ -6113,7 +4579,14 @@
         <p:cNvGrpSpPr/>
         <p:nvPr/>
       </p:nvGrpSpPr>
-      <p:grpSpPr/>
+      <p:grpSpPr>
+        <a:xfrm>
+          <a:off x="0" y="0"/>
+          <a:ext cx="0" cy="0"/>
+          <a:chOff x="0" y="0"/>
+          <a:chExt cx="0" cy="0"/>
+        </a:xfrm>
+      </p:grpSpPr>
       <p:sp>
         <p:nvSpPr>
           <p:cNvPr id="2" name="Rectangle 1"/>
@@ -6150,7 +4623,7 @@
           </a:fontRef>
         </p:style>
         <p:txBody>
-          <a:bodyPr rtlCol="0" anchor="ctr" lIns="365760" tIns="73152" wrap="square"/>
+          <a:bodyPr wrap="square" lIns="365760" tIns="73152" rtlCol="0" anchor="ctr"/>
           <a:lstStyle/>
           <a:p>
             <a:pPr algn="ctr">
@@ -6281,6 +4754,7 @@
               </a:defRPr>
             </a:pPr>
             <a:r>
+              <a:rPr dirty="0"/>
               <a:t>•  The new setting made literally no difference to the result, at any point in the year</a:t>
             </a:r>
           </a:p>
@@ -6296,6 +4770,7 @@
               </a:defRPr>
             </a:pPr>
             <a:r>
+              <a:rPr dirty="0"/>
               <a:t>•  Investigated why: the number IS calculated inside the program, but that calculation is never actually connected to the price the plant offers</a:t>
             </a:r>
           </a:p>
@@ -6311,6 +4786,7 @@
               </a:defRPr>
             </a:pPr>
             <a:r>
+              <a:rPr dirty="0"/>
               <a:t>•  So this isn't a trade-off to weigh, like the price cap was - the switch simply isn't wired to anything in our version of the model</a:t>
             </a:r>
           </a:p>
@@ -6326,6 +4802,7 @@
               </a:defRPr>
             </a:pPr>
             <a:r>
+              <a:rPr dirty="0"/>
               <a:t>•  Confirms: the cross-border export/market-coupling build remains the most promising next step</a:t>
             </a:r>
           </a:p>
@@ -6339,8 +4816,8 @@
 </p:sld>
 </file>
 
-<file path=ppt/slides/slide30.xml><?xml version="1.0" encoding="utf-8"?>
-<p:sld xmlns:a="http://schemas.openxmlformats.org/drawingml/2006/main" xmlns:p="http://schemas.openxmlformats.org/presentationml/2006/main" xmlns:r="http://schemas.openxmlformats.org/officeDocument/2006/relationships">
+<file path=ppt/slides/slide15.xml><?xml version="1.0" encoding="utf-8"?>
+<p:sld xmlns:a="http://schemas.openxmlformats.org/drawingml/2006/main" xmlns:r="http://schemas.openxmlformats.org/officeDocument/2006/relationships" xmlns:p="http://schemas.openxmlformats.org/presentationml/2006/main">
   <p:cSld>
     <p:spTree>
       <p:nvGrpSpPr>
@@ -6348,7 +4825,14 @@
         <p:cNvGrpSpPr/>
         <p:nvPr/>
       </p:nvGrpSpPr>
-      <p:grpSpPr/>
+      <p:grpSpPr>
+        <a:xfrm>
+          <a:off x="0" y="0"/>
+          <a:ext cx="0" cy="0"/>
+          <a:chOff x="0" y="0"/>
+          <a:chExt cx="0" cy="0"/>
+        </a:xfrm>
+      </p:grpSpPr>
       <p:sp>
         <p:nvSpPr>
           <p:cNvPr id="2" name="Rectangle 1"/>
@@ -6385,7 +4869,7 @@
           </a:fontRef>
         </p:style>
         <p:txBody>
-          <a:bodyPr rtlCol="0" anchor="ctr" lIns="365760" tIns="73152" wrap="square"/>
+          <a:bodyPr wrap="square" lIns="365760" tIns="73152" rtlCol="0" anchor="ctr"/>
           <a:lstStyle/>
           <a:p>
             <a:pPr algn="ctr">
@@ -6539,8 +5023,8 @@
 </p:sld>
 </file>
 
-<file path=ppt/slides/slide31.xml><?xml version="1.0" encoding="utf-8"?>
-<p:sld xmlns:a="http://schemas.openxmlformats.org/drawingml/2006/main" xmlns:p="http://schemas.openxmlformats.org/presentationml/2006/main" xmlns:r="http://schemas.openxmlformats.org/officeDocument/2006/relationships">
+<file path=ppt/slides/slide16.xml><?xml version="1.0" encoding="utf-8"?>
+<p:sld xmlns:a="http://schemas.openxmlformats.org/drawingml/2006/main" xmlns:r="http://schemas.openxmlformats.org/officeDocument/2006/relationships" xmlns:p="http://schemas.openxmlformats.org/presentationml/2006/main">
   <p:cSld>
     <p:spTree>
       <p:nvGrpSpPr>
@@ -6548,7 +5032,14 @@
         <p:cNvGrpSpPr/>
         <p:nvPr/>
       </p:nvGrpSpPr>
-      <p:grpSpPr/>
+      <p:grpSpPr>
+        <a:xfrm>
+          <a:off x="0" y="0"/>
+          <a:ext cx="0" cy="0"/>
+          <a:chOff x="0" y="0"/>
+          <a:chExt cx="0" cy="0"/>
+        </a:xfrm>
+      </p:grpSpPr>
       <p:sp>
         <p:nvSpPr>
           <p:cNvPr id="2" name="Rectangle 1"/>
@@ -6585,7 +5076,7 @@
           </a:fontRef>
         </p:style>
         <p:txBody>
-          <a:bodyPr rtlCol="0" anchor="ctr" lIns="365760" tIns="73152" wrap="square"/>
+          <a:bodyPr wrap="square" lIns="365760" tIns="73152" rtlCol="0" anchor="ctr"/>
           <a:lstStyle/>
           <a:p>
             <a:pPr algn="ctr">
@@ -6667,10 +5158,34 @@
                 <a:tableStyleId>{5C22544A-7EE6-4342-B048-85BDC9FD1C3A}</a:tableStyleId>
               </a:tblPr>
               <a:tblGrid>
-                <a:gridCol w="2743200"/>
-                <a:gridCol w="3017520"/>
-                <a:gridCol w="2743200"/>
-                <a:gridCol w="2377440"/>
+                <a:gridCol w="2743200">
+                  <a:extLst>
+                    <a:ext uri="{9D8B030D-6E8A-4147-A177-3AD203B41FA5}">
+                      <a16:colId xmlns:a16="http://schemas.microsoft.com/office/drawing/2014/main" val="20000"/>
+                    </a:ext>
+                  </a:extLst>
+                </a:gridCol>
+                <a:gridCol w="3017520">
+                  <a:extLst>
+                    <a:ext uri="{9D8B030D-6E8A-4147-A177-3AD203B41FA5}">
+                      <a16:colId xmlns:a16="http://schemas.microsoft.com/office/drawing/2014/main" val="20001"/>
+                    </a:ext>
+                  </a:extLst>
+                </a:gridCol>
+                <a:gridCol w="2743200">
+                  <a:extLst>
+                    <a:ext uri="{9D8B030D-6E8A-4147-A177-3AD203B41FA5}">
+                      <a16:colId xmlns:a16="http://schemas.microsoft.com/office/drawing/2014/main" val="20002"/>
+                    </a:ext>
+                  </a:extLst>
+                </a:gridCol>
+                <a:gridCol w="2377440">
+                  <a:extLst>
+                    <a:ext uri="{9D8B030D-6E8A-4147-A177-3AD203B41FA5}">
+                      <a16:colId xmlns:a16="http://schemas.microsoft.com/office/drawing/2014/main" val="20003"/>
+                    </a:ext>
+                  </a:extLst>
+                </a:gridCol>
               </a:tblGrid>
               <a:tr h="502920">
                 <a:tc>
@@ -6679,7 +5194,7 @@
                     <a:lstStyle/>
                     <a:p>
                       <a:pPr algn="ctr">
-                        <a:defRPr b="1" sz="1300">
+                        <a:defRPr sz="1300" b="1">
                           <a:solidFill>
                             <a:srgbClr val="FFFFFF"/>
                           </a:solidFill>
@@ -6702,7 +5217,7 @@
                     <a:lstStyle/>
                     <a:p>
                       <a:pPr algn="ctr">
-                        <a:defRPr b="1" sz="1300">
+                        <a:defRPr sz="1300" b="1">
                           <a:solidFill>
                             <a:srgbClr val="FFFFFF"/>
                           </a:solidFill>
@@ -6714,7 +5229,7 @@
                     </a:p>
                     <a:p>
                       <a:pPr algn="ctr">
-                        <a:defRPr b="1" sz="1300">
+                        <a:defRPr sz="1300" b="1">
                           <a:solidFill>
                             <a:srgbClr val="FFFFFF"/>
                           </a:solidFill>
@@ -6737,7 +5252,7 @@
                     <a:lstStyle/>
                     <a:p>
                       <a:pPr algn="ctr">
-                        <a:defRPr b="1" sz="1300">
+                        <a:defRPr sz="1300" b="1">
                           <a:solidFill>
                             <a:srgbClr val="FFFFFF"/>
                           </a:solidFill>
@@ -6760,7 +5275,7 @@
                     <a:lstStyle/>
                     <a:p>
                       <a:pPr algn="ctr">
-                        <a:defRPr b="1" sz="1300">
+                        <a:defRPr sz="1300" b="1">
                           <a:solidFill>
                             <a:srgbClr val="FFFFFF"/>
                           </a:solidFill>
@@ -6777,6 +5292,11 @@
                     </a:solidFill>
                   </a:tcPr>
                 </a:tc>
+                <a:extLst>
+                  <a:ext uri="{0D108BD9-81ED-4DB2-BD59-A6C34878D82A}">
+                    <a16:rowId xmlns:a16="http://schemas.microsoft.com/office/drawing/2014/main" val="10000"/>
+                  </a:ext>
+                </a:extLst>
               </a:tr>
               <a:tr h="502920">
                 <a:tc>
@@ -6871,6 +5391,11 @@
                     </a:solidFill>
                   </a:tcPr>
                 </a:tc>
+                <a:extLst>
+                  <a:ext uri="{0D108BD9-81ED-4DB2-BD59-A6C34878D82A}">
+                    <a16:rowId xmlns:a16="http://schemas.microsoft.com/office/drawing/2014/main" val="10001"/>
+                  </a:ext>
+                </a:extLst>
               </a:tr>
               <a:tr h="502920">
                 <a:tc>
@@ -6965,6 +5490,11 @@
                     </a:solidFill>
                   </a:tcPr>
                 </a:tc>
+                <a:extLst>
+                  <a:ext uri="{0D108BD9-81ED-4DB2-BD59-A6C34878D82A}">
+                    <a16:rowId xmlns:a16="http://schemas.microsoft.com/office/drawing/2014/main" val="10002"/>
+                  </a:ext>
+                </a:extLst>
               </a:tr>
               <a:tr h="502920">
                 <a:tc>
@@ -7059,6 +5589,11 @@
                     </a:solidFill>
                   </a:tcPr>
                 </a:tc>
+                <a:extLst>
+                  <a:ext uri="{0D108BD9-81ED-4DB2-BD59-A6C34878D82A}">
+                    <a16:rowId xmlns:a16="http://schemas.microsoft.com/office/drawing/2014/main" val="10003"/>
+                  </a:ext>
+                </a:extLst>
               </a:tr>
               <a:tr h="502920">
                 <a:tc>
@@ -7153,6 +5688,11 @@
                     </a:solidFill>
                   </a:tcPr>
                 </a:tc>
+                <a:extLst>
+                  <a:ext uri="{0D108BD9-81ED-4DB2-BD59-A6C34878D82A}">
+                    <a16:rowId xmlns:a16="http://schemas.microsoft.com/office/drawing/2014/main" val="10004"/>
+                  </a:ext>
+                </a:extLst>
               </a:tr>
             </a:tbl>
           </a:graphicData>
@@ -7201,8 +5741,8 @@
 </p:sld>
 </file>
 
-<file path=ppt/slides/slide32.xml><?xml version="1.0" encoding="utf-8"?>
-<p:sld xmlns:a="http://schemas.openxmlformats.org/drawingml/2006/main" xmlns:p="http://schemas.openxmlformats.org/presentationml/2006/main" xmlns:r="http://schemas.openxmlformats.org/officeDocument/2006/relationships">
+<file path=ppt/slides/slide17.xml><?xml version="1.0" encoding="utf-8"?>
+<p:sld xmlns:a="http://schemas.openxmlformats.org/drawingml/2006/main" xmlns:r="http://schemas.openxmlformats.org/officeDocument/2006/relationships" xmlns:p="http://schemas.openxmlformats.org/presentationml/2006/main">
   <p:cSld>
     <p:spTree>
       <p:nvGrpSpPr>
@@ -7210,7 +5750,14 @@
         <p:cNvGrpSpPr/>
         <p:nvPr/>
       </p:nvGrpSpPr>
-      <p:grpSpPr/>
+      <p:grpSpPr>
+        <a:xfrm>
+          <a:off x="0" y="0"/>
+          <a:ext cx="0" cy="0"/>
+          <a:chOff x="0" y="0"/>
+          <a:chExt cx="0" cy="0"/>
+        </a:xfrm>
+      </p:grpSpPr>
       <p:sp>
         <p:nvSpPr>
           <p:cNvPr id="2" name="Rectangle 1"/>
@@ -7247,7 +5794,7 @@
           </a:fontRef>
         </p:style>
         <p:txBody>
-          <a:bodyPr rtlCol="0" anchor="ctr" lIns="365760" tIns="73152" wrap="square"/>
+          <a:bodyPr wrap="square" lIns="365760" tIns="73152" rtlCol="0" anchor="ctr"/>
           <a:lstStyle/>
           <a:p>
             <a:pPr algn="ctr">
@@ -7331,6 +5878,7 @@
               </a:defRPr>
             </a:pPr>
             <a:r>
+              <a:rPr dirty="0"/>
               <a:t>•  A real, working lever this time - unlike the last test, changing this setting genuinely changes thousands of hours' prices</a:t>
             </a:r>
           </a:p>
@@ -7346,6 +5894,7 @@
               </a:defRPr>
             </a:pPr>
             <a:r>
+              <a:rPr dirty="0"/>
               <a:t>•  Small, real, consistent wins on secondary measures (average price gap, how often we go negative)</a:t>
             </a:r>
           </a:p>
@@ -7361,6 +5910,7 @@
               </a:defRPr>
             </a:pPr>
             <a:r>
+              <a:rPr dirty="0"/>
               <a:t>•  But on our main trustworthy match-quality score, there is no real improvement at any value tested</a:t>
             </a:r>
           </a:p>
@@ -7376,6 +5926,7 @@
               </a:defRPr>
             </a:pPr>
             <a:r>
+              <a:rPr dirty="0"/>
               <a:t>•  A separate, simpler-looking 'headline' score DID jump around a lot - but not consistently, confirming it was a coincidence of a few specific hours, not genuine improvement (the same trap we've caught before in this project)</a:t>
             </a:r>
           </a:p>
@@ -7391,6 +5942,7 @@
               </a:defRPr>
             </a:pPr>
             <a:r>
+              <a:rPr dirty="0"/>
               <a:t>•  Conclusion: confirmed as a real but limited lever. Cross-border export/market-coupling remains the one significant untested option left</a:t>
             </a:r>
           </a:p>
@@ -7404,8 +5956,8 @@
 </p:sld>
 </file>
 
-<file path=ppt/slides/slide33.xml><?xml version="1.0" encoding="utf-8"?>
-<p:sld xmlns:a="http://schemas.openxmlformats.org/drawingml/2006/main" xmlns:p="http://schemas.openxmlformats.org/presentationml/2006/main" xmlns:r="http://schemas.openxmlformats.org/officeDocument/2006/relationships">
+<file path=ppt/slides/slide18.xml><?xml version="1.0" encoding="utf-8"?>
+<p:sld xmlns:a="http://schemas.openxmlformats.org/drawingml/2006/main" xmlns:r="http://schemas.openxmlformats.org/officeDocument/2006/relationships" xmlns:p="http://schemas.openxmlformats.org/presentationml/2006/main">
   <p:cSld>
     <p:spTree>
       <p:nvGrpSpPr>
@@ -7413,7 +5965,14 @@
         <p:cNvGrpSpPr/>
         <p:nvPr/>
       </p:nvGrpSpPr>
-      <p:grpSpPr/>
+      <p:grpSpPr>
+        <a:xfrm>
+          <a:off x="0" y="0"/>
+          <a:ext cx="0" cy="0"/>
+          <a:chOff x="0" y="0"/>
+          <a:chExt cx="0" cy="0"/>
+        </a:xfrm>
+      </p:grpSpPr>
       <p:sp>
         <p:nvSpPr>
           <p:cNvPr id="2" name="Rectangle 1"/>
@@ -7450,7 +6009,7 @@
           </a:fontRef>
         </p:style>
         <p:txBody>
-          <a:bodyPr rtlCol="0" anchor="ctr" lIns="365760" tIns="73152" wrap="square"/>
+          <a:bodyPr wrap="square" lIns="365760" tIns="73152" rtlCol="0" anchor="ctr"/>
           <a:lstStyle/>
           <a:p>
             <a:pPr algn="ctr">
@@ -7546,6 +6105,7 @@
               </a:defRPr>
             </a:pPr>
             <a:r>
+              <a:rPr dirty="0"/>
               <a:t>•  Every smaller idea we tested (price cap, start-up cost, bidding floor) came up empty or too limited</a:t>
             </a:r>
           </a:p>
@@ -7561,6 +6121,7 @@
               </a:defRPr>
             </a:pPr>
             <a:r>
+              <a:rPr dirty="0"/>
               <a:t>•  The one big lever left untested: let the model properly BUY AND SELL power across the border, not just buy</a:t>
             </a:r>
           </a:p>
@@ -7576,6 +6137,7 @@
               </a:defRPr>
             </a:pPr>
             <a:r>
+              <a:rPr dirty="0"/>
               <a:t>•  AMIRIS has a real, working template for exactly this - a second market 'zone' connected to Germany's own, trading both ways</a:t>
             </a:r>
           </a:p>
@@ -7591,6 +6153,7 @@
               </a:defRPr>
             </a:pPr>
             <a:r>
+              <a:rPr dirty="0"/>
               <a:t>•  Plan: source real data first, build a first working version, then refine it step by step</a:t>
             </a:r>
           </a:p>
@@ -7604,8 +6167,8 @@
 </p:sld>
 </file>
 
-<file path=ppt/slides/slide34.xml><?xml version="1.0" encoding="utf-8"?>
-<p:sld xmlns:a="http://schemas.openxmlformats.org/drawingml/2006/main" xmlns:p="http://schemas.openxmlformats.org/presentationml/2006/main" xmlns:r="http://schemas.openxmlformats.org/officeDocument/2006/relationships">
+<file path=ppt/slides/slide19.xml><?xml version="1.0" encoding="utf-8"?>
+<p:sld xmlns:a="http://schemas.openxmlformats.org/drawingml/2006/main" xmlns:r="http://schemas.openxmlformats.org/officeDocument/2006/relationships" xmlns:p="http://schemas.openxmlformats.org/presentationml/2006/main">
   <p:cSld>
     <p:spTree>
       <p:nvGrpSpPr>
@@ -7613,7 +6176,14 @@
         <p:cNvGrpSpPr/>
         <p:nvPr/>
       </p:nvGrpSpPr>
-      <p:grpSpPr/>
+      <p:grpSpPr>
+        <a:xfrm>
+          <a:off x="0" y="0"/>
+          <a:ext cx="0" cy="0"/>
+          <a:chOff x="0" y="0"/>
+          <a:chExt cx="0" cy="0"/>
+        </a:xfrm>
+      </p:grpSpPr>
       <p:sp>
         <p:nvSpPr>
           <p:cNvPr id="2" name="Rectangle 1"/>
@@ -7650,7 +6220,7 @@
           </a:fontRef>
         </p:style>
         <p:txBody>
-          <a:bodyPr rtlCol="0" anchor="ctr" lIns="365760" tIns="73152" wrap="square"/>
+          <a:bodyPr wrap="square" lIns="365760" tIns="73152" rtlCol="0" anchor="ctr"/>
           <a:lstStyle/>
           <a:p>
             <a:pPr algn="ctr">
@@ -7661,19 +6231,8 @@
               </a:defRPr>
             </a:pPr>
             <a:r>
+              <a:rPr dirty="0"/>
               <a:t>Sourcing Real Data From Scratch for a 'Rest of Europe' Zone</a:t>
-            </a:r>
-          </a:p>
-          <a:p>
-            <a:pPr>
-              <a:defRPr sz="1400">
-                <a:solidFill>
-                  <a:srgbClr val="C8D2DA"/>
-                </a:solidFill>
-              </a:defRPr>
-            </a:pPr>
-            <a:r>
-              <a:t>Nothing invented - every number traced to a real source</a:t>
             </a:r>
           </a:p>
         </p:txBody>
@@ -7722,7 +6281,7 @@
         <p:spPr>
           <a:xfrm>
             <a:off x="502920" y="1234440"/>
-            <a:ext cx="11155680" cy="5303520"/>
+            <a:ext cx="11155680" cy="1456809"/>
           </a:xfrm>
           <a:prstGeom prst="rect">
             <a:avLst/>
@@ -7746,6 +6305,7 @@
               </a:defRPr>
             </a:pPr>
             <a:r>
+              <a:rPr dirty="0"/>
               <a:t>•  Needed: how much power the rest of Europe uses, what it's generated from, and how much can physically flow across the border</a:t>
             </a:r>
           </a:p>
@@ -7761,7 +6321,16 @@
               </a:defRPr>
             </a:pPr>
             <a:r>
-              <a:t>•  Pulled real 2023 figures (demand, power plant types) for Germany's 10 real neighbouring countries from Eurostat</a:t>
+              <a:rPr dirty="0"/>
+              <a:t>•  Pulled real 2023 figures (demand, power plant types) for Germany's 10 real </a:t>
+            </a:r>
+            <a:r>
+              <a:rPr dirty="0" err="1"/>
+              <a:t>neighbouring</a:t>
+            </a:r>
+            <a:r>
+              <a:rPr dirty="0"/>
+              <a:t> countries from Eurostat</a:t>
             </a:r>
           </a:p>
           <a:p>
@@ -7776,22 +6345,8 @@
               </a:defRPr>
             </a:pPr>
             <a:r>
+              <a:rPr dirty="0"/>
               <a:t>•  Pulled real weather-driven wind/solar output the same way we did for Germany's own model</a:t>
-            </a:r>
-          </a:p>
-          <a:p>
-            <a:pPr>
-              <a:spcAft>
-                <a:spcPts val="1000"/>
-              </a:spcAft>
-              <a:defRPr sz="1800" b="1">
-                <a:solidFill>
-                  <a:srgbClr val="1E2220"/>
-                </a:solidFill>
-              </a:defRPr>
-            </a:pPr>
-            <a:r>
-              <a:t>•  Hit a real multi-day outage on Europe's official cross-border data platform partway through - worked around it with an alternative real source, then went back and finished the job once it recovered</a:t>
             </a:r>
           </a:p>
         </p:txBody>
@@ -7804,8 +6359,8 @@
 </p:sld>
 </file>
 
-<file path=ppt/slides/slide35.xml><?xml version="1.0" encoding="utf-8"?>
-<p:sld xmlns:a="http://schemas.openxmlformats.org/drawingml/2006/main" xmlns:p="http://schemas.openxmlformats.org/presentationml/2006/main" xmlns:r="http://schemas.openxmlformats.org/officeDocument/2006/relationships">
+<file path=ppt/slides/slide2.xml><?xml version="1.0" encoding="utf-8"?>
+<p:sld xmlns:a="http://schemas.openxmlformats.org/drawingml/2006/main" xmlns:r="http://schemas.openxmlformats.org/officeDocument/2006/relationships" xmlns:p="http://schemas.openxmlformats.org/presentationml/2006/main">
   <p:cSld>
     <p:spTree>
       <p:nvGrpSpPr>
@@ -7813,7 +6368,14 @@
         <p:cNvGrpSpPr/>
         <p:nvPr/>
       </p:nvGrpSpPr>
-      <p:grpSpPr/>
+      <p:grpSpPr>
+        <a:xfrm>
+          <a:off x="0" y="0"/>
+          <a:ext cx="0" cy="0"/>
+          <a:chOff x="0" y="0"/>
+          <a:chExt cx="0" cy="0"/>
+        </a:xfrm>
+      </p:grpSpPr>
       <p:sp>
         <p:nvSpPr>
           <p:cNvPr id="2" name="Rectangle 1"/>
@@ -7850,7 +6412,7 @@
           </a:fontRef>
         </p:style>
         <p:txBody>
-          <a:bodyPr rtlCol="0" anchor="ctr" lIns="365760" tIns="73152" wrap="square"/>
+          <a:bodyPr wrap="square" lIns="365760" tIns="73152" rtlCol="0" anchor="ctr"/>
           <a:lstStyle/>
           <a:p>
             <a:pPr algn="ctr">
@@ -7861,19 +6423,248 @@
               </a:defRPr>
             </a:pPr>
             <a:r>
+              <a:t>Agenda - Since 27 August</a:t>
+            </a:r>
+          </a:p>
+        </p:txBody>
+      </p:sp>
+      <p:sp>
+        <p:nvSpPr>
+          <p:cNvPr id="3" name="TextBox 2"/>
+          <p:cNvSpPr txBox="1"/>
+          <p:nvPr/>
+        </p:nvSpPr>
+        <p:spPr>
+          <a:xfrm>
+            <a:off x="11551920" y="6446520"/>
+            <a:ext cx="457200" cy="320040"/>
+          </a:xfrm>
+          <a:prstGeom prst="rect">
+            <a:avLst/>
+          </a:prstGeom>
+          <a:noFill/>
+        </p:spPr>
+        <p:txBody>
+          <a:bodyPr wrap="none">
+            <a:spAutoFit/>
+          </a:bodyPr>
+          <a:lstStyle/>
+          <a:p>
+            <a:pPr>
+              <a:defRPr sz="1100">
+                <a:solidFill>
+                  <a:srgbClr val="5A605C"/>
+                </a:solidFill>
+              </a:defRPr>
+            </a:pPr>
+            <a:r>
+              <a:t>2</a:t>
+            </a:r>
+          </a:p>
+        </p:txBody>
+      </p:sp>
+      <p:sp>
+        <p:nvSpPr>
+          <p:cNvPr id="4" name="TextBox 3"/>
+          <p:cNvSpPr txBox="1"/>
+          <p:nvPr/>
+        </p:nvSpPr>
+        <p:spPr>
+          <a:xfrm>
+            <a:off x="502920" y="1234440"/>
+            <a:ext cx="11155680" cy="5303520"/>
+          </a:xfrm>
+          <a:prstGeom prst="rect">
+            <a:avLst/>
+          </a:prstGeom>
+          <a:noFill/>
+        </p:spPr>
+        <p:txBody>
+          <a:bodyPr wrap="square">
+            <a:spAutoFit/>
+          </a:bodyPr>
+          <a:lstStyle/>
+          <a:p>
+            <a:pPr>
+              <a:spcAft>
+                <a:spcPts val="1000"/>
+              </a:spcAft>
+              <a:defRPr sz="1800" b="1">
+                <a:solidFill>
+                  <a:srgbClr val="1E2220"/>
+                </a:solidFill>
+              </a:defRPr>
+            </a:pPr>
+            <a:r>
+              <a:t>•  Quick recap: where we left off</a:t>
+            </a:r>
+          </a:p>
+          <a:p>
+            <a:pPr>
+              <a:spcAft>
+                <a:spcPts val="1000"/>
+              </a:spcAft>
+              <a:defRPr sz="1800" b="1">
+                <a:solidFill>
+                  <a:srgbClr val="1E2220"/>
+                </a:solidFill>
+              </a:defRPr>
+            </a:pPr>
+            <a:r>
+              <a:t>•  Out-of-sample testing and a genuine bug fix</a:t>
+            </a:r>
+          </a:p>
+          <a:p>
+            <a:pPr>
+              <a:spcAft>
+                <a:spcPts val="1000"/>
+              </a:spcAft>
+              <a:defRPr sz="1800" b="1">
+                <a:solidFill>
+                  <a:srgbClr val="1E2220"/>
+                </a:solidFill>
+              </a:defRPr>
+            </a:pPr>
+            <a:r>
+              <a:t>•  Three more ideas tested (price floor, cycling cost, lignite markup)</a:t>
+            </a:r>
+          </a:p>
+          <a:p>
+            <a:pPr>
+              <a:spcAft>
+                <a:spcPts val="1000"/>
+              </a:spcAft>
+              <a:defRPr sz="1800" b="1">
+                <a:solidFill>
+                  <a:srgbClr val="1E2220"/>
+                </a:solidFill>
+              </a:defRPr>
+            </a:pPr>
+            <a:r>
+              <a:t>•  The big build: real cross-border market coupling</a:t>
+            </a:r>
+          </a:p>
+          <a:p>
+            <a:pPr>
+              <a:spcAft>
+                <a:spcPts val="1000"/>
+              </a:spcAft>
+              <a:defRPr sz="1800" b="1">
+                <a:solidFill>
+                  <a:srgbClr val="1E2220"/>
+                </a:solidFill>
+              </a:defRPr>
+            </a:pPr>
+            <a:r>
+              <a:t>•  Extending to 2028 and 2029</a:t>
+            </a:r>
+          </a:p>
+          <a:p>
+            <a:pPr>
+              <a:spcAft>
+                <a:spcPts val="1000"/>
+              </a:spcAft>
+              <a:defRPr sz="1800" b="1">
+                <a:solidFill>
+                  <a:srgbClr val="1E2220"/>
+                </a:solidFill>
+              </a:defRPr>
+            </a:pPr>
+            <a:r>
+              <a:t>•  Chasing the last gap: four more real tests</a:t>
+            </a:r>
+          </a:p>
+          <a:p>
+            <a:pPr>
+              <a:spcAft>
+                <a:spcPts val="1000"/>
+              </a:spcAft>
+              <a:defRPr sz="1800" b="1">
+                <a:solidFill>
+                  <a:srgbClr val="1E2220"/>
+                </a:solidFill>
+              </a:defRPr>
+            </a:pPr>
+            <a:r>
+              <a:t>•  Where we stand now, and next steps</a:t>
+            </a:r>
+          </a:p>
+        </p:txBody>
+      </p:sp>
+    </p:spTree>
+  </p:cSld>
+  <p:clrMapOvr>
+    <a:masterClrMapping/>
+  </p:clrMapOvr>
+</p:sld>
+</file>
+
+<file path=ppt/slides/slide20.xml><?xml version="1.0" encoding="utf-8"?>
+<p:sld xmlns:a="http://schemas.openxmlformats.org/drawingml/2006/main" xmlns:r="http://schemas.openxmlformats.org/officeDocument/2006/relationships" xmlns:p="http://schemas.openxmlformats.org/presentationml/2006/main">
+  <p:cSld>
+    <p:spTree>
+      <p:nvGrpSpPr>
+        <p:cNvPr id="1" name=""/>
+        <p:cNvGrpSpPr/>
+        <p:nvPr/>
+      </p:nvGrpSpPr>
+      <p:grpSpPr>
+        <a:xfrm>
+          <a:off x="0" y="0"/>
+          <a:ext cx="0" cy="0"/>
+          <a:chOff x="0" y="0"/>
+          <a:chExt cx="0" cy="0"/>
+        </a:xfrm>
+      </p:grpSpPr>
+      <p:sp>
+        <p:nvSpPr>
+          <p:cNvPr id="2" name="Rectangle 1"/>
+          <p:cNvSpPr/>
+          <p:nvPr/>
+        </p:nvSpPr>
+        <p:spPr>
+          <a:xfrm>
+            <a:off x="0" y="0"/>
+            <a:ext cx="12192000" cy="960120"/>
+          </a:xfrm>
+          <a:prstGeom prst="rect">
+            <a:avLst/>
+          </a:prstGeom>
+          <a:solidFill>
+            <a:srgbClr val="1F3A4D"/>
+          </a:solidFill>
+          <a:ln>
+            <a:noFill/>
+          </a:ln>
+        </p:spPr>
+        <p:style>
+          <a:lnRef idx="1">
+            <a:schemeClr val="accent1"/>
+          </a:lnRef>
+          <a:fillRef idx="3">
+            <a:schemeClr val="accent1"/>
+          </a:fillRef>
+          <a:effectRef idx="2">
+            <a:schemeClr val="accent1"/>
+          </a:effectRef>
+          <a:fontRef idx="minor">
+            <a:schemeClr val="lt1"/>
+          </a:fontRef>
+        </p:style>
+        <p:txBody>
+          <a:bodyPr wrap="square" lIns="365760" tIns="73152" rtlCol="0" anchor="ctr"/>
+          <a:lstStyle/>
+          <a:p>
+            <a:pPr algn="ctr">
+              <a:defRPr sz="2600" b="1">
+                <a:solidFill>
+                  <a:srgbClr val="FFFFFF"/>
+                </a:solidFill>
+              </a:defRPr>
+            </a:pPr>
+            <a:r>
+              <a:rPr dirty="0"/>
               <a:t>The First Working Two-Way Market</a:t>
-            </a:r>
-          </a:p>
-          <a:p>
-            <a:pPr>
-              <a:defRPr sz="1400">
-                <a:solidFill>
-                  <a:srgbClr val="C8D2DA"/>
-                </a:solidFill>
-              </a:defRPr>
-            </a:pPr>
-            <a:r>
-              <a:t>A real improvement in one measure, a real cost in another - both honestly reported</a:t>
             </a:r>
           </a:p>
         </p:txBody>
@@ -7932,9 +6723,27 @@
                 <a:tableStyleId>{5C22544A-7EE6-4342-B048-85BDC9FD1C3A}</a:tableStyleId>
               </a:tblPr>
               <a:tblGrid>
-                <a:gridCol w="4387645"/>
-                <a:gridCol w="3246857"/>
-                <a:gridCol w="3246857"/>
+                <a:gridCol w="4387645">
+                  <a:extLst>
+                    <a:ext uri="{9D8B030D-6E8A-4147-A177-3AD203B41FA5}">
+                      <a16:colId xmlns:a16="http://schemas.microsoft.com/office/drawing/2014/main" val="20000"/>
+                    </a:ext>
+                  </a:extLst>
+                </a:gridCol>
+                <a:gridCol w="3246857">
+                  <a:extLst>
+                    <a:ext uri="{9D8B030D-6E8A-4147-A177-3AD203B41FA5}">
+                      <a16:colId xmlns:a16="http://schemas.microsoft.com/office/drawing/2014/main" val="20001"/>
+                    </a:ext>
+                  </a:extLst>
+                </a:gridCol>
+                <a:gridCol w="3246857">
+                  <a:extLst>
+                    <a:ext uri="{9D8B030D-6E8A-4147-A177-3AD203B41FA5}">
+                      <a16:colId xmlns:a16="http://schemas.microsoft.com/office/drawing/2014/main" val="20002"/>
+                    </a:ext>
+                  </a:extLst>
+                </a:gridCol>
               </a:tblGrid>
               <a:tr h="502920">
                 <a:tc>
@@ -7943,12 +6752,13 @@
                     <a:lstStyle/>
                     <a:p>
                       <a:pPr algn="ctr">
-                        <a:defRPr b="1" sz="1300">
+                        <a:defRPr sz="1300" b="1">
                           <a:solidFill>
                             <a:srgbClr val="FFFFFF"/>
                           </a:solidFill>
                         </a:defRPr>
                       </a:pPr>
+                      <a:endParaRPr/>
                     </a:p>
                   </a:txBody>
                   <a:tcPr>
@@ -7963,7 +6773,7 @@
                     <a:lstStyle/>
                     <a:p>
                       <a:pPr algn="ctr">
-                        <a:defRPr b="1" sz="1300">
+                        <a:defRPr sz="1300" b="1">
                           <a:solidFill>
                             <a:srgbClr val="FFFFFF"/>
                           </a:solidFill>
@@ -7986,7 +6796,7 @@
                     <a:lstStyle/>
                     <a:p>
                       <a:pPr algn="ctr">
-                        <a:defRPr b="1" sz="1300">
+                        <a:defRPr sz="1300" b="1">
                           <a:solidFill>
                             <a:srgbClr val="FFFFFF"/>
                           </a:solidFill>
@@ -8003,6 +6813,11 @@
                     </a:solidFill>
                   </a:tcPr>
                 </a:tc>
+                <a:extLst>
+                  <a:ext uri="{0D108BD9-81ED-4DB2-BD59-A6C34878D82A}">
+                    <a16:rowId xmlns:a16="http://schemas.microsoft.com/office/drawing/2014/main" val="10000"/>
+                  </a:ext>
+                </a:extLst>
               </a:tr>
               <a:tr h="502920">
                 <a:tc>
@@ -8074,6 +6889,11 @@
                     </a:solidFill>
                   </a:tcPr>
                 </a:tc>
+                <a:extLst>
+                  <a:ext uri="{0D108BD9-81ED-4DB2-BD59-A6C34878D82A}">
+                    <a16:rowId xmlns:a16="http://schemas.microsoft.com/office/drawing/2014/main" val="10001"/>
+                  </a:ext>
+                </a:extLst>
               </a:tr>
               <a:tr h="502920">
                 <a:tc>
@@ -8145,6 +6965,11 @@
                     </a:solidFill>
                   </a:tcPr>
                 </a:tc>
+                <a:extLst>
+                  <a:ext uri="{0D108BD9-81ED-4DB2-BD59-A6C34878D82A}">
+                    <a16:rowId xmlns:a16="http://schemas.microsoft.com/office/drawing/2014/main" val="10002"/>
+                  </a:ext>
+                </a:extLst>
               </a:tr>
             </a:tbl>
           </a:graphicData>
@@ -8193,8 +7018,8 @@
 </p:sld>
 </file>
 
-<file path=ppt/slides/slide36.xml><?xml version="1.0" encoding="utf-8"?>
-<p:sld xmlns:a="http://schemas.openxmlformats.org/drawingml/2006/main" xmlns:p="http://schemas.openxmlformats.org/presentationml/2006/main" xmlns:r="http://schemas.openxmlformats.org/officeDocument/2006/relationships">
+<file path=ppt/slides/slide21.xml><?xml version="1.0" encoding="utf-8"?>
+<p:sld xmlns:a="http://schemas.openxmlformats.org/drawingml/2006/main" xmlns:r="http://schemas.openxmlformats.org/officeDocument/2006/relationships" xmlns:p="http://schemas.openxmlformats.org/presentationml/2006/main">
   <p:cSld>
     <p:spTree>
       <p:nvGrpSpPr>
@@ -8202,7 +7027,14 @@
         <p:cNvGrpSpPr/>
         <p:nvPr/>
       </p:nvGrpSpPr>
-      <p:grpSpPr/>
+      <p:grpSpPr>
+        <a:xfrm>
+          <a:off x="0" y="0"/>
+          <a:ext cx="0" cy="0"/>
+          <a:chOff x="0" y="0"/>
+          <a:chExt cx="0" cy="0"/>
+        </a:xfrm>
+      </p:grpSpPr>
       <p:sp>
         <p:nvSpPr>
           <p:cNvPr id="2" name="Rectangle 1"/>
@@ -8239,7 +7071,7 @@
           </a:fontRef>
         </p:style>
         <p:txBody>
-          <a:bodyPr rtlCol="0" anchor="ctr" lIns="365760" tIns="73152" wrap="square"/>
+          <a:bodyPr wrap="square" lIns="365760" tIns="73152" rtlCol="0" anchor="ctr"/>
           <a:lstStyle/>
           <a:p>
             <a:pPr algn="ctr">
@@ -8393,8 +7225,8 @@
 </p:sld>
 </file>
 
-<file path=ppt/slides/slide37.xml><?xml version="1.0" encoding="utf-8"?>
-<p:sld xmlns:a="http://schemas.openxmlformats.org/drawingml/2006/main" xmlns:p="http://schemas.openxmlformats.org/presentationml/2006/main" xmlns:r="http://schemas.openxmlformats.org/officeDocument/2006/relationships">
+<file path=ppt/slides/slide22.xml><?xml version="1.0" encoding="utf-8"?>
+<p:sld xmlns:a="http://schemas.openxmlformats.org/drawingml/2006/main" xmlns:r="http://schemas.openxmlformats.org/officeDocument/2006/relationships" xmlns:p="http://schemas.openxmlformats.org/presentationml/2006/main">
   <p:cSld>
     <p:spTree>
       <p:nvGrpSpPr>
@@ -8402,7 +7234,14 @@
         <p:cNvGrpSpPr/>
         <p:nvPr/>
       </p:nvGrpSpPr>
-      <p:grpSpPr/>
+      <p:grpSpPr>
+        <a:xfrm>
+          <a:off x="0" y="0"/>
+          <a:ext cx="0" cy="0"/>
+          <a:chOff x="0" y="0"/>
+          <a:chExt cx="0" cy="0"/>
+        </a:xfrm>
+      </p:grpSpPr>
       <p:sp>
         <p:nvSpPr>
           <p:cNvPr id="2" name="Rectangle 1"/>
@@ -8439,7 +7278,7 @@
           </a:fontRef>
         </p:style>
         <p:txBody>
-          <a:bodyPr rtlCol="0" anchor="ctr" lIns="365760" tIns="73152" wrap="square"/>
+          <a:bodyPr wrap="square" lIns="365760" tIns="73152" rtlCol="0" anchor="ctr"/>
           <a:lstStyle/>
           <a:p>
             <a:pPr algn="ctr">
@@ -8640,8 +7479,8 @@
 </p:sld>
 </file>
 
-<file path=ppt/slides/slide38.xml><?xml version="1.0" encoding="utf-8"?>
-<p:sld xmlns:a="http://schemas.openxmlformats.org/drawingml/2006/main" xmlns:p="http://schemas.openxmlformats.org/presentationml/2006/main" xmlns:r="http://schemas.openxmlformats.org/officeDocument/2006/relationships">
+<file path=ppt/slides/slide23.xml><?xml version="1.0" encoding="utf-8"?>
+<p:sld xmlns:a="http://schemas.openxmlformats.org/drawingml/2006/main" xmlns:r="http://schemas.openxmlformats.org/officeDocument/2006/relationships" xmlns:p="http://schemas.openxmlformats.org/presentationml/2006/main">
   <p:cSld>
     <p:spTree>
       <p:nvGrpSpPr>
@@ -8649,7 +7488,14 @@
         <p:cNvGrpSpPr/>
         <p:nvPr/>
       </p:nvGrpSpPr>
-      <p:grpSpPr/>
+      <p:grpSpPr>
+        <a:xfrm>
+          <a:off x="0" y="0"/>
+          <a:ext cx="0" cy="0"/>
+          <a:chOff x="0" y="0"/>
+          <a:chExt cx="0" cy="0"/>
+        </a:xfrm>
+      </p:grpSpPr>
       <p:sp>
         <p:nvSpPr>
           <p:cNvPr id="2" name="Rectangle 1"/>
@@ -8686,7 +7532,7 @@
           </a:fontRef>
         </p:style>
         <p:txBody>
-          <a:bodyPr rtlCol="0" anchor="ctr" lIns="365760" tIns="73152" wrap="square"/>
+          <a:bodyPr wrap="square" lIns="365760" tIns="73152" rtlCol="0" anchor="ctr"/>
           <a:lstStyle/>
           <a:p>
             <a:pPr algn="ctr">
@@ -8768,9 +7614,27 @@
                 <a:tableStyleId>{5C22544A-7EE6-4342-B048-85BDC9FD1C3A}</a:tableStyleId>
               </a:tblPr>
               <a:tblGrid>
-                <a:gridCol w="4738656"/>
-                <a:gridCol w="3071351"/>
-                <a:gridCol w="3071351"/>
+                <a:gridCol w="4738656">
+                  <a:extLst>
+                    <a:ext uri="{9D8B030D-6E8A-4147-A177-3AD203B41FA5}">
+                      <a16:colId xmlns:a16="http://schemas.microsoft.com/office/drawing/2014/main" val="20000"/>
+                    </a:ext>
+                  </a:extLst>
+                </a:gridCol>
+                <a:gridCol w="3071351">
+                  <a:extLst>
+                    <a:ext uri="{9D8B030D-6E8A-4147-A177-3AD203B41FA5}">
+                      <a16:colId xmlns:a16="http://schemas.microsoft.com/office/drawing/2014/main" val="20001"/>
+                    </a:ext>
+                  </a:extLst>
+                </a:gridCol>
+                <a:gridCol w="3071351">
+                  <a:extLst>
+                    <a:ext uri="{9D8B030D-6E8A-4147-A177-3AD203B41FA5}">
+                      <a16:colId xmlns:a16="http://schemas.microsoft.com/office/drawing/2014/main" val="20002"/>
+                    </a:ext>
+                  </a:extLst>
+                </a:gridCol>
               </a:tblGrid>
               <a:tr h="502920">
                 <a:tc>
@@ -8779,12 +7643,13 @@
                     <a:lstStyle/>
                     <a:p>
                       <a:pPr algn="ctr">
-                        <a:defRPr b="1" sz="1300">
+                        <a:defRPr sz="1300" b="1">
                           <a:solidFill>
                             <a:srgbClr val="FFFFFF"/>
                           </a:solidFill>
                         </a:defRPr>
                       </a:pPr>
+                      <a:endParaRPr/>
                     </a:p>
                   </a:txBody>
                   <a:tcPr>
@@ -8799,7 +7664,7 @@
                     <a:lstStyle/>
                     <a:p>
                       <a:pPr algn="ctr">
-                        <a:defRPr b="1" sz="1300">
+                        <a:defRPr sz="1300" b="1">
                           <a:solidFill>
                             <a:srgbClr val="FFFFFF"/>
                           </a:solidFill>
@@ -8822,7 +7687,7 @@
                     <a:lstStyle/>
                     <a:p>
                       <a:pPr algn="ctr">
-                        <a:defRPr b="1" sz="1300">
+                        <a:defRPr sz="1300" b="1">
                           <a:solidFill>
                             <a:srgbClr val="FFFFFF"/>
                           </a:solidFill>
@@ -8839,6 +7704,11 @@
                     </a:solidFill>
                   </a:tcPr>
                 </a:tc>
+                <a:extLst>
+                  <a:ext uri="{0D108BD9-81ED-4DB2-BD59-A6C34878D82A}">
+                    <a16:rowId xmlns:a16="http://schemas.microsoft.com/office/drawing/2014/main" val="10000"/>
+                  </a:ext>
+                </a:extLst>
               </a:tr>
               <a:tr h="502920">
                 <a:tc>
@@ -8910,6 +7780,11 @@
                     </a:solidFill>
                   </a:tcPr>
                 </a:tc>
+                <a:extLst>
+                  <a:ext uri="{0D108BD9-81ED-4DB2-BD59-A6C34878D82A}">
+                    <a16:rowId xmlns:a16="http://schemas.microsoft.com/office/drawing/2014/main" val="10001"/>
+                  </a:ext>
+                </a:extLst>
               </a:tr>
               <a:tr h="502920">
                 <a:tc>
@@ -8981,6 +7856,11 @@
                     </a:solidFill>
                   </a:tcPr>
                 </a:tc>
+                <a:extLst>
+                  <a:ext uri="{0D108BD9-81ED-4DB2-BD59-A6C34878D82A}">
+                    <a16:rowId xmlns:a16="http://schemas.microsoft.com/office/drawing/2014/main" val="10002"/>
+                  </a:ext>
+                </a:extLst>
               </a:tr>
               <a:tr h="502920">
                 <a:tc>
@@ -9052,6 +7932,11 @@
                     </a:solidFill>
                   </a:tcPr>
                 </a:tc>
+                <a:extLst>
+                  <a:ext uri="{0D108BD9-81ED-4DB2-BD59-A6C34878D82A}">
+                    <a16:rowId xmlns:a16="http://schemas.microsoft.com/office/drawing/2014/main" val="10003"/>
+                  </a:ext>
+                </a:extLst>
               </a:tr>
             </a:tbl>
           </a:graphicData>
@@ -9100,8 +7985,8 @@
 </p:sld>
 </file>
 
-<file path=ppt/slides/slide39.xml><?xml version="1.0" encoding="utf-8"?>
-<p:sld xmlns:a="http://schemas.openxmlformats.org/drawingml/2006/main" xmlns:p="http://schemas.openxmlformats.org/presentationml/2006/main" xmlns:r="http://schemas.openxmlformats.org/officeDocument/2006/relationships">
+<file path=ppt/slides/slide24.xml><?xml version="1.0" encoding="utf-8"?>
+<p:sld xmlns:a="http://schemas.openxmlformats.org/drawingml/2006/main" xmlns:r="http://schemas.openxmlformats.org/officeDocument/2006/relationships" xmlns:p="http://schemas.openxmlformats.org/presentationml/2006/main">
   <p:cSld>
     <p:spTree>
       <p:nvGrpSpPr>
@@ -9109,7 +7994,14 @@
         <p:cNvGrpSpPr/>
         <p:nvPr/>
       </p:nvGrpSpPr>
-      <p:grpSpPr/>
+      <p:grpSpPr>
+        <a:xfrm>
+          <a:off x="0" y="0"/>
+          <a:ext cx="0" cy="0"/>
+          <a:chOff x="0" y="0"/>
+          <a:chExt cx="0" cy="0"/>
+        </a:xfrm>
+      </p:grpSpPr>
       <p:sp>
         <p:nvSpPr>
           <p:cNvPr id="2" name="Rectangle 1"/>
@@ -9146,7 +8038,7 @@
           </a:fontRef>
         </p:style>
         <p:txBody>
-          <a:bodyPr rtlCol="0" anchor="ctr" lIns="365760" tIns="73152" wrap="square"/>
+          <a:bodyPr wrap="square" lIns="365760" tIns="73152" rtlCol="0" anchor="ctr"/>
           <a:lstStyle/>
           <a:p>
             <a:pPr algn="ctr">
@@ -9218,7 +8110,7 @@
         <p:spPr>
           <a:xfrm>
             <a:off x="502920" y="1234440"/>
-            <a:ext cx="11155680" cy="5303520"/>
+            <a:ext cx="11155680" cy="1862048"/>
           </a:xfrm>
           <a:prstGeom prst="rect">
             <a:avLst/>
@@ -9242,7 +8134,8 @@
               </a:defRPr>
             </a:pPr>
             <a:r>
-              <a:t>•  That '+26.85' number looked like a real step backwards - checked it properly rather than taking it at face value</a:t>
+              <a:rPr dirty="0"/>
+              <a:t>•  That '+26.85' number looked like a real step backwards</a:t>
             </a:r>
           </a:p>
           <a:p>
@@ -9257,6 +8150,7 @@
               </a:defRPr>
             </a:pPr>
             <a:r>
+              <a:rPr dirty="0"/>
               <a:t>•  Found: 88% of that gap comes from just a handful of extreme 'ran out of power' hours</a:t>
             </a:r>
           </a:p>
@@ -9272,6 +8166,7 @@
               </a:defRPr>
             </a:pPr>
             <a:r>
+              <a:rPr dirty="0"/>
               <a:t>•  On ordinary days (99%+ of the year), all three years - 2027, 2028, 2029 - are excellent and remarkably consistent</a:t>
             </a:r>
           </a:p>
@@ -9287,6 +8182,7 @@
               </a:defRPr>
             </a:pPr>
             <a:r>
+              <a:rPr dirty="0"/>
               <a:t>•  The real, narrower issue: those extreme hours are becoming more frequent the further we get from our home year (2027)</a:t>
             </a:r>
           </a:p>
@@ -9300,8 +8196,8 @@
 </p:sld>
 </file>
 
-<file path=ppt/slides/slide40.xml><?xml version="1.0" encoding="utf-8"?>
-<p:sld xmlns:a="http://schemas.openxmlformats.org/drawingml/2006/main" xmlns:p="http://schemas.openxmlformats.org/presentationml/2006/main" xmlns:r="http://schemas.openxmlformats.org/officeDocument/2006/relationships">
+<file path=ppt/slides/slide25.xml><?xml version="1.0" encoding="utf-8"?>
+<p:sld xmlns:a="http://schemas.openxmlformats.org/drawingml/2006/main" xmlns:r="http://schemas.openxmlformats.org/officeDocument/2006/relationships" xmlns:p="http://schemas.openxmlformats.org/presentationml/2006/main">
   <p:cSld>
     <p:spTree>
       <p:nvGrpSpPr>
@@ -9309,7 +8205,14 @@
         <p:cNvGrpSpPr/>
         <p:nvPr/>
       </p:nvGrpSpPr>
-      <p:grpSpPr/>
+      <p:grpSpPr>
+        <a:xfrm>
+          <a:off x="0" y="0"/>
+          <a:ext cx="0" cy="0"/>
+          <a:chOff x="0" y="0"/>
+          <a:chExt cx="0" cy="0"/>
+        </a:xfrm>
+      </p:grpSpPr>
       <p:sp>
         <p:nvSpPr>
           <p:cNvPr id="2" name="Rectangle 1"/>
@@ -9346,7 +8249,7 @@
           </a:fontRef>
         </p:style>
         <p:txBody>
-          <a:bodyPr rtlCol="0" anchor="ctr" lIns="365760" tIns="73152" wrap="square"/>
+          <a:bodyPr wrap="square" lIns="365760" tIns="73152" rtlCol="0" anchor="ctr"/>
           <a:lstStyle/>
           <a:p>
             <a:pPr algn="ctr">
@@ -9357,19 +8260,8 @@
               </a:defRPr>
             </a:pPr>
             <a:r>
+              <a:rPr dirty="0"/>
               <a:t>Chasing That Gap: Two Honest Dead Ends</a:t>
-            </a:r>
-          </a:p>
-          <a:p>
-            <a:pPr>
-              <a:defRPr sz="1400">
-                <a:solidFill>
-                  <a:srgbClr val="C8D2DA"/>
-                </a:solidFill>
-              </a:defRPr>
-            </a:pPr>
-            <a:r>
-              <a:t>Two well-reasoned ideas, tested properly, both honestly ruled out</a:t>
             </a:r>
           </a:p>
         </p:txBody>
@@ -9442,6 +8334,7 @@
               </a:defRPr>
             </a:pPr>
             <a:r>
+              <a:rPr dirty="0"/>
               <a:t>•  Idea 1: scale up the border capacity to keep pace with Germany's own growth - tested directly, did not fix it, made one year worse</a:t>
             </a:r>
           </a:p>
@@ -9457,6 +8350,7 @@
               </a:defRPr>
             </a:pPr>
             <a:r>
+              <a:rPr dirty="0"/>
               <a:t>•  Idea 2: check a specific setting inside AMIRIS's own coupling engine - opened up the real program code and found that setting was already unlimited, not the cause</a:t>
             </a:r>
           </a:p>
@@ -9472,6 +8366,7 @@
               </a:defRPr>
             </a:pPr>
             <a:r>
+              <a:rPr dirty="0"/>
               <a:t>•  Found one real, unexplained clue instead: Germany's import during these rare hours stays suspiciously flat no matter how much extra capacity is available</a:t>
             </a:r>
           </a:p>
@@ -9487,6 +8382,7 @@
               </a:defRPr>
             </a:pPr>
             <a:r>
+              <a:rPr dirty="0"/>
               <a:t>•  Getting to the exact cause would need to edit and rebuild AMIRIS's own program - a bigger step, not yet taken</a:t>
             </a:r>
           </a:p>
@@ -9500,8 +8396,8 @@
 </p:sld>
 </file>
 
-<file path=ppt/slides/slide41.xml><?xml version="1.0" encoding="utf-8"?>
-<p:sld xmlns:a="http://schemas.openxmlformats.org/drawingml/2006/main" xmlns:p="http://schemas.openxmlformats.org/presentationml/2006/main" xmlns:r="http://schemas.openxmlformats.org/officeDocument/2006/relationships">
+<file path=ppt/slides/slide26.xml><?xml version="1.0" encoding="utf-8"?>
+<p:sld xmlns:a="http://schemas.openxmlformats.org/drawingml/2006/main" xmlns:r="http://schemas.openxmlformats.org/officeDocument/2006/relationships" xmlns:p="http://schemas.openxmlformats.org/presentationml/2006/main">
   <p:cSld>
     <p:spTree>
       <p:nvGrpSpPr>
@@ -9509,7 +8405,14 @@
         <p:cNvGrpSpPr/>
         <p:nvPr/>
       </p:nvGrpSpPr>
-      <p:grpSpPr/>
+      <p:grpSpPr>
+        <a:xfrm>
+          <a:off x="0" y="0"/>
+          <a:ext cx="0" cy="0"/>
+          <a:chOff x="0" y="0"/>
+          <a:chExt cx="0" cy="0"/>
+        </a:xfrm>
+      </p:grpSpPr>
       <p:sp>
         <p:nvSpPr>
           <p:cNvPr id="2" name="Rectangle 1"/>
@@ -9546,7 +8449,7 @@
           </a:fontRef>
         </p:style>
         <p:txBody>
-          <a:bodyPr rtlCol="0" anchor="ctr" lIns="365760" tIns="73152" wrap="square"/>
+          <a:bodyPr wrap="square" lIns="365760" tIns="73152" rtlCol="0" anchor="ctr"/>
           <a:lstStyle/>
           <a:p>
             <a:pPr algn="ctr">
@@ -9628,10 +8531,34 @@
                 <a:tableStyleId>{5C22544A-7EE6-4342-B048-85BDC9FD1C3A}</a:tableStyleId>
               </a:tblPr>
               <a:tblGrid>
-                <a:gridCol w="4080509"/>
-                <a:gridCol w="2266950"/>
-                <a:gridCol w="2266950"/>
-                <a:gridCol w="2266950"/>
+                <a:gridCol w="4080509">
+                  <a:extLst>
+                    <a:ext uri="{9D8B030D-6E8A-4147-A177-3AD203B41FA5}">
+                      <a16:colId xmlns:a16="http://schemas.microsoft.com/office/drawing/2014/main" val="20000"/>
+                    </a:ext>
+                  </a:extLst>
+                </a:gridCol>
+                <a:gridCol w="2266950">
+                  <a:extLst>
+                    <a:ext uri="{9D8B030D-6E8A-4147-A177-3AD203B41FA5}">
+                      <a16:colId xmlns:a16="http://schemas.microsoft.com/office/drawing/2014/main" val="20001"/>
+                    </a:ext>
+                  </a:extLst>
+                </a:gridCol>
+                <a:gridCol w="2266950">
+                  <a:extLst>
+                    <a:ext uri="{9D8B030D-6E8A-4147-A177-3AD203B41FA5}">
+                      <a16:colId xmlns:a16="http://schemas.microsoft.com/office/drawing/2014/main" val="20002"/>
+                    </a:ext>
+                  </a:extLst>
+                </a:gridCol>
+                <a:gridCol w="2266950">
+                  <a:extLst>
+                    <a:ext uri="{9D8B030D-6E8A-4147-A177-3AD203B41FA5}">
+                      <a16:colId xmlns:a16="http://schemas.microsoft.com/office/drawing/2014/main" val="20003"/>
+                    </a:ext>
+                  </a:extLst>
+                </a:gridCol>
               </a:tblGrid>
               <a:tr h="502920">
                 <a:tc>
@@ -9640,12 +8567,13 @@
                     <a:lstStyle/>
                     <a:p>
                       <a:pPr algn="ctr">
-                        <a:defRPr b="1" sz="1300">
+                        <a:defRPr sz="1300" b="1">
                           <a:solidFill>
                             <a:srgbClr val="FFFFFF"/>
                           </a:solidFill>
                         </a:defRPr>
                       </a:pPr>
+                      <a:endParaRPr/>
                     </a:p>
                   </a:txBody>
                   <a:tcPr>
@@ -9660,7 +8588,7 @@
                     <a:lstStyle/>
                     <a:p>
                       <a:pPr algn="ctr">
-                        <a:defRPr b="1" sz="1300">
+                        <a:defRPr sz="1300" b="1">
                           <a:solidFill>
                             <a:srgbClr val="FFFFFF"/>
                           </a:solidFill>
@@ -9683,7 +8611,7 @@
                     <a:lstStyle/>
                     <a:p>
                       <a:pPr algn="ctr">
-                        <a:defRPr b="1" sz="1300">
+                        <a:defRPr sz="1300" b="1">
                           <a:solidFill>
                             <a:srgbClr val="FFFFFF"/>
                           </a:solidFill>
@@ -9706,7 +8634,7 @@
                     <a:lstStyle/>
                     <a:p>
                       <a:pPr algn="ctr">
-                        <a:defRPr b="1" sz="1300">
+                        <a:defRPr sz="1300" b="1">
                           <a:solidFill>
                             <a:srgbClr val="FFFFFF"/>
                           </a:solidFill>
@@ -9723,6 +8651,11 @@
                     </a:solidFill>
                   </a:tcPr>
                 </a:tc>
+                <a:extLst>
+                  <a:ext uri="{0D108BD9-81ED-4DB2-BD59-A6C34878D82A}">
+                    <a16:rowId xmlns:a16="http://schemas.microsoft.com/office/drawing/2014/main" val="10000"/>
+                  </a:ext>
+                </a:extLst>
               </a:tr>
               <a:tr h="502920">
                 <a:tc>
@@ -9817,6 +8750,11 @@
                     </a:solidFill>
                   </a:tcPr>
                 </a:tc>
+                <a:extLst>
+                  <a:ext uri="{0D108BD9-81ED-4DB2-BD59-A6C34878D82A}">
+                    <a16:rowId xmlns:a16="http://schemas.microsoft.com/office/drawing/2014/main" val="10001"/>
+                  </a:ext>
+                </a:extLst>
               </a:tr>
               <a:tr h="502920">
                 <a:tc>
@@ -9911,6 +8849,11 @@
                     </a:solidFill>
                   </a:tcPr>
                 </a:tc>
+                <a:extLst>
+                  <a:ext uri="{0D108BD9-81ED-4DB2-BD59-A6C34878D82A}">
+                    <a16:rowId xmlns:a16="http://schemas.microsoft.com/office/drawing/2014/main" val="10002"/>
+                  </a:ext>
+                </a:extLst>
               </a:tr>
               <a:tr h="502920">
                 <a:tc>
@@ -10005,6 +8948,11 @@
                     </a:solidFill>
                   </a:tcPr>
                 </a:tc>
+                <a:extLst>
+                  <a:ext uri="{0D108BD9-81ED-4DB2-BD59-A6C34878D82A}">
+                    <a16:rowId xmlns:a16="http://schemas.microsoft.com/office/drawing/2014/main" val="10003"/>
+                  </a:ext>
+                </a:extLst>
               </a:tr>
             </a:tbl>
           </a:graphicData>
@@ -10040,6 +8988,7 @@
               </a:defRPr>
             </a:pPr>
             <a:r>
+              <a:rPr dirty="0"/>
               <a:t>Strong, consistent match quality and excellent ordinary-day accuracy across all three years - the core result stands. The one real, still-open gap is the rising frequency of extreme hours the further a year is from 2027.</a:t>
             </a:r>
           </a:p>
@@ -10053,8 +9002,8 @@
 </p:sld>
 </file>
 
-<file path=ppt/slides/slide42.xml><?xml version="1.0" encoding="utf-8"?>
-<p:sld xmlns:a="http://schemas.openxmlformats.org/drawingml/2006/main" xmlns:p="http://schemas.openxmlformats.org/presentationml/2006/main" xmlns:r="http://schemas.openxmlformats.org/officeDocument/2006/relationships">
+<file path=ppt/slides/slide27.xml><?xml version="1.0" encoding="utf-8"?>
+<p:sld xmlns:a="http://schemas.openxmlformats.org/drawingml/2006/main" xmlns:r="http://schemas.openxmlformats.org/officeDocument/2006/relationships" xmlns:p="http://schemas.openxmlformats.org/presentationml/2006/main">
   <p:cSld>
     <p:spTree>
       <p:nvGrpSpPr>
@@ -10062,7 +9011,14 @@
         <p:cNvGrpSpPr/>
         <p:nvPr/>
       </p:nvGrpSpPr>
-      <p:grpSpPr/>
+      <p:grpSpPr>
+        <a:xfrm>
+          <a:off x="0" y="0"/>
+          <a:ext cx="0" cy="0"/>
+          <a:chOff x="0" y="0"/>
+          <a:chExt cx="0" cy="0"/>
+        </a:xfrm>
+      </p:grpSpPr>
       <p:sp>
         <p:nvSpPr>
           <p:cNvPr id="2" name="Rectangle 1"/>
@@ -10099,7 +9055,7 @@
           </a:fontRef>
         </p:style>
         <p:txBody>
-          <a:bodyPr rtlCol="0" anchor="ctr" lIns="365760" tIns="73152" wrap="square"/>
+          <a:bodyPr wrap="square" lIns="365760" tIns="73152" rtlCol="0" anchor="ctr"/>
           <a:lstStyle/>
           <a:p>
             <a:pPr algn="ctr">
@@ -10110,6 +9066,7 @@
               </a:defRPr>
             </a:pPr>
             <a:r>
+              <a:rPr dirty="0"/>
               <a:t>One More Lead: Could the Other Side's Own Storage Explain the Gap?</a:t>
             </a:r>
           </a:p>
@@ -10122,6 +9079,7 @@
               </a:defRPr>
             </a:pPr>
             <a:r>
+              <a:rPr dirty="0"/>
               <a:t>A real, testable idea - checked and ruled out</a:t>
             </a:r>
           </a:p>
@@ -10253,8 +9211,8 @@
 </p:sld>
 </file>
 
-<file path=ppt/slides/slide43.xml><?xml version="1.0" encoding="utf-8"?>
-<p:sld xmlns:a="http://schemas.openxmlformats.org/drawingml/2006/main" xmlns:p="http://schemas.openxmlformats.org/presentationml/2006/main" xmlns:r="http://schemas.openxmlformats.org/officeDocument/2006/relationships">
+<file path=ppt/slides/slide28.xml><?xml version="1.0" encoding="utf-8"?>
+<p:sld xmlns:a="http://schemas.openxmlformats.org/drawingml/2006/main" xmlns:r="http://schemas.openxmlformats.org/officeDocument/2006/relationships" xmlns:p="http://schemas.openxmlformats.org/presentationml/2006/main">
   <p:cSld>
     <p:spTree>
       <p:nvGrpSpPr>
@@ -10262,7 +9220,14 @@
         <p:cNvGrpSpPr/>
         <p:nvPr/>
       </p:nvGrpSpPr>
-      <p:grpSpPr/>
+      <p:grpSpPr>
+        <a:xfrm>
+          <a:off x="0" y="0"/>
+          <a:ext cx="0" cy="0"/>
+          <a:chOff x="0" y="0"/>
+          <a:chExt cx="0" cy="0"/>
+        </a:xfrm>
+      </p:grpSpPr>
       <p:sp>
         <p:nvSpPr>
           <p:cNvPr id="2" name="Rectangle 1"/>
@@ -10299,7 +9264,7 @@
           </a:fontRef>
         </p:style>
         <p:txBody>
-          <a:bodyPr rtlCol="0" anchor="ctr" lIns="365760" tIns="73152" wrap="square"/>
+          <a:bodyPr wrap="square" lIns="365760" tIns="73152" rtlCol="0" anchor="ctr"/>
           <a:lstStyle/>
           <a:p>
             <a:pPr algn="ctr">
@@ -10438,8 +9403,8 @@
 </p:sld>
 </file>
 
-<file path=ppt/slides/slide44.xml><?xml version="1.0" encoding="utf-8"?>
-<p:sld xmlns:a="http://schemas.openxmlformats.org/drawingml/2006/main" xmlns:p="http://schemas.openxmlformats.org/presentationml/2006/main" xmlns:r="http://schemas.openxmlformats.org/officeDocument/2006/relationships">
+<file path=ppt/slides/slide29.xml><?xml version="1.0" encoding="utf-8"?>
+<p:sld xmlns:a="http://schemas.openxmlformats.org/drawingml/2006/main" xmlns:r="http://schemas.openxmlformats.org/officeDocument/2006/relationships" xmlns:p="http://schemas.openxmlformats.org/presentationml/2006/main">
   <p:cSld>
     <p:spTree>
       <p:nvGrpSpPr>
@@ -10447,7 +9412,14 @@
         <p:cNvGrpSpPr/>
         <p:nvPr/>
       </p:nvGrpSpPr>
-      <p:grpSpPr/>
+      <p:grpSpPr>
+        <a:xfrm>
+          <a:off x="0" y="0"/>
+          <a:ext cx="0" cy="0"/>
+          <a:chOff x="0" y="0"/>
+          <a:chExt cx="0" cy="0"/>
+        </a:xfrm>
+      </p:grpSpPr>
       <p:sp>
         <p:nvSpPr>
           <p:cNvPr id="2" name="Rectangle 1"/>
@@ -10484,7 +9456,7 @@
           </a:fontRef>
         </p:style>
         <p:txBody>
-          <a:bodyPr rtlCol="0" anchor="ctr" lIns="365760" tIns="73152" wrap="square"/>
+          <a:bodyPr wrap="square" lIns="365760" tIns="73152" rtlCol="0" anchor="ctr"/>
           <a:lstStyle/>
           <a:p>
             <a:pPr algn="ctr">
@@ -10566,9 +9538,27 @@
                 <a:tableStyleId>{5C22544A-7EE6-4342-B048-85BDC9FD1C3A}</a:tableStyleId>
               </a:tblPr>
               <a:tblGrid>
-                <a:gridCol w="4385025"/>
-                <a:gridCol w="3248167"/>
-                <a:gridCol w="3248167"/>
+                <a:gridCol w="4385025">
+                  <a:extLst>
+                    <a:ext uri="{9D8B030D-6E8A-4147-A177-3AD203B41FA5}">
+                      <a16:colId xmlns:a16="http://schemas.microsoft.com/office/drawing/2014/main" val="20000"/>
+                    </a:ext>
+                  </a:extLst>
+                </a:gridCol>
+                <a:gridCol w="3248167">
+                  <a:extLst>
+                    <a:ext uri="{9D8B030D-6E8A-4147-A177-3AD203B41FA5}">
+                      <a16:colId xmlns:a16="http://schemas.microsoft.com/office/drawing/2014/main" val="20001"/>
+                    </a:ext>
+                  </a:extLst>
+                </a:gridCol>
+                <a:gridCol w="3248167">
+                  <a:extLst>
+                    <a:ext uri="{9D8B030D-6E8A-4147-A177-3AD203B41FA5}">
+                      <a16:colId xmlns:a16="http://schemas.microsoft.com/office/drawing/2014/main" val="20002"/>
+                    </a:ext>
+                  </a:extLst>
+                </a:gridCol>
               </a:tblGrid>
               <a:tr h="502920">
                 <a:tc>
@@ -10577,12 +9567,13 @@
                     <a:lstStyle/>
                     <a:p>
                       <a:pPr algn="ctr">
-                        <a:defRPr b="1" sz="1300">
+                        <a:defRPr sz="1300" b="1">
                           <a:solidFill>
                             <a:srgbClr val="FFFFFF"/>
                           </a:solidFill>
                         </a:defRPr>
                       </a:pPr>
+                      <a:endParaRPr/>
                     </a:p>
                   </a:txBody>
                   <a:tcPr>
@@ -10597,7 +9588,7 @@
                     <a:lstStyle/>
                     <a:p>
                       <a:pPr algn="ctr">
-                        <a:defRPr b="1" sz="1300">
+                        <a:defRPr sz="1300" b="1">
                           <a:solidFill>
                             <a:srgbClr val="FFFFFF"/>
                           </a:solidFill>
@@ -10620,7 +9611,7 @@
                     <a:lstStyle/>
                     <a:p>
                       <a:pPr algn="ctr">
-                        <a:defRPr b="1" sz="1300">
+                        <a:defRPr sz="1300" b="1">
                           <a:solidFill>
                             <a:srgbClr val="FFFFFF"/>
                           </a:solidFill>
@@ -10637,6 +9628,11 @@
                     </a:solidFill>
                   </a:tcPr>
                 </a:tc>
+                <a:extLst>
+                  <a:ext uri="{0D108BD9-81ED-4DB2-BD59-A6C34878D82A}">
+                    <a16:rowId xmlns:a16="http://schemas.microsoft.com/office/drawing/2014/main" val="10000"/>
+                  </a:ext>
+                </a:extLst>
               </a:tr>
               <a:tr h="502920">
                 <a:tc>
@@ -10708,6 +9704,11 @@
                     </a:solidFill>
                   </a:tcPr>
                 </a:tc>
+                <a:extLst>
+                  <a:ext uri="{0D108BD9-81ED-4DB2-BD59-A6C34878D82A}">
+                    <a16:rowId xmlns:a16="http://schemas.microsoft.com/office/drawing/2014/main" val="10001"/>
+                  </a:ext>
+                </a:extLst>
               </a:tr>
               <a:tr h="502920">
                 <a:tc>
@@ -10779,6 +9780,11 @@
                     </a:solidFill>
                   </a:tcPr>
                 </a:tc>
+                <a:extLst>
+                  <a:ext uri="{0D108BD9-81ED-4DB2-BD59-A6C34878D82A}">
+                    <a16:rowId xmlns:a16="http://schemas.microsoft.com/office/drawing/2014/main" val="10002"/>
+                  </a:ext>
+                </a:extLst>
               </a:tr>
             </a:tbl>
           </a:graphicData>
@@ -10827,8 +9833,8 @@
 </p:sld>
 </file>
 
-<file path=ppt/slides/slide45.xml><?xml version="1.0" encoding="utf-8"?>
-<p:sld xmlns:a="http://schemas.openxmlformats.org/drawingml/2006/main" xmlns:p="http://schemas.openxmlformats.org/presentationml/2006/main" xmlns:r="http://schemas.openxmlformats.org/officeDocument/2006/relationships">
+<file path=ppt/slides/slide3.xml><?xml version="1.0" encoding="utf-8"?>
+<p:sld xmlns:a="http://schemas.openxmlformats.org/drawingml/2006/main" xmlns:r="http://schemas.openxmlformats.org/officeDocument/2006/relationships" xmlns:p="http://schemas.openxmlformats.org/presentationml/2006/main">
   <p:cSld>
     <p:spTree>
       <p:nvGrpSpPr>
@@ -10836,7 +9842,14 @@
         <p:cNvGrpSpPr/>
         <p:nvPr/>
       </p:nvGrpSpPr>
-      <p:grpSpPr/>
+      <p:grpSpPr>
+        <a:xfrm>
+          <a:off x="0" y="0"/>
+          <a:ext cx="0" cy="0"/>
+          <a:chOff x="0" y="0"/>
+          <a:chExt cx="0" cy="0"/>
+        </a:xfrm>
+      </p:grpSpPr>
       <p:sp>
         <p:nvSpPr>
           <p:cNvPr id="2" name="Rectangle 1"/>
@@ -10873,7 +9886,7 @@
           </a:fontRef>
         </p:style>
         <p:txBody>
-          <a:bodyPr rtlCol="0" anchor="ctr" lIns="365760" tIns="73152" wrap="square"/>
+          <a:bodyPr wrap="square" lIns="365760" tIns="73152" rtlCol="0" anchor="ctr"/>
           <a:lstStyle/>
           <a:p>
             <a:pPr algn="ctr">
@@ -10884,7 +9897,7 @@
               </a:defRPr>
             </a:pPr>
             <a:r>
-              <a:t>Going All the Way: All 10 Real Neighbouring Countries at Once</a:t>
+              <a:t>Quick Recap: Where We Left Off on 27 August</a:t>
             </a:r>
           </a:p>
           <a:p>
@@ -10896,7 +9909,7 @@
               </a:defRPr>
             </a:pPr>
             <a:r>
-              <a:t>A genuine engineering problem, found, diagnosed, and fixed along the way</a:t>
+              <a:t>For orientation - the full detail is in the comprehensive deck</a:t>
             </a:r>
           </a:p>
         </p:txBody>
@@ -10931,7 +9944,7 @@
               </a:defRPr>
             </a:pPr>
             <a:r>
-              <a:t>30</a:t>
+              <a:t>3</a:t>
             </a:r>
           </a:p>
         </p:txBody>
@@ -10969,7 +9982,7 @@
               </a:defRPr>
             </a:pPr>
             <a:r>
-              <a:t>•  Since one real country made things worse for a clear, understood reason, the natural next test: does the SAME problem get worse - or does something different happen - once every real neighbour is split out?</a:t>
+              <a:t>•  Built and validated AMIRIS against Brainpool's real 2027 forecast, diagnosing and fixing a genuine import-timing bug</a:t>
             </a:r>
           </a:p>
           <a:p>
@@ -10984,7 +9997,7 @@
               </a:defRPr>
             </a:pPr>
             <a:r>
-              <a:t>•  Built all 10 real countries as their own separate zones - the largest build of the whole project</a:t>
+              <a:t>•  Refined demand modelling and fixed a real weekday/weekend calendar mismatch</a:t>
             </a:r>
           </a:p>
           <a:p>
@@ -10999,7 +10012,7 @@
               </a:defRPr>
             </a:pPr>
             <a:r>
-              <a:t>•  Hit a genuine, hard technical bug along the way: the model's own dispatch engine broke down for one specific country (Denmark) - traced directly to Denmark's real hydro power being far too small in absolute terms for the model to handle reliably</a:t>
+              <a:t>•  Added price-responsive electrolysis and e-mobility - the strongest result at the time, eliminating shortage hours entirely</a:t>
             </a:r>
           </a:p>
           <a:p>
@@ -11014,7 +10027,7 @@
               </a:defRPr>
             </a:pPr>
             <a:r>
-              <a:t>•  Fixed with a clearly labelled, honestly-flagged technical workaround (not real data) - confirmed the fix worked, then completed the full 10-country run</a:t>
+              <a:t>•  Correlation to Brainpool's forecast reached 0.647, up from 0.439 at the start of that work</a:t>
             </a:r>
           </a:p>
         </p:txBody>
@@ -11027,8 +10040,8 @@
 </p:sld>
 </file>
 
-<file path=ppt/slides/slide46.xml><?xml version="1.0" encoding="utf-8"?>
-<p:sld xmlns:a="http://schemas.openxmlformats.org/drawingml/2006/main" xmlns:p="http://schemas.openxmlformats.org/presentationml/2006/main" xmlns:r="http://schemas.openxmlformats.org/officeDocument/2006/relationships">
+<file path=ppt/slides/slide30.xml><?xml version="1.0" encoding="utf-8"?>
+<p:sld xmlns:a="http://schemas.openxmlformats.org/drawingml/2006/main" xmlns:r="http://schemas.openxmlformats.org/officeDocument/2006/relationships" xmlns:p="http://schemas.openxmlformats.org/presentationml/2006/main">
   <p:cSld>
     <p:spTree>
       <p:nvGrpSpPr>
@@ -11036,7 +10049,14 @@
         <p:cNvGrpSpPr/>
         <p:nvPr/>
       </p:nvGrpSpPr>
-      <p:grpSpPr/>
+      <p:grpSpPr>
+        <a:xfrm>
+          <a:off x="0" y="0"/>
+          <a:ext cx="0" cy="0"/>
+          <a:chOff x="0" y="0"/>
+          <a:chExt cx="0" cy="0"/>
+        </a:xfrm>
+      </p:grpSpPr>
       <p:sp>
         <p:nvSpPr>
           <p:cNvPr id="2" name="Rectangle 1"/>
@@ -11073,7 +10093,226 @@
           </a:fontRef>
         </p:style>
         <p:txBody>
-          <a:bodyPr rtlCol="0" anchor="ctr" lIns="365760" tIns="73152" wrap="square"/>
+          <a:bodyPr wrap="square" lIns="365760" tIns="73152" rtlCol="0" anchor="ctr"/>
+          <a:lstStyle/>
+          <a:p>
+            <a:pPr algn="ctr">
+              <a:defRPr sz="2600" b="1">
+                <a:solidFill>
+                  <a:srgbClr val="FFFFFF"/>
+                </a:solidFill>
+              </a:defRPr>
+            </a:pPr>
+            <a:r>
+              <a:t>Going All the Way: All 10 Real Neighbouring Countries at Once</a:t>
+            </a:r>
+          </a:p>
+          <a:p>
+            <a:pPr>
+              <a:defRPr sz="1400">
+                <a:solidFill>
+                  <a:srgbClr val="C8D2DA"/>
+                </a:solidFill>
+              </a:defRPr>
+            </a:pPr>
+            <a:r>
+              <a:t>A genuine engineering problem, found, diagnosed, and fixed along the way</a:t>
+            </a:r>
+          </a:p>
+        </p:txBody>
+      </p:sp>
+      <p:sp>
+        <p:nvSpPr>
+          <p:cNvPr id="3" name="TextBox 2"/>
+          <p:cNvSpPr txBox="1"/>
+          <p:nvPr/>
+        </p:nvSpPr>
+        <p:spPr>
+          <a:xfrm>
+            <a:off x="11551920" y="6446520"/>
+            <a:ext cx="457200" cy="320040"/>
+          </a:xfrm>
+          <a:prstGeom prst="rect">
+            <a:avLst/>
+          </a:prstGeom>
+          <a:noFill/>
+        </p:spPr>
+        <p:txBody>
+          <a:bodyPr wrap="none">
+            <a:spAutoFit/>
+          </a:bodyPr>
+          <a:lstStyle/>
+          <a:p>
+            <a:pPr>
+              <a:defRPr sz="1100">
+                <a:solidFill>
+                  <a:srgbClr val="5A605C"/>
+                </a:solidFill>
+              </a:defRPr>
+            </a:pPr>
+            <a:r>
+              <a:t>30</a:t>
+            </a:r>
+          </a:p>
+        </p:txBody>
+      </p:sp>
+      <p:sp>
+        <p:nvSpPr>
+          <p:cNvPr id="4" name="TextBox 3"/>
+          <p:cNvSpPr txBox="1"/>
+          <p:nvPr/>
+        </p:nvSpPr>
+        <p:spPr>
+          <a:xfrm>
+            <a:off x="502920" y="1234440"/>
+            <a:ext cx="11155680" cy="5303520"/>
+          </a:xfrm>
+          <a:prstGeom prst="rect">
+            <a:avLst/>
+          </a:prstGeom>
+          <a:noFill/>
+        </p:spPr>
+        <p:txBody>
+          <a:bodyPr wrap="square">
+            <a:spAutoFit/>
+          </a:bodyPr>
+          <a:lstStyle/>
+          <a:p>
+            <a:pPr>
+              <a:spcAft>
+                <a:spcPts val="1000"/>
+              </a:spcAft>
+              <a:defRPr sz="1800" b="1">
+                <a:solidFill>
+                  <a:srgbClr val="1E2220"/>
+                </a:solidFill>
+              </a:defRPr>
+            </a:pPr>
+            <a:r>
+              <a:rPr dirty="0"/>
+              <a:t>•  Since one real country made things worse for a clear, understood reason, the natural next test: does the SAME problem get worse - or does something different happen - once every real </a:t>
+            </a:r>
+            <a:r>
+              <a:rPr dirty="0" err="1"/>
+              <a:t>neighbour</a:t>
+            </a:r>
+            <a:r>
+              <a:rPr dirty="0"/>
+              <a:t> is split out?</a:t>
+            </a:r>
+          </a:p>
+          <a:p>
+            <a:pPr>
+              <a:spcAft>
+                <a:spcPts val="1000"/>
+              </a:spcAft>
+              <a:defRPr sz="1800" b="1">
+                <a:solidFill>
+                  <a:srgbClr val="1E2220"/>
+                </a:solidFill>
+              </a:defRPr>
+            </a:pPr>
+            <a:r>
+              <a:rPr dirty="0"/>
+              <a:t>•  Built all 10 real countries as their own separate zones - the largest build of the whole project</a:t>
+            </a:r>
+          </a:p>
+          <a:p>
+            <a:pPr>
+              <a:spcAft>
+                <a:spcPts val="1000"/>
+              </a:spcAft>
+              <a:defRPr sz="1800" b="1">
+                <a:solidFill>
+                  <a:srgbClr val="1E2220"/>
+                </a:solidFill>
+              </a:defRPr>
+            </a:pPr>
+            <a:r>
+              <a:rPr dirty="0"/>
+              <a:t>•  Hit a genuine, hard technical bug along the way: the model's own dispatch engine broke down for one specific country (Denmark) - traced directly to Denmark's real hydro power being far too small in absolute terms for the model to handle reliably</a:t>
+            </a:r>
+          </a:p>
+          <a:p>
+            <a:pPr>
+              <a:spcAft>
+                <a:spcPts val="1000"/>
+              </a:spcAft>
+              <a:defRPr sz="1800" b="1">
+                <a:solidFill>
+                  <a:srgbClr val="1E2220"/>
+                </a:solidFill>
+              </a:defRPr>
+            </a:pPr>
+            <a:r>
+              <a:rPr dirty="0"/>
+              <a:t>•  Fixed with a clearly labelled, honestly-flagged technical workaround (not real data) - confirmed the fix worked, then completed the full 10-country run</a:t>
+            </a:r>
+          </a:p>
+        </p:txBody>
+      </p:sp>
+    </p:spTree>
+  </p:cSld>
+  <p:clrMapOvr>
+    <a:masterClrMapping/>
+  </p:clrMapOvr>
+</p:sld>
+</file>
+
+<file path=ppt/slides/slide31.xml><?xml version="1.0" encoding="utf-8"?>
+<p:sld xmlns:a="http://schemas.openxmlformats.org/drawingml/2006/main" xmlns:r="http://schemas.openxmlformats.org/officeDocument/2006/relationships" xmlns:p="http://schemas.openxmlformats.org/presentationml/2006/main">
+  <p:cSld>
+    <p:spTree>
+      <p:nvGrpSpPr>
+        <p:cNvPr id="1" name=""/>
+        <p:cNvGrpSpPr/>
+        <p:nvPr/>
+      </p:nvGrpSpPr>
+      <p:grpSpPr>
+        <a:xfrm>
+          <a:off x="0" y="0"/>
+          <a:ext cx="0" cy="0"/>
+          <a:chOff x="0" y="0"/>
+          <a:chExt cx="0" cy="0"/>
+        </a:xfrm>
+      </p:grpSpPr>
+      <p:sp>
+        <p:nvSpPr>
+          <p:cNvPr id="2" name="Rectangle 1"/>
+          <p:cNvSpPr/>
+          <p:nvPr/>
+        </p:nvSpPr>
+        <p:spPr>
+          <a:xfrm>
+            <a:off x="0" y="0"/>
+            <a:ext cx="12192000" cy="960120"/>
+          </a:xfrm>
+          <a:prstGeom prst="rect">
+            <a:avLst/>
+          </a:prstGeom>
+          <a:solidFill>
+            <a:srgbClr val="1F3A4D"/>
+          </a:solidFill>
+          <a:ln>
+            <a:noFill/>
+          </a:ln>
+        </p:spPr>
+        <p:style>
+          <a:lnRef idx="1">
+            <a:schemeClr val="accent1"/>
+          </a:lnRef>
+          <a:fillRef idx="3">
+            <a:schemeClr val="accent1"/>
+          </a:fillRef>
+          <a:effectRef idx="2">
+            <a:schemeClr val="accent1"/>
+          </a:effectRef>
+          <a:fontRef idx="minor">
+            <a:schemeClr val="lt1"/>
+          </a:fontRef>
+        </p:style>
+        <p:txBody>
+          <a:bodyPr wrap="square" lIns="365760" tIns="73152" rtlCol="0" anchor="ctr"/>
           <a:lstStyle/>
           <a:p>
             <a:pPr algn="ctr">
@@ -11155,10 +10394,34 @@
                 <a:tableStyleId>{5C22544A-7EE6-4342-B048-85BDC9FD1C3A}</a:tableStyleId>
               </a:tblPr>
               <a:tblGrid>
-                <a:gridCol w="3510116"/>
-                <a:gridCol w="2457081"/>
-                <a:gridCol w="2457081"/>
-                <a:gridCol w="2457081"/>
+                <a:gridCol w="3510116">
+                  <a:extLst>
+                    <a:ext uri="{9D8B030D-6E8A-4147-A177-3AD203B41FA5}">
+                      <a16:colId xmlns:a16="http://schemas.microsoft.com/office/drawing/2014/main" val="20000"/>
+                    </a:ext>
+                  </a:extLst>
+                </a:gridCol>
+                <a:gridCol w="2457081">
+                  <a:extLst>
+                    <a:ext uri="{9D8B030D-6E8A-4147-A177-3AD203B41FA5}">
+                      <a16:colId xmlns:a16="http://schemas.microsoft.com/office/drawing/2014/main" val="20001"/>
+                    </a:ext>
+                  </a:extLst>
+                </a:gridCol>
+                <a:gridCol w="2457081">
+                  <a:extLst>
+                    <a:ext uri="{9D8B030D-6E8A-4147-A177-3AD203B41FA5}">
+                      <a16:colId xmlns:a16="http://schemas.microsoft.com/office/drawing/2014/main" val="20002"/>
+                    </a:ext>
+                  </a:extLst>
+                </a:gridCol>
+                <a:gridCol w="2457081">
+                  <a:extLst>
+                    <a:ext uri="{9D8B030D-6E8A-4147-A177-3AD203B41FA5}">
+                      <a16:colId xmlns:a16="http://schemas.microsoft.com/office/drawing/2014/main" val="20003"/>
+                    </a:ext>
+                  </a:extLst>
+                </a:gridCol>
               </a:tblGrid>
               <a:tr h="502920">
                 <a:tc>
@@ -11167,12 +10430,13 @@
                     <a:lstStyle/>
                     <a:p>
                       <a:pPr algn="ctr">
-                        <a:defRPr b="1" sz="1300">
+                        <a:defRPr sz="1300" b="1">
                           <a:solidFill>
                             <a:srgbClr val="FFFFFF"/>
                           </a:solidFill>
                         </a:defRPr>
                       </a:pPr>
+                      <a:endParaRPr/>
                     </a:p>
                   </a:txBody>
                   <a:tcPr>
@@ -11187,7 +10451,7 @@
                     <a:lstStyle/>
                     <a:p>
                       <a:pPr algn="ctr">
-                        <a:defRPr b="1" sz="1300">
+                        <a:defRPr sz="1300" b="1">
                           <a:solidFill>
                             <a:srgbClr val="FFFFFF"/>
                           </a:solidFill>
@@ -11210,7 +10474,7 @@
                     <a:lstStyle/>
                     <a:p>
                       <a:pPr algn="ctr">
-                        <a:defRPr b="1" sz="1300">
+                        <a:defRPr sz="1300" b="1">
                           <a:solidFill>
                             <a:srgbClr val="FFFFFF"/>
                           </a:solidFill>
@@ -11233,7 +10497,7 @@
                     <a:lstStyle/>
                     <a:p>
                       <a:pPr algn="ctr">
-                        <a:defRPr b="1" sz="1300">
+                        <a:defRPr sz="1300" b="1">
                           <a:solidFill>
                             <a:srgbClr val="FFFFFF"/>
                           </a:solidFill>
@@ -11250,6 +10514,11 @@
                     </a:solidFill>
                   </a:tcPr>
                 </a:tc>
+                <a:extLst>
+                  <a:ext uri="{0D108BD9-81ED-4DB2-BD59-A6C34878D82A}">
+                    <a16:rowId xmlns:a16="http://schemas.microsoft.com/office/drawing/2014/main" val="10000"/>
+                  </a:ext>
+                </a:extLst>
               </a:tr>
               <a:tr h="502920">
                 <a:tc>
@@ -11344,6 +10613,11 @@
                     </a:solidFill>
                   </a:tcPr>
                 </a:tc>
+                <a:extLst>
+                  <a:ext uri="{0D108BD9-81ED-4DB2-BD59-A6C34878D82A}">
+                    <a16:rowId xmlns:a16="http://schemas.microsoft.com/office/drawing/2014/main" val="10001"/>
+                  </a:ext>
+                </a:extLst>
               </a:tr>
               <a:tr h="502920">
                 <a:tc>
@@ -11438,6 +10712,11 @@
                     </a:solidFill>
                   </a:tcPr>
                 </a:tc>
+                <a:extLst>
+                  <a:ext uri="{0D108BD9-81ED-4DB2-BD59-A6C34878D82A}">
+                    <a16:rowId xmlns:a16="http://schemas.microsoft.com/office/drawing/2014/main" val="10002"/>
+                  </a:ext>
+                </a:extLst>
               </a:tr>
               <a:tr h="502920">
                 <a:tc>
@@ -11532,6 +10811,11 @@
                     </a:solidFill>
                   </a:tcPr>
                 </a:tc>
+                <a:extLst>
+                  <a:ext uri="{0D108BD9-81ED-4DB2-BD59-A6C34878D82A}">
+                    <a16:rowId xmlns:a16="http://schemas.microsoft.com/office/drawing/2014/main" val="10003"/>
+                  </a:ext>
+                </a:extLst>
               </a:tr>
             </a:tbl>
           </a:graphicData>
@@ -11580,7 +10864,7 @@
 </p:sld>
 </file>
 
-<file path=ppt/slides/slide47.xml><?xml version="1.0" encoding="utf-8"?>
+<file path=ppt/slides/slide32.xml><?xml version="1.0" encoding="utf-8"?>
 <p:sld xmlns:a="http://schemas.openxmlformats.org/drawingml/2006/main" xmlns:r="http://schemas.openxmlformats.org/officeDocument/2006/relationships" xmlns:p="http://schemas.openxmlformats.org/presentationml/2006/main">
   <p:cSld>
     <p:spTree>
@@ -12239,7 +11523,7 @@
 </p:sld>
 </file>
 
-<file path=ppt/slides/slide48.xml><?xml version="1.0" encoding="utf-8"?>
+<file path=ppt/slides/slide33.xml><?xml version="1.0" encoding="utf-8"?>
 <p:sld xmlns:a="http://schemas.openxmlformats.org/drawingml/2006/main" xmlns:r="http://schemas.openxmlformats.org/officeDocument/2006/relationships" xmlns:p="http://schemas.openxmlformats.org/presentationml/2006/main">
   <p:cSld>
     <p:spTree>
@@ -12410,7 +11694,7 @@
 </p:sld>
 </file>
 
-<file path=ppt/slides/slide49.xml><?xml version="1.0" encoding="utf-8"?>
+<file path=ppt/slides/slide34.xml><?xml version="1.0" encoding="utf-8"?>
 <p:sld xmlns:a="http://schemas.openxmlformats.org/drawingml/2006/main" xmlns:r="http://schemas.openxmlformats.org/officeDocument/2006/relationships" xmlns:p="http://schemas.openxmlformats.org/presentationml/2006/main">
   <p:cSld>
     <p:spTree>
@@ -12605,7 +11889,7 @@
 </p:sld>
 </file>
 
-<file path=ppt/slides/slide50.xml><?xml version="1.0" encoding="utf-8"?>
+<file path=ppt/slides/slide35.xml><?xml version="1.0" encoding="utf-8"?>
 <p:sld xmlns:a="http://schemas.openxmlformats.org/drawingml/2006/main" xmlns:r="http://schemas.openxmlformats.org/officeDocument/2006/relationships" xmlns:p="http://schemas.openxmlformats.org/presentationml/2006/main">
   <p:cSld>
     <p:spTree>
@@ -12743,8 +12027,8 @@
 </p:sld>
 </file>
 
-<file path=ppt/slides/slide51.xml><?xml version="1.0" encoding="utf-8"?>
-<p:sld xmlns:a="http://schemas.openxmlformats.org/drawingml/2006/main" xmlns:p="http://schemas.openxmlformats.org/presentationml/2006/main" xmlns:r="http://schemas.openxmlformats.org/officeDocument/2006/relationships">
+<file path=ppt/slides/slide4.xml><?xml version="1.0" encoding="utf-8"?>
+<p:sld xmlns:a="http://schemas.openxmlformats.org/drawingml/2006/main" xmlns:r="http://schemas.openxmlformats.org/officeDocument/2006/relationships" xmlns:p="http://schemas.openxmlformats.org/presentationml/2006/main">
   <p:cSld>
     <p:spTree>
       <p:nvGrpSpPr>
@@ -12752,7 +12036,14 @@
         <p:cNvGrpSpPr/>
         <p:nvPr/>
       </p:nvGrpSpPr>
-      <p:grpSpPr/>
+      <p:grpSpPr>
+        <a:xfrm>
+          <a:off x="0" y="0"/>
+          <a:ext cx="0" cy="0"/>
+          <a:chOff x="0" y="0"/>
+          <a:chExt cx="0" cy="0"/>
+        </a:xfrm>
+      </p:grpSpPr>
       <p:sp>
         <p:nvSpPr>
           <p:cNvPr id="2" name="Rectangle 1"/>
@@ -12789,18 +12080,30 @@
           </a:fontRef>
         </p:style>
         <p:txBody>
-          <a:bodyPr rtlCol="0" anchor="ctr" lIns="365760" tIns="73152" wrap="square"/>
+          <a:bodyPr wrap="square" lIns="365760" tIns="73152" rtlCol="0" anchor="ctr"/>
           <a:lstStyle/>
           <a:p>
             <a:pPr algn="ctr">
-              <a:defRPr sz="2600" b="1">
+              <a:defRPr sz="2800" b="1">
                 <a:solidFill>
                   <a:srgbClr val="FFFFFF"/>
                 </a:solidFill>
               </a:defRPr>
             </a:pPr>
             <a:r>
-              <a:t>Agenda - Since 27 August</a:t>
+              <a:t>Out-of-Sample Testing: What We Found</a:t>
+            </a:r>
+          </a:p>
+          <a:p>
+            <a:pPr>
+              <a:defRPr sz="1400">
+                <a:solidFill>
+                  <a:srgbClr val="C8D2DA"/>
+                </a:solidFill>
+              </a:defRPr>
+            </a:pPr>
+            <a:r>
+              <a:t>Using Brainpool's newly-supplied 2027-2029 data file</a:t>
             </a:r>
           </a:p>
         </p:txBody>
@@ -12835,7 +12138,7 @@
               </a:defRPr>
             </a:pPr>
             <a:r>
-              <a:t>2</a:t>
+              <a:t>4</a:t>
             </a:r>
           </a:p>
         </p:txBody>
@@ -12873,7 +12176,7 @@
               </a:defRPr>
             </a:pPr>
             <a:r>
-              <a:t>•  Quick recap: where we left off</a:t>
+              <a:t>•  Built Germany 2028 and 2029 the exact same way as 2027 - zero re-tuning of any setting</a:t>
             </a:r>
           </a:p>
           <a:p>
@@ -12888,7 +12191,7 @@
               </a:defRPr>
             </a:pPr>
             <a:r>
-              <a:t>•  Out-of-sample testing and a genuine bug fix</a:t>
+              <a:t>•  Goal: does the model still work on years it wasn't built for?</a:t>
             </a:r>
           </a:p>
           <a:p>
@@ -12903,7 +12206,7 @@
               </a:defRPr>
             </a:pPr>
             <a:r>
-              <a:t>•  Three more ideas tested (price floor, cycling cost, lignite markup)</a:t>
+              <a:t>•  Price LEVEL held up well in both new years (average price, average error stayed close)</a:t>
             </a:r>
           </a:p>
           <a:p>
@@ -12918,7 +12221,52 @@
               </a:defRPr>
             </a:pPr>
             <a:r>
-              <a:t>•  The big build: real cross-border market coupling</a:t>
+              <a:t>•  But hour-to-hour matching quality dropped the further from 2027:</a:t>
+            </a:r>
+          </a:p>
+          <a:p>
+            <a:pPr>
+              <a:spcAft>
+                <a:spcPts val="600"/>
+              </a:spcAft>
+              <a:defRPr sz="1600" b="0">
+                <a:solidFill>
+                  <a:srgbClr val="5A605C"/>
+                </a:solidFill>
+              </a:defRPr>
+            </a:pPr>
+            <a:r>
+              <a:t>‒  2027 (tuned for): r = 0.647</a:t>
+            </a:r>
+          </a:p>
+          <a:p>
+            <a:pPr>
+              <a:spcAft>
+                <a:spcPts val="600"/>
+              </a:spcAft>
+              <a:defRPr sz="1600" b="0">
+                <a:solidFill>
+                  <a:srgbClr val="5A605C"/>
+                </a:solidFill>
+              </a:defRPr>
+            </a:pPr>
+            <a:r>
+              <a:t>‒  2028 (never tuned for): r = 0.446</a:t>
+            </a:r>
+          </a:p>
+          <a:p>
+            <a:pPr>
+              <a:spcAft>
+                <a:spcPts val="600"/>
+              </a:spcAft>
+              <a:defRPr sz="1600" b="0">
+                <a:solidFill>
+                  <a:srgbClr val="5A605C"/>
+                </a:solidFill>
+              </a:defRPr>
+            </a:pPr>
+            <a:r>
+              <a:t>‒  2029 (never tuned for): r = 0.349</a:t>
             </a:r>
           </a:p>
           <a:p>
@@ -12933,37 +12281,7 @@
               </a:defRPr>
             </a:pPr>
             <a:r>
-              <a:t>•  Extending to 2028 and 2029</a:t>
-            </a:r>
-          </a:p>
-          <a:p>
-            <a:pPr>
-              <a:spcAft>
-                <a:spcPts val="1000"/>
-              </a:spcAft>
-              <a:defRPr sz="1800" b="1">
-                <a:solidFill>
-                  <a:srgbClr val="1E2220"/>
-                </a:solidFill>
-              </a:defRPr>
-            </a:pPr>
-            <a:r>
-              <a:t>•  Chasing the last gap: four more real tests</a:t>
-            </a:r>
-          </a:p>
-          <a:p>
-            <a:pPr>
-              <a:spcAft>
-                <a:spcPts val="1000"/>
-              </a:spcAft>
-              <a:defRPr sz="1800" b="1">
-                <a:solidFill>
-                  <a:srgbClr val="1E2220"/>
-                </a:solidFill>
-              </a:defRPr>
-            </a:pPr>
-            <a:r>
-              <a:t>•  Where we stand now, and next steps</a:t>
+              <a:t>•  This gap became the focus of the next round of investigation</a:t>
             </a:r>
           </a:p>
         </p:txBody>
@@ -12976,8 +12294,8 @@
 </p:sld>
 </file>
 
-<file path=ppt/slides/slide52.xml><?xml version="1.0" encoding="utf-8"?>
-<p:sld xmlns:a="http://schemas.openxmlformats.org/drawingml/2006/main" xmlns:p="http://schemas.openxmlformats.org/presentationml/2006/main" xmlns:r="http://schemas.openxmlformats.org/officeDocument/2006/relationships">
+<file path=ppt/slides/slide5.xml><?xml version="1.0" encoding="utf-8"?>
+<p:sld xmlns:a="http://schemas.openxmlformats.org/drawingml/2006/main" xmlns:r="http://schemas.openxmlformats.org/officeDocument/2006/relationships" xmlns:p="http://schemas.openxmlformats.org/presentationml/2006/main">
   <p:cSld>
     <p:spTree>
       <p:nvGrpSpPr>
@@ -12985,7 +12303,14 @@
         <p:cNvGrpSpPr/>
         <p:nvPr/>
       </p:nvGrpSpPr>
-      <p:grpSpPr/>
+      <p:grpSpPr>
+        <a:xfrm>
+          <a:off x="0" y="0"/>
+          <a:ext cx="0" cy="0"/>
+          <a:chOff x="0" y="0"/>
+          <a:chExt cx="0" cy="0"/>
+        </a:xfrm>
+      </p:grpSpPr>
       <p:sp>
         <p:nvSpPr>
           <p:cNvPr id="2" name="Rectangle 1"/>
@@ -13022,30 +12347,18 @@
           </a:fontRef>
         </p:style>
         <p:txBody>
-          <a:bodyPr rtlCol="0" anchor="ctr" lIns="365760" tIns="73152" wrap="square"/>
+          <a:bodyPr wrap="square" lIns="365760" tIns="73152" rtlCol="0" anchor="ctr"/>
           <a:lstStyle/>
           <a:p>
             <a:pPr algn="ctr">
-              <a:defRPr sz="2600" b="1">
+              <a:defRPr sz="2800" b="1">
                 <a:solidFill>
                   <a:srgbClr val="FFFFFF"/>
                 </a:solidFill>
               </a:defRPr>
             </a:pPr>
             <a:r>
-              <a:t>Quick Recap: Where We Left Off on 27 August</a:t>
-            </a:r>
-          </a:p>
-          <a:p>
-            <a:pPr>
-              <a:defRPr sz="1400">
-                <a:solidFill>
-                  <a:srgbClr val="C8D2DA"/>
-                </a:solidFill>
-              </a:defRPr>
-            </a:pPr>
-            <a:r>
-              <a:t>For orientation - the full detail is in the comprehensive deck</a:t>
+              <a:t>How We Found the Cause</a:t>
             </a:r>
           </a:p>
         </p:txBody>
@@ -13080,7 +12393,178 @@
               </a:defRPr>
             </a:pPr>
             <a:r>
-              <a:t>3</a:t>
+              <a:t>5</a:t>
+            </a:r>
+          </a:p>
+        </p:txBody>
+      </p:sp>
+      <p:pic>
+        <p:nvPicPr>
+          <p:cNvPr id="4" name="Picture 3" descr="chart_weekday_bug.png"/>
+          <p:cNvPicPr>
+            <a:picLocks noChangeAspect="1"/>
+          </p:cNvPicPr>
+          <p:nvPr/>
+        </p:nvPicPr>
+        <p:blipFill>
+          <a:blip r:embed="rId2"/>
+          <a:stretch>
+            <a:fillRect/>
+          </a:stretch>
+        </p:blipFill>
+        <p:spPr>
+          <a:xfrm>
+            <a:off x="1862721" y="1188720"/>
+            <a:ext cx="8436077" cy="4754880"/>
+          </a:xfrm>
+          <a:prstGeom prst="rect">
+            <a:avLst/>
+          </a:prstGeom>
+        </p:spPr>
+      </p:pic>
+      <p:sp>
+        <p:nvSpPr>
+          <p:cNvPr id="5" name="TextBox 4"/>
+          <p:cNvSpPr txBox="1"/>
+          <p:nvPr/>
+        </p:nvSpPr>
+        <p:spPr>
+          <a:xfrm>
+            <a:off x="457200" y="6172200"/>
+            <a:ext cx="11247120" cy="548640"/>
+          </a:xfrm>
+          <a:prstGeom prst="rect">
+            <a:avLst/>
+          </a:prstGeom>
+          <a:noFill/>
+        </p:spPr>
+        <p:txBody>
+          <a:bodyPr wrap="square">
+            <a:spAutoFit/>
+          </a:bodyPr>
+          <a:lstStyle/>
+          <a:p>
+            <a:pPr algn="ctr">
+              <a:defRPr sz="1300" i="1">
+                <a:solidFill>
+                  <a:srgbClr val="5A605C"/>
+                </a:solidFill>
+              </a:defRPr>
+            </a:pPr>
+            <a:r>
+              <a:t>Real electricity demand should be highest on weekdays, lowest on Sunday - our model's 2029 demand had this backwards on two days</a:t>
+            </a:r>
+          </a:p>
+        </p:txBody>
+      </p:sp>
+    </p:spTree>
+  </p:cSld>
+  <p:clrMapOvr>
+    <a:masterClrMapping/>
+  </p:clrMapOvr>
+</p:sld>
+</file>
+
+<file path=ppt/slides/slide6.xml><?xml version="1.0" encoding="utf-8"?>
+<p:sld xmlns:a="http://schemas.openxmlformats.org/drawingml/2006/main" xmlns:r="http://schemas.openxmlformats.org/officeDocument/2006/relationships" xmlns:p="http://schemas.openxmlformats.org/presentationml/2006/main">
+  <p:cSld>
+    <p:spTree>
+      <p:nvGrpSpPr>
+        <p:cNvPr id="1" name=""/>
+        <p:cNvGrpSpPr/>
+        <p:nvPr/>
+      </p:nvGrpSpPr>
+      <p:grpSpPr>
+        <a:xfrm>
+          <a:off x="0" y="0"/>
+          <a:ext cx="0" cy="0"/>
+          <a:chOff x="0" y="0"/>
+          <a:chExt cx="0" cy="0"/>
+        </a:xfrm>
+      </p:grpSpPr>
+      <p:sp>
+        <p:nvSpPr>
+          <p:cNvPr id="2" name="Rectangle 1"/>
+          <p:cNvSpPr/>
+          <p:nvPr/>
+        </p:nvSpPr>
+        <p:spPr>
+          <a:xfrm>
+            <a:off x="0" y="0"/>
+            <a:ext cx="12192000" cy="960120"/>
+          </a:xfrm>
+          <a:prstGeom prst="rect">
+            <a:avLst/>
+          </a:prstGeom>
+          <a:solidFill>
+            <a:srgbClr val="1F3A4D"/>
+          </a:solidFill>
+          <a:ln>
+            <a:noFill/>
+          </a:ln>
+        </p:spPr>
+        <p:style>
+          <a:lnRef idx="1">
+            <a:schemeClr val="accent1"/>
+          </a:lnRef>
+          <a:fillRef idx="3">
+            <a:schemeClr val="accent1"/>
+          </a:fillRef>
+          <a:effectRef idx="2">
+            <a:schemeClr val="accent1"/>
+          </a:effectRef>
+          <a:fontRef idx="minor">
+            <a:schemeClr val="lt1"/>
+          </a:fontRef>
+        </p:style>
+        <p:txBody>
+          <a:bodyPr wrap="square" lIns="365760" tIns="73152" rtlCol="0" anchor="ctr"/>
+          <a:lstStyle/>
+          <a:p>
+            <a:pPr algn="ctr">
+              <a:defRPr sz="2800" b="1">
+                <a:solidFill>
+                  <a:srgbClr val="FFFFFF"/>
+                </a:solidFill>
+              </a:defRPr>
+            </a:pPr>
+            <a:r>
+              <a:t>The Root Cause: A Hidden Calendar Bug</a:t>
+            </a:r>
+          </a:p>
+        </p:txBody>
+      </p:sp>
+      <p:sp>
+        <p:nvSpPr>
+          <p:cNvPr id="3" name="TextBox 2"/>
+          <p:cNvSpPr txBox="1"/>
+          <p:nvPr/>
+        </p:nvSpPr>
+        <p:spPr>
+          <a:xfrm>
+            <a:off x="11551920" y="6446520"/>
+            <a:ext cx="457200" cy="320040"/>
+          </a:xfrm>
+          <a:prstGeom prst="rect">
+            <a:avLst/>
+          </a:prstGeom>
+          <a:noFill/>
+        </p:spPr>
+        <p:txBody>
+          <a:bodyPr wrap="none">
+            <a:spAutoFit/>
+          </a:bodyPr>
+          <a:lstStyle/>
+          <a:p>
+            <a:pPr>
+              <a:defRPr sz="1100">
+                <a:solidFill>
+                  <a:srgbClr val="5A605C"/>
+                </a:solidFill>
+              </a:defRPr>
+            </a:pPr>
+            <a:r>
+              <a:t>6</a:t>
             </a:r>
           </a:p>
         </p:txBody>
@@ -13118,7 +12602,7 @@
               </a:defRPr>
             </a:pPr>
             <a:r>
-              <a:t>•  Built and validated AMIRIS against Brainpool's real 2027 forecast, diagnosing and fixing a genuine import-timing bug</a:t>
+              <a:t>•  Our demand shape borrows a real year's usage pattern (2016) and trims it to fit the target year</a:t>
             </a:r>
           </a:p>
           <a:p>
@@ -13133,7 +12617,7 @@
               </a:defRPr>
             </a:pPr>
             <a:r>
-              <a:t>•  Refined demand modelling and fixed a real weekday/weekend calendar mismatch</a:t>
+              <a:t>•  2016 has one extra day (leap year) that must be removed to fit a normal year</a:t>
             </a:r>
           </a:p>
           <a:p>
@@ -13148,7 +12632,7 @@
               </a:defRPr>
             </a:pPr>
             <a:r>
-              <a:t>•  Added price-responsive electrolysis and e-mobility - the strongest result at the time, eliminating shortage hours entirely</a:t>
+              <a:t>•  The extra day removed was February 29th - sitting in the MIDDLE of the year</a:t>
             </a:r>
           </a:p>
           <a:p>
@@ -13163,7 +12647,1077 @@
               </a:defRPr>
             </a:pPr>
             <a:r>
-              <a:t>•  Correlation to Brainpool's forecast reached 0.647, up from 0.439 at the start of that work</a:t>
+              <a:t>•  Removing a day from the middle silently shifts every day after it by one weekday, for the rest of the year (10 of 12 months)</a:t>
+            </a:r>
+          </a:p>
+          <a:p>
+            <a:pPr>
+              <a:spcAft>
+                <a:spcPts val="1000"/>
+              </a:spcAft>
+              <a:defRPr sz="1800" b="1">
+                <a:solidFill>
+                  <a:srgbClr val="1E2220"/>
+                </a:solidFill>
+              </a:defRPr>
+            </a:pPr>
+            <a:r>
+              <a:t>•  This bug had been present in our main 2027 model since it was first built - only found now</a:t>
+            </a:r>
+          </a:p>
+          <a:p>
+            <a:pPr>
+              <a:spcAft>
+                <a:spcPts val="1000"/>
+              </a:spcAft>
+              <a:defRPr sz="1800" b="1">
+                <a:solidFill>
+                  <a:srgbClr val="1E2220"/>
+                </a:solidFill>
+              </a:defRPr>
+            </a:pPr>
+            <a:r>
+              <a:t>•  The fix: remove December 31st instead - it sits at the END of the year, so nothing after it is disturbed</a:t>
+            </a:r>
+          </a:p>
+        </p:txBody>
+      </p:sp>
+    </p:spTree>
+  </p:cSld>
+  <p:clrMapOvr>
+    <a:masterClrMapping/>
+  </p:clrMapOvr>
+</p:sld>
+</file>
+
+<file path=ppt/slides/slide7.xml><?xml version="1.0" encoding="utf-8"?>
+<p:sld xmlns:a="http://schemas.openxmlformats.org/drawingml/2006/main" xmlns:r="http://schemas.openxmlformats.org/officeDocument/2006/relationships" xmlns:p="http://schemas.openxmlformats.org/presentationml/2006/main">
+  <p:cSld>
+    <p:spTree>
+      <p:nvGrpSpPr>
+        <p:cNvPr id="1" name=""/>
+        <p:cNvGrpSpPr/>
+        <p:nvPr/>
+      </p:nvGrpSpPr>
+      <p:grpSpPr>
+        <a:xfrm>
+          <a:off x="0" y="0"/>
+          <a:ext cx="0" cy="0"/>
+          <a:chOff x="0" y="0"/>
+          <a:chExt cx="0" cy="0"/>
+        </a:xfrm>
+      </p:grpSpPr>
+      <p:sp>
+        <p:nvSpPr>
+          <p:cNvPr id="2" name="Rectangle 1"/>
+          <p:cNvSpPr/>
+          <p:nvPr/>
+        </p:nvSpPr>
+        <p:spPr>
+          <a:xfrm>
+            <a:off x="0" y="0"/>
+            <a:ext cx="12192000" cy="960120"/>
+          </a:xfrm>
+          <a:prstGeom prst="rect">
+            <a:avLst/>
+          </a:prstGeom>
+          <a:solidFill>
+            <a:srgbClr val="1F3A4D"/>
+          </a:solidFill>
+          <a:ln>
+            <a:noFill/>
+          </a:ln>
+        </p:spPr>
+        <p:style>
+          <a:lnRef idx="1">
+            <a:schemeClr val="accent1"/>
+          </a:lnRef>
+          <a:fillRef idx="3">
+            <a:schemeClr val="accent1"/>
+          </a:fillRef>
+          <a:effectRef idx="2">
+            <a:schemeClr val="accent1"/>
+          </a:effectRef>
+          <a:fontRef idx="minor">
+            <a:schemeClr val="lt1"/>
+          </a:fontRef>
+        </p:style>
+        <p:txBody>
+          <a:bodyPr wrap="square" lIns="365760" tIns="73152" rtlCol="0" anchor="ctr"/>
+          <a:lstStyle/>
+          <a:p>
+            <a:pPr algn="ctr">
+              <a:defRPr sz="2800" b="1">
+                <a:solidFill>
+                  <a:srgbClr val="FFFFFF"/>
+                </a:solidFill>
+              </a:defRPr>
+            </a:pPr>
+            <a:r>
+              <a:t>Result: A Clean, Genuine Improvement</a:t>
+            </a:r>
+          </a:p>
+          <a:p>
+            <a:pPr>
+              <a:defRPr sz="1400">
+                <a:solidFill>
+                  <a:srgbClr val="C8D2DA"/>
+                </a:solidFill>
+              </a:defRPr>
+            </a:pPr>
+            <a:r>
+              <a:t>Both accuracy AND average error improved together, with almost no downside - a genuine bug fix, not a trade-off</a:t>
+            </a:r>
+          </a:p>
+        </p:txBody>
+      </p:sp>
+      <p:sp>
+        <p:nvSpPr>
+          <p:cNvPr id="3" name="TextBox 2"/>
+          <p:cNvSpPr txBox="1"/>
+          <p:nvPr/>
+        </p:nvSpPr>
+        <p:spPr>
+          <a:xfrm>
+            <a:off x="11551920" y="6446520"/>
+            <a:ext cx="457200" cy="320040"/>
+          </a:xfrm>
+          <a:prstGeom prst="rect">
+            <a:avLst/>
+          </a:prstGeom>
+          <a:noFill/>
+        </p:spPr>
+        <p:txBody>
+          <a:bodyPr wrap="none">
+            <a:spAutoFit/>
+          </a:bodyPr>
+          <a:lstStyle/>
+          <a:p>
+            <a:pPr>
+              <a:defRPr sz="1100">
+                <a:solidFill>
+                  <a:srgbClr val="5A605C"/>
+                </a:solidFill>
+              </a:defRPr>
+            </a:pPr>
+            <a:r>
+              <a:t>7</a:t>
+            </a:r>
+          </a:p>
+        </p:txBody>
+      </p:sp>
+      <p:graphicFrame>
+        <p:nvGraphicFramePr>
+          <p:cNvPr id="4" name="Table 3"/>
+          <p:cNvGraphicFramePr>
+            <a:graphicFrameLocks noGrp="1"/>
+          </p:cNvGraphicFramePr>
+          <p:nvPr/>
+        </p:nvGraphicFramePr>
+        <p:xfrm>
+          <a:off x="640080" y="1463040"/>
+          <a:ext cx="10789920" cy="3291839"/>
+        </p:xfrm>
+        <a:graphic>
+          <a:graphicData uri="http://schemas.openxmlformats.org/drawingml/2006/table">
+            <a:tbl>
+              <a:tblPr firstRow="1" bandRow="1">
+                <a:tableStyleId>{5C22544A-7EE6-4342-B048-85BDC9FD1C3A}</a:tableStyleId>
+              </a:tblPr>
+              <a:tblGrid>
+                <a:gridCol w="4572000">
+                  <a:extLst>
+                    <a:ext uri="{9D8B030D-6E8A-4147-A177-3AD203B41FA5}">
+                      <a16:colId xmlns:a16="http://schemas.microsoft.com/office/drawing/2014/main" val="20000"/>
+                    </a:ext>
+                  </a:extLst>
+                </a:gridCol>
+                <a:gridCol w="3108960">
+                  <a:extLst>
+                    <a:ext uri="{9D8B030D-6E8A-4147-A177-3AD203B41FA5}">
+                      <a16:colId xmlns:a16="http://schemas.microsoft.com/office/drawing/2014/main" val="20001"/>
+                    </a:ext>
+                  </a:extLst>
+                </a:gridCol>
+                <a:gridCol w="3108960">
+                  <a:extLst>
+                    <a:ext uri="{9D8B030D-6E8A-4147-A177-3AD203B41FA5}">
+                      <a16:colId xmlns:a16="http://schemas.microsoft.com/office/drawing/2014/main" val="20002"/>
+                    </a:ext>
+                  </a:extLst>
+                </a:gridCol>
+              </a:tblGrid>
+              <a:tr h="548639">
+                <a:tc>
+                  <a:txBody>
+                    <a:bodyPr/>
+                    <a:lstStyle/>
+                    <a:p>
+                      <a:pPr algn="ctr">
+                        <a:defRPr sz="1500" b="1">
+                          <a:solidFill>
+                            <a:srgbClr val="FFFFFF"/>
+                          </a:solidFill>
+                        </a:defRPr>
+                      </a:pPr>
+                      <a:endParaRPr/>
+                    </a:p>
+                  </a:txBody>
+                  <a:tcPr>
+                    <a:solidFill>
+                      <a:srgbClr val="1F3A4D"/>
+                    </a:solidFill>
+                  </a:tcPr>
+                </a:tc>
+                <a:tc>
+                  <a:txBody>
+                    <a:bodyPr/>
+                    <a:lstStyle/>
+                    <a:p>
+                      <a:pPr algn="ctr">
+                        <a:defRPr sz="1500" b="1">
+                          <a:solidFill>
+                            <a:srgbClr val="FFFFFF"/>
+                          </a:solidFill>
+                        </a:defRPr>
+                      </a:pPr>
+                      <a:r>
+                        <a:t>2027</a:t>
+                      </a:r>
+                    </a:p>
+                  </a:txBody>
+                  <a:tcPr>
+                    <a:solidFill>
+                      <a:srgbClr val="1F3A4D"/>
+                    </a:solidFill>
+                  </a:tcPr>
+                </a:tc>
+                <a:tc>
+                  <a:txBody>
+                    <a:bodyPr/>
+                    <a:lstStyle/>
+                    <a:p>
+                      <a:pPr algn="ctr">
+                        <a:defRPr sz="1500" b="1">
+                          <a:solidFill>
+                            <a:srgbClr val="FFFFFF"/>
+                          </a:solidFill>
+                        </a:defRPr>
+                      </a:pPr>
+                      <a:r>
+                        <a:t>2029</a:t>
+                      </a:r>
+                    </a:p>
+                  </a:txBody>
+                  <a:tcPr>
+                    <a:solidFill>
+                      <a:srgbClr val="1F3A4D"/>
+                    </a:solidFill>
+                  </a:tcPr>
+                </a:tc>
+                <a:extLst>
+                  <a:ext uri="{0D108BD9-81ED-4DB2-BD59-A6C34878D82A}">
+                    <a16:rowId xmlns:a16="http://schemas.microsoft.com/office/drawing/2014/main" val="10000"/>
+                  </a:ext>
+                </a:extLst>
+              </a:tr>
+              <a:tr h="548639">
+                <a:tc>
+                  <a:txBody>
+                    <a:bodyPr/>
+                    <a:lstStyle/>
+                    <a:p>
+                      <a:pPr algn="ctr">
+                        <a:defRPr sz="1400" b="0">
+                          <a:solidFill>
+                            <a:srgbClr val="1E2220"/>
+                          </a:solidFill>
+                        </a:defRPr>
+                      </a:pPr>
+                      <a:r>
+                        <a:t>Correlation - before fix</a:t>
+                      </a:r>
+                    </a:p>
+                  </a:txBody>
+                  <a:tcPr>
+                    <a:solidFill>
+                      <a:srgbClr val="FFFFFF"/>
+                    </a:solidFill>
+                  </a:tcPr>
+                </a:tc>
+                <a:tc>
+                  <a:txBody>
+                    <a:bodyPr/>
+                    <a:lstStyle/>
+                    <a:p>
+                      <a:pPr algn="ctr">
+                        <a:defRPr sz="1400" b="0">
+                          <a:solidFill>
+                            <a:srgbClr val="1E2220"/>
+                          </a:solidFill>
+                        </a:defRPr>
+                      </a:pPr>
+                      <a:r>
+                        <a:t>0.647</a:t>
+                      </a:r>
+                    </a:p>
+                  </a:txBody>
+                  <a:tcPr>
+                    <a:solidFill>
+                      <a:srgbClr val="FFFFFF"/>
+                    </a:solidFill>
+                  </a:tcPr>
+                </a:tc>
+                <a:tc>
+                  <a:txBody>
+                    <a:bodyPr/>
+                    <a:lstStyle/>
+                    <a:p>
+                      <a:pPr algn="ctr">
+                        <a:defRPr sz="1400" b="0">
+                          <a:solidFill>
+                            <a:srgbClr val="1E2220"/>
+                          </a:solidFill>
+                        </a:defRPr>
+                      </a:pPr>
+                      <a:r>
+                        <a:t>0.349</a:t>
+                      </a:r>
+                    </a:p>
+                  </a:txBody>
+                  <a:tcPr>
+                    <a:solidFill>
+                      <a:srgbClr val="FFFFFF"/>
+                    </a:solidFill>
+                  </a:tcPr>
+                </a:tc>
+                <a:extLst>
+                  <a:ext uri="{0D108BD9-81ED-4DB2-BD59-A6C34878D82A}">
+                    <a16:rowId xmlns:a16="http://schemas.microsoft.com/office/drawing/2014/main" val="10001"/>
+                  </a:ext>
+                </a:extLst>
+              </a:tr>
+              <a:tr h="548639">
+                <a:tc>
+                  <a:txBody>
+                    <a:bodyPr/>
+                    <a:lstStyle/>
+                    <a:p>
+                      <a:pPr algn="ctr">
+                        <a:defRPr sz="1400" b="0">
+                          <a:solidFill>
+                            <a:srgbClr val="1E2220"/>
+                          </a:solidFill>
+                        </a:defRPr>
+                      </a:pPr>
+                      <a:r>
+                        <a:t>Correlation - after fix</a:t>
+                      </a:r>
+                    </a:p>
+                  </a:txBody>
+                  <a:tcPr>
+                    <a:solidFill>
+                      <a:srgbClr val="EEF0E9"/>
+                    </a:solidFill>
+                  </a:tcPr>
+                </a:tc>
+                <a:tc>
+                  <a:txBody>
+                    <a:bodyPr/>
+                    <a:lstStyle/>
+                    <a:p>
+                      <a:pPr algn="ctr">
+                        <a:defRPr sz="1400" b="0">
+                          <a:solidFill>
+                            <a:srgbClr val="1E2220"/>
+                          </a:solidFill>
+                        </a:defRPr>
+                      </a:pPr>
+                      <a:r>
+                        <a:t>0.675</a:t>
+                      </a:r>
+                    </a:p>
+                  </a:txBody>
+                  <a:tcPr>
+                    <a:solidFill>
+                      <a:srgbClr val="EEF0E9"/>
+                    </a:solidFill>
+                  </a:tcPr>
+                </a:tc>
+                <a:tc>
+                  <a:txBody>
+                    <a:bodyPr/>
+                    <a:lstStyle/>
+                    <a:p>
+                      <a:pPr algn="ctr">
+                        <a:defRPr sz="1400" b="0">
+                          <a:solidFill>
+                            <a:srgbClr val="1E2220"/>
+                          </a:solidFill>
+                        </a:defRPr>
+                      </a:pPr>
+                      <a:r>
+                        <a:t>0.446</a:t>
+                      </a:r>
+                    </a:p>
+                  </a:txBody>
+                  <a:tcPr>
+                    <a:solidFill>
+                      <a:srgbClr val="EEF0E9"/>
+                    </a:solidFill>
+                  </a:tcPr>
+                </a:tc>
+                <a:extLst>
+                  <a:ext uri="{0D108BD9-81ED-4DB2-BD59-A6C34878D82A}">
+                    <a16:rowId xmlns:a16="http://schemas.microsoft.com/office/drawing/2014/main" val="10002"/>
+                  </a:ext>
+                </a:extLst>
+              </a:tr>
+              <a:tr h="548639">
+                <a:tc>
+                  <a:txBody>
+                    <a:bodyPr/>
+                    <a:lstStyle/>
+                    <a:p>
+                      <a:pPr algn="ctr">
+                        <a:defRPr sz="1400" b="0">
+                          <a:solidFill>
+                            <a:srgbClr val="1E2220"/>
+                          </a:solidFill>
+                        </a:defRPr>
+                      </a:pPr>
+                      <a:r>
+                        <a:t>Average error - before fix</a:t>
+                      </a:r>
+                    </a:p>
+                  </a:txBody>
+                  <a:tcPr>
+                    <a:solidFill>
+                      <a:srgbClr val="FFFFFF"/>
+                    </a:solidFill>
+                  </a:tcPr>
+                </a:tc>
+                <a:tc>
+                  <a:txBody>
+                    <a:bodyPr/>
+                    <a:lstStyle/>
+                    <a:p>
+                      <a:pPr algn="ctr">
+                        <a:defRPr sz="1400" b="0">
+                          <a:solidFill>
+                            <a:srgbClr val="1E2220"/>
+                          </a:solidFill>
+                        </a:defRPr>
+                      </a:pPr>
+                      <a:r>
+                        <a:t>28.19</a:t>
+                      </a:r>
+                    </a:p>
+                  </a:txBody>
+                  <a:tcPr>
+                    <a:solidFill>
+                      <a:srgbClr val="FFFFFF"/>
+                    </a:solidFill>
+                  </a:tcPr>
+                </a:tc>
+                <a:tc>
+                  <a:txBody>
+                    <a:bodyPr/>
+                    <a:lstStyle/>
+                    <a:p>
+                      <a:pPr algn="ctr">
+                        <a:defRPr sz="1400" b="0">
+                          <a:solidFill>
+                            <a:srgbClr val="1E2220"/>
+                          </a:solidFill>
+                        </a:defRPr>
+                      </a:pPr>
+                      <a:r>
+                        <a:t>29.59</a:t>
+                      </a:r>
+                    </a:p>
+                  </a:txBody>
+                  <a:tcPr>
+                    <a:solidFill>
+                      <a:srgbClr val="FFFFFF"/>
+                    </a:solidFill>
+                  </a:tcPr>
+                </a:tc>
+                <a:extLst>
+                  <a:ext uri="{0D108BD9-81ED-4DB2-BD59-A6C34878D82A}">
+                    <a16:rowId xmlns:a16="http://schemas.microsoft.com/office/drawing/2014/main" val="10003"/>
+                  </a:ext>
+                </a:extLst>
+              </a:tr>
+              <a:tr h="548639">
+                <a:tc>
+                  <a:txBody>
+                    <a:bodyPr/>
+                    <a:lstStyle/>
+                    <a:p>
+                      <a:pPr algn="ctr">
+                        <a:defRPr sz="1400" b="0">
+                          <a:solidFill>
+                            <a:srgbClr val="1E2220"/>
+                          </a:solidFill>
+                        </a:defRPr>
+                      </a:pPr>
+                      <a:r>
+                        <a:t>Average error - after fix</a:t>
+                      </a:r>
+                    </a:p>
+                  </a:txBody>
+                  <a:tcPr>
+                    <a:solidFill>
+                      <a:srgbClr val="EEF0E9"/>
+                    </a:solidFill>
+                  </a:tcPr>
+                </a:tc>
+                <a:tc>
+                  <a:txBody>
+                    <a:bodyPr/>
+                    <a:lstStyle/>
+                    <a:p>
+                      <a:pPr algn="ctr">
+                        <a:defRPr sz="1400" b="0">
+                          <a:solidFill>
+                            <a:srgbClr val="1E2220"/>
+                          </a:solidFill>
+                        </a:defRPr>
+                      </a:pPr>
+                      <a:r>
+                        <a:t>26.91</a:t>
+                      </a:r>
+                    </a:p>
+                  </a:txBody>
+                  <a:tcPr>
+                    <a:solidFill>
+                      <a:srgbClr val="EEF0E9"/>
+                    </a:solidFill>
+                  </a:tcPr>
+                </a:tc>
+                <a:tc>
+                  <a:txBody>
+                    <a:bodyPr/>
+                    <a:lstStyle/>
+                    <a:p>
+                      <a:pPr algn="ctr">
+                        <a:defRPr sz="1400" b="0">
+                          <a:solidFill>
+                            <a:srgbClr val="1E2220"/>
+                          </a:solidFill>
+                        </a:defRPr>
+                      </a:pPr>
+                      <a:r>
+                        <a:t>29.14</a:t>
+                      </a:r>
+                    </a:p>
+                  </a:txBody>
+                  <a:tcPr>
+                    <a:solidFill>
+                      <a:srgbClr val="EEF0E9"/>
+                    </a:solidFill>
+                  </a:tcPr>
+                </a:tc>
+                <a:extLst>
+                  <a:ext uri="{0D108BD9-81ED-4DB2-BD59-A6C34878D82A}">
+                    <a16:rowId xmlns:a16="http://schemas.microsoft.com/office/drawing/2014/main" val="10004"/>
+                  </a:ext>
+                </a:extLst>
+              </a:tr>
+              <a:tr h="548644">
+                <a:tc>
+                  <a:txBody>
+                    <a:bodyPr/>
+                    <a:lstStyle/>
+                    <a:p>
+                      <a:pPr algn="ctr">
+                        <a:defRPr sz="1400" b="1">
+                          <a:solidFill>
+                            <a:srgbClr val="1E2220"/>
+                          </a:solidFill>
+                        </a:defRPr>
+                      </a:pPr>
+                      <a:r>
+                        <a:t>Improvement</a:t>
+                      </a:r>
+                    </a:p>
+                  </a:txBody>
+                  <a:tcPr>
+                    <a:solidFill>
+                      <a:srgbClr val="FFFFFF"/>
+                    </a:solidFill>
+                  </a:tcPr>
+                </a:tc>
+                <a:tc>
+                  <a:txBody>
+                    <a:bodyPr/>
+                    <a:lstStyle/>
+                    <a:p>
+                      <a:pPr algn="ctr">
+                        <a:defRPr sz="1400" b="1">
+                          <a:solidFill>
+                            <a:srgbClr val="3A6B47"/>
+                          </a:solidFill>
+                        </a:defRPr>
+                      </a:pPr>
+                      <a:r>
+                        <a:t>Both up together</a:t>
+                      </a:r>
+                    </a:p>
+                  </a:txBody>
+                  <a:tcPr>
+                    <a:solidFill>
+                      <a:srgbClr val="FFFFFF"/>
+                    </a:solidFill>
+                  </a:tcPr>
+                </a:tc>
+                <a:tc>
+                  <a:txBody>
+                    <a:bodyPr/>
+                    <a:lstStyle/>
+                    <a:p>
+                      <a:pPr algn="ctr">
+                        <a:defRPr sz="1400" b="1">
+                          <a:solidFill>
+                            <a:srgbClr val="3A6B47"/>
+                          </a:solidFill>
+                        </a:defRPr>
+                      </a:pPr>
+                      <a:r>
+                        <a:t>Both up together</a:t>
+                      </a:r>
+                    </a:p>
+                  </a:txBody>
+                  <a:tcPr>
+                    <a:solidFill>
+                      <a:srgbClr val="FFFFFF"/>
+                    </a:solidFill>
+                  </a:tcPr>
+                </a:tc>
+                <a:extLst>
+                  <a:ext uri="{0D108BD9-81ED-4DB2-BD59-A6C34878D82A}">
+                    <a16:rowId xmlns:a16="http://schemas.microsoft.com/office/drawing/2014/main" val="10005"/>
+                  </a:ext>
+                </a:extLst>
+              </a:tr>
+            </a:tbl>
+          </a:graphicData>
+        </a:graphic>
+      </p:graphicFrame>
+    </p:spTree>
+  </p:cSld>
+  <p:clrMapOvr>
+    <a:masterClrMapping/>
+  </p:clrMapOvr>
+</p:sld>
+</file>
+
+<file path=ppt/slides/slide8.xml><?xml version="1.0" encoding="utf-8"?>
+<p:sld xmlns:a="http://schemas.openxmlformats.org/drawingml/2006/main" xmlns:r="http://schemas.openxmlformats.org/officeDocument/2006/relationships" xmlns:p="http://schemas.openxmlformats.org/presentationml/2006/main">
+  <p:cSld>
+    <p:spTree>
+      <p:nvGrpSpPr>
+        <p:cNvPr id="1" name=""/>
+        <p:cNvGrpSpPr/>
+        <p:nvPr/>
+      </p:nvGrpSpPr>
+      <p:grpSpPr>
+        <a:xfrm>
+          <a:off x="0" y="0"/>
+          <a:ext cx="0" cy="0"/>
+          <a:chOff x="0" y="0"/>
+          <a:chExt cx="0" cy="0"/>
+        </a:xfrm>
+      </p:grpSpPr>
+      <p:sp>
+        <p:nvSpPr>
+          <p:cNvPr id="2" name="Rectangle 1"/>
+          <p:cNvSpPr/>
+          <p:nvPr/>
+        </p:nvSpPr>
+        <p:spPr>
+          <a:xfrm>
+            <a:off x="0" y="0"/>
+            <a:ext cx="12192000" cy="960120"/>
+          </a:xfrm>
+          <a:prstGeom prst="rect">
+            <a:avLst/>
+          </a:prstGeom>
+          <a:solidFill>
+            <a:srgbClr val="1F3A4D"/>
+          </a:solidFill>
+          <a:ln>
+            <a:noFill/>
+          </a:ln>
+        </p:spPr>
+        <p:style>
+          <a:lnRef idx="1">
+            <a:schemeClr val="accent1"/>
+          </a:lnRef>
+          <a:fillRef idx="3">
+            <a:schemeClr val="accent1"/>
+          </a:fillRef>
+          <a:effectRef idx="2">
+            <a:schemeClr val="accent1"/>
+          </a:effectRef>
+          <a:fontRef idx="minor">
+            <a:schemeClr val="lt1"/>
+          </a:fontRef>
+        </p:style>
+        <p:txBody>
+          <a:bodyPr wrap="square" lIns="365760" tIns="73152" rtlCol="0" anchor="ctr"/>
+          <a:lstStyle/>
+          <a:p>
+            <a:pPr algn="ctr">
+              <a:defRPr sz="2800" b="1">
+                <a:solidFill>
+                  <a:srgbClr val="FFFFFF"/>
+                </a:solidFill>
+              </a:defRPr>
+            </a:pPr>
+            <a:r>
+              <a:t>A Cheaper Idea First: Can We Just Cap How Negative Price Goes?</a:t>
+            </a:r>
+          </a:p>
+          <a:p>
+            <a:pPr>
+              <a:defRPr sz="1400">
+                <a:solidFill>
+                  <a:srgbClr val="C8D2DA"/>
+                </a:solidFill>
+              </a:defRPr>
+            </a:pPr>
+            <a:r>
+              <a:t>A supervisor-suggested quick test, before the bigger investment</a:t>
+            </a:r>
+          </a:p>
+        </p:txBody>
+      </p:sp>
+      <p:sp>
+        <p:nvSpPr>
+          <p:cNvPr id="3" name="TextBox 2"/>
+          <p:cNvSpPr txBox="1"/>
+          <p:nvPr/>
+        </p:nvSpPr>
+        <p:spPr>
+          <a:xfrm>
+            <a:off x="11551920" y="6446520"/>
+            <a:ext cx="457200" cy="320040"/>
+          </a:xfrm>
+          <a:prstGeom prst="rect">
+            <a:avLst/>
+          </a:prstGeom>
+          <a:noFill/>
+        </p:spPr>
+        <p:txBody>
+          <a:bodyPr wrap="none">
+            <a:spAutoFit/>
+          </a:bodyPr>
+          <a:lstStyle/>
+          <a:p>
+            <a:pPr>
+              <a:defRPr sz="1100">
+                <a:solidFill>
+                  <a:srgbClr val="5A605C"/>
+                </a:solidFill>
+              </a:defRPr>
+            </a:pPr>
+            <a:r>
+              <a:t>8</a:t>
+            </a:r>
+          </a:p>
+        </p:txBody>
+      </p:sp>
+      <p:sp>
+        <p:nvSpPr>
+          <p:cNvPr id="4" name="TextBox 3"/>
+          <p:cNvSpPr txBox="1"/>
+          <p:nvPr/>
+        </p:nvSpPr>
+        <p:spPr>
+          <a:xfrm>
+            <a:off x="502920" y="1234440"/>
+            <a:ext cx="11155680" cy="5303520"/>
+          </a:xfrm>
+          <a:prstGeom prst="rect">
+            <a:avLst/>
+          </a:prstGeom>
+          <a:noFill/>
+        </p:spPr>
+        <p:txBody>
+          <a:bodyPr wrap="square">
+            <a:spAutoFit/>
+          </a:bodyPr>
+          <a:lstStyle/>
+          <a:p>
+            <a:pPr>
+              <a:spcAft>
+                <a:spcPts val="1000"/>
+              </a:spcAft>
+              <a:defRPr sz="1800" b="1">
+                <a:solidFill>
+                  <a:srgbClr val="1E2220"/>
+                </a:solidFill>
+              </a:defRPr>
+            </a:pPr>
+            <a:r>
+              <a:t>•  Before committing to the much bigger cross-border export/market-coupling build, tested a smaller idea first</a:t>
+            </a:r>
+          </a:p>
+          <a:p>
+            <a:pPr>
+              <a:spcAft>
+                <a:spcPts val="1000"/>
+              </a:spcAft>
+              <a:defRPr sz="1800" b="1">
+                <a:solidFill>
+                  <a:srgbClr val="1E2220"/>
+                </a:solidFill>
+              </a:defRPr>
+            </a:pPr>
+            <a:r>
+              <a:t>•  Our model reports very negative prices in summer (too much solar/wind) far more often than Brainpool's real forecast does</a:t>
+            </a:r>
+          </a:p>
+          <a:p>
+            <a:pPr>
+              <a:spcAft>
+                <a:spcPts val="1000"/>
+              </a:spcAft>
+              <a:defRPr sz="1800" b="1">
+                <a:solidFill>
+                  <a:srgbClr val="1E2220"/>
+                </a:solidFill>
+              </a:defRPr>
+            </a:pPr>
+            <a:r>
+              <a:t>•  Question: what if we simply limited how negative AMIRIS is allowed to report a price - would that alone close some of the correlation gap?</a:t>
+            </a:r>
+          </a:p>
+          <a:p>
+            <a:pPr>
+              <a:spcAft>
+                <a:spcPts val="1000"/>
+              </a:spcAft>
+              <a:defRPr sz="1800" b="1">
+                <a:solidFill>
+                  <a:srgbClr val="1E2220"/>
+                </a:solidFill>
+              </a:defRPr>
+            </a:pPr>
+            <a:r>
+              <a:t>•  First step: check whether this is even something we can configure</a:t>
+            </a:r>
+          </a:p>
+        </p:txBody>
+      </p:sp>
+    </p:spTree>
+  </p:cSld>
+  <p:clrMapOvr>
+    <a:masterClrMapping/>
+  </p:clrMapOvr>
+</p:sld>
+</file>
+
+<file path=ppt/slides/slide9.xml><?xml version="1.0" encoding="utf-8"?>
+<p:sld xmlns:a="http://schemas.openxmlformats.org/drawingml/2006/main" xmlns:r="http://schemas.openxmlformats.org/officeDocument/2006/relationships" xmlns:p="http://schemas.openxmlformats.org/presentationml/2006/main">
+  <p:cSld>
+    <p:spTree>
+      <p:nvGrpSpPr>
+        <p:cNvPr id="1" name=""/>
+        <p:cNvGrpSpPr/>
+        <p:nvPr/>
+      </p:nvGrpSpPr>
+      <p:grpSpPr>
+        <a:xfrm>
+          <a:off x="0" y="0"/>
+          <a:ext cx="0" cy="0"/>
+          <a:chOff x="0" y="0"/>
+          <a:chExt cx="0" cy="0"/>
+        </a:xfrm>
+      </p:grpSpPr>
+      <p:sp>
+        <p:nvSpPr>
+          <p:cNvPr id="2" name="Rectangle 1"/>
+          <p:cNvSpPr/>
+          <p:nvPr/>
+        </p:nvSpPr>
+        <p:spPr>
+          <a:xfrm>
+            <a:off x="0" y="0"/>
+            <a:ext cx="12192000" cy="960120"/>
+          </a:xfrm>
+          <a:prstGeom prst="rect">
+            <a:avLst/>
+          </a:prstGeom>
+          <a:solidFill>
+            <a:srgbClr val="1F3A4D"/>
+          </a:solidFill>
+          <a:ln>
+            <a:noFill/>
+          </a:ln>
+        </p:spPr>
+        <p:style>
+          <a:lnRef idx="1">
+            <a:schemeClr val="accent1"/>
+          </a:lnRef>
+          <a:fillRef idx="3">
+            <a:schemeClr val="accent1"/>
+          </a:fillRef>
+          <a:effectRef idx="2">
+            <a:schemeClr val="accent1"/>
+          </a:effectRef>
+          <a:fontRef idx="minor">
+            <a:schemeClr val="lt1"/>
+          </a:fontRef>
+        </p:style>
+        <p:txBody>
+          <a:bodyPr wrap="square" lIns="365760" tIns="73152" rtlCol="0" anchor="ctr"/>
+          <a:lstStyle/>
+          <a:p>
+            <a:pPr algn="ctr">
+              <a:defRPr sz="2800" b="1">
+                <a:solidFill>
+                  <a:srgbClr val="FFFFFF"/>
+                </a:solidFill>
+              </a:defRPr>
+            </a:pPr>
+            <a:r>
+              <a:t>What We Found: The Floor Already Exists - Inside AMIRIS Itself</a:t>
+            </a:r>
+          </a:p>
+        </p:txBody>
+      </p:sp>
+      <p:sp>
+        <p:nvSpPr>
+          <p:cNvPr id="3" name="TextBox 2"/>
+          <p:cNvSpPr txBox="1"/>
+          <p:nvPr/>
+        </p:nvSpPr>
+        <p:spPr>
+          <a:xfrm>
+            <a:off x="11551920" y="6446520"/>
+            <a:ext cx="457200" cy="320040"/>
+          </a:xfrm>
+          <a:prstGeom prst="rect">
+            <a:avLst/>
+          </a:prstGeom>
+          <a:noFill/>
+        </p:spPr>
+        <p:txBody>
+          <a:bodyPr wrap="none">
+            <a:spAutoFit/>
+          </a:bodyPr>
+          <a:lstStyle/>
+          <a:p>
+            <a:pPr>
+              <a:defRPr sz="1100">
+                <a:solidFill>
+                  <a:srgbClr val="5A605C"/>
+                </a:solidFill>
+              </a:defRPr>
+            </a:pPr>
+            <a:r>
+              <a:t>9</a:t>
+            </a:r>
+          </a:p>
+        </p:txBody>
+      </p:sp>
+      <p:sp>
+        <p:nvSpPr>
+          <p:cNvPr id="4" name="TextBox 3"/>
+          <p:cNvSpPr txBox="1"/>
+          <p:nvPr/>
+        </p:nvSpPr>
+        <p:spPr>
+          <a:xfrm>
+            <a:off x="502920" y="1234440"/>
+            <a:ext cx="11155680" cy="5303520"/>
+          </a:xfrm>
+          <a:prstGeom prst="rect">
+            <a:avLst/>
+          </a:prstGeom>
+          <a:noFill/>
+        </p:spPr>
+        <p:txBody>
+          <a:bodyPr wrap="square">
+            <a:spAutoFit/>
+          </a:bodyPr>
+          <a:lstStyle/>
+          <a:p>
+            <a:pPr>
+              <a:spcAft>
+                <a:spcPts val="1000"/>
+              </a:spcAft>
+              <a:defRPr sz="1800" b="1">
+                <a:solidFill>
+                  <a:srgbClr val="1E2220"/>
+                </a:solidFill>
+              </a:defRPr>
+            </a:pPr>
+            <a:r>
+              <a:t>•  Opened up AMIRIS's actual underlying program (not just our settings file) to check</a:t>
+            </a:r>
+          </a:p>
+          <a:p>
+            <a:pPr>
+              <a:spcAft>
+                <a:spcPts val="1000"/>
+              </a:spcAft>
+              <a:defRPr sz="1800" b="1">
+                <a:solidFill>
+                  <a:srgbClr val="1E2220"/>
+                </a:solidFill>
+              </a:defRPr>
+            </a:pPr>
+            <a:r>
+              <a:t>•  Found AMIRIS already has a hard limit: -500 EUR/MWh, built directly into the program's core</a:t>
+            </a:r>
+          </a:p>
+          <a:p>
+            <a:pPr>
+              <a:spcAft>
+                <a:spcPts val="1000"/>
+              </a:spcAft>
+              <a:defRPr sz="1800" b="1">
+                <a:solidFill>
+                  <a:srgbClr val="1E2220"/>
+                </a:solidFill>
+              </a:defRPr>
+            </a:pPr>
+            <a:r>
+              <a:t>•  This isn't arbitrary - it matches the real limit used by Europe's actual electricity exchanges</a:t>
+            </a:r>
+          </a:p>
+          <a:p>
+            <a:pPr>
+              <a:spcAft>
+                <a:spcPts val="1000"/>
+              </a:spcAft>
+              <a:defRPr sz="1800" b="1">
+                <a:solidFill>
+                  <a:srgbClr val="1E2220"/>
+                </a:solidFill>
+              </a:defRPr>
+            </a:pPr>
+            <a:r>
+              <a:t>•  It is NOT something we can change from our scenario settings - changing it means editing and rebuilding AMIRIS's own program, a much bigger step</a:t>
+            </a:r>
+          </a:p>
+          <a:p>
+            <a:pPr>
+              <a:spcAft>
+                <a:spcPts val="1000"/>
+              </a:spcAft>
+              <a:defRPr sz="1800" b="1">
+                <a:solidFill>
+                  <a:srgbClr val="1E2220"/>
+                </a:solidFill>
+              </a:defRPr>
+            </a:pPr>
+            <a:r>
+              <a:t>•  So a smaller, faster test was run first: adjust the REPORTED price after the fact, purely to see if a different limit was even worth the bigger effort</a:t>
             </a:r>
           </a:p>
         </p:txBody>
